--- a/Part 1 Lectures/6_CNN_Intro.pptx
+++ b/Part 1 Lectures/6_CNN_Intro.pptx
@@ -5,7 +5,7 @@
     <p:sldMasterId id="2147483666" r:id="rId1"/>
   </p:sldMasterIdLst>
   <p:notesMasterIdLst>
-    <p:notesMasterId r:id="rId47"/>
+    <p:notesMasterId r:id="rId46"/>
   </p:notesMasterIdLst>
   <p:sldIdLst>
     <p:sldId id="397" r:id="rId2"/>
@@ -24,35 +24,34 @@
     <p:sldId id="438" r:id="rId15"/>
     <p:sldId id="441" r:id="rId16"/>
     <p:sldId id="440" r:id="rId17"/>
-    <p:sldId id="439" r:id="rId18"/>
-    <p:sldId id="398" r:id="rId19"/>
-    <p:sldId id="399" r:id="rId20"/>
-    <p:sldId id="400" r:id="rId21"/>
-    <p:sldId id="401" r:id="rId22"/>
-    <p:sldId id="402" r:id="rId23"/>
-    <p:sldId id="410" r:id="rId24"/>
-    <p:sldId id="404" r:id="rId25"/>
-    <p:sldId id="405" r:id="rId26"/>
-    <p:sldId id="403" r:id="rId27"/>
-    <p:sldId id="406" r:id="rId28"/>
-    <p:sldId id="408" r:id="rId29"/>
-    <p:sldId id="411" r:id="rId30"/>
-    <p:sldId id="412" r:id="rId31"/>
-    <p:sldId id="417" r:id="rId32"/>
-    <p:sldId id="407" r:id="rId33"/>
-    <p:sldId id="415" r:id="rId34"/>
-    <p:sldId id="421" r:id="rId35"/>
-    <p:sldId id="422" r:id="rId36"/>
-    <p:sldId id="423" r:id="rId37"/>
-    <p:sldId id="409" r:id="rId38"/>
-    <p:sldId id="416" r:id="rId39"/>
-    <p:sldId id="420" r:id="rId40"/>
-    <p:sldId id="425" r:id="rId41"/>
-    <p:sldId id="424" r:id="rId42"/>
-    <p:sldId id="426" r:id="rId43"/>
-    <p:sldId id="427" r:id="rId44"/>
-    <p:sldId id="428" r:id="rId45"/>
-    <p:sldId id="413" r:id="rId46"/>
+    <p:sldId id="398" r:id="rId18"/>
+    <p:sldId id="399" r:id="rId19"/>
+    <p:sldId id="400" r:id="rId20"/>
+    <p:sldId id="401" r:id="rId21"/>
+    <p:sldId id="402" r:id="rId22"/>
+    <p:sldId id="410" r:id="rId23"/>
+    <p:sldId id="404" r:id="rId24"/>
+    <p:sldId id="405" r:id="rId25"/>
+    <p:sldId id="403" r:id="rId26"/>
+    <p:sldId id="406" r:id="rId27"/>
+    <p:sldId id="408" r:id="rId28"/>
+    <p:sldId id="411" r:id="rId29"/>
+    <p:sldId id="412" r:id="rId30"/>
+    <p:sldId id="417" r:id="rId31"/>
+    <p:sldId id="407" r:id="rId32"/>
+    <p:sldId id="415" r:id="rId33"/>
+    <p:sldId id="421" r:id="rId34"/>
+    <p:sldId id="422" r:id="rId35"/>
+    <p:sldId id="423" r:id="rId36"/>
+    <p:sldId id="409" r:id="rId37"/>
+    <p:sldId id="416" r:id="rId38"/>
+    <p:sldId id="420" r:id="rId39"/>
+    <p:sldId id="425" r:id="rId40"/>
+    <p:sldId id="424" r:id="rId41"/>
+    <p:sldId id="426" r:id="rId42"/>
+    <p:sldId id="427" r:id="rId43"/>
+    <p:sldId id="428" r:id="rId44"/>
+    <p:sldId id="413" r:id="rId45"/>
   </p:sldIdLst>
   <p:sldSz cx="10083800" cy="5670550"/>
   <p:notesSz cx="10083800" cy="5670550"/>
@@ -170,6 +169,27 @@
 </p:presentation>
 </file>
 
+<file path=ppt/changesInfos/changesInfo1.xml><?xml version="1.0" encoding="utf-8"?>
+<pc:chgInfo xmlns:a="http://schemas.openxmlformats.org/drawingml/2006/main" xmlns:r="http://schemas.openxmlformats.org/officeDocument/2006/relationships" xmlns:ac="http://schemas.microsoft.com/office/drawing/2013/main/command" xmlns:pc="http://schemas.microsoft.com/office/powerpoint/2013/main/command">
+  <pc:docChgLst>
+    <pc:chgData name="Israel Trejo" userId="94abe8331a44785d" providerId="LiveId" clId="{C64EC362-DB82-4CB5-B399-A3CE20D8262C}"/>
+    <pc:docChg chg="delSld">
+      <pc:chgData name="Israel Trejo" userId="94abe8331a44785d" providerId="LiveId" clId="{C64EC362-DB82-4CB5-B399-A3CE20D8262C}" dt="2025-09-20T21:00:45.523" v="0" actId="2696"/>
+      <pc:docMkLst>
+        <pc:docMk/>
+      </pc:docMkLst>
+      <pc:sldChg chg="del">
+        <pc:chgData name="Israel Trejo" userId="94abe8331a44785d" providerId="LiveId" clId="{C64EC362-DB82-4CB5-B399-A3CE20D8262C}" dt="2025-09-20T21:00:45.523" v="0" actId="2696"/>
+        <pc:sldMkLst>
+          <pc:docMk/>
+          <pc:sldMk cId="0" sldId="439"/>
+        </pc:sldMkLst>
+      </pc:sldChg>
+    </pc:docChg>
+  </pc:docChgLst>
+</pc:chgInfo>
+</file>
+
 <file path=ppt/notesMasters/notesMaster1.xml><?xml version="1.0" encoding="utf-8"?>
 <p:notesMaster xmlns:a="http://schemas.openxmlformats.org/drawingml/2006/main" xmlns:r="http://schemas.openxmlformats.org/officeDocument/2006/relationships" xmlns:p="http://schemas.openxmlformats.org/presentationml/2006/main">
   <p:cSld>
@@ -252,7 +272,7 @@
           <a:p>
             <a:fld id="{FC78DA6D-BA35-47CD-BB0B-F04D34A1F301}" type="datetimeFigureOut">
               <a:rPr lang="en-US" smtClean="0"/>
-              <a:t>8/8/2023</a:t>
+              <a:t>9/20/2025</a:t>
             </a:fld>
             <a:endParaRPr lang="en-US"/>
           </a:p>
@@ -2184,7 +2204,7 @@
                 </a:solidFill>
               </a:rPr>
               <a:pPr defTabSz="756117"/>
-              <a:t>8/8/2023</a:t>
+              <a:t>9/20/2025</a:t>
             </a:fld>
             <a:endParaRPr lang="en-US" sz="1488">
               <a:solidFill>
@@ -8361,7 +8381,7 @@
               <a:buFontTx/>
               <a:buNone/>
             </a:pPr>
-            <a:endParaRPr lang="en-US" altLang="en-US" sz="1488" b="1">
+            <a:endParaRPr lang="en-US" altLang="en-US" sz="1488" b="1" dirty="0">
               <a:solidFill>
                 <a:srgbClr val="292929"/>
               </a:solidFill>
@@ -8378,7 +8398,7 @@
               <a:buNone/>
             </a:pPr>
             <a:r>
-              <a:rPr lang="en-US" altLang="en-US" sz="1488">
+              <a:rPr lang="en-US" altLang="en-US" sz="1488" dirty="0">
                 <a:solidFill>
                   <a:srgbClr val="292929"/>
                 </a:solidFill>
@@ -8387,7 +8407,7 @@
               <a:t>Each pixel of the feature map is linked to one neuron, we then use m ** 2 neurons and each of them observes a field of size </a:t>
             </a:r>
             <a:r>
-              <a:rPr lang="en-US" altLang="en-US" sz="1488" b="1">
+              <a:rPr lang="en-US" altLang="en-US" sz="1488" b="1" dirty="0" err="1">
                 <a:solidFill>
                   <a:srgbClr val="292929"/>
                 </a:solidFill>
@@ -8396,7 +8416,7 @@
               <a:t>pxp</a:t>
             </a:r>
             <a:r>
-              <a:rPr lang="en-US" altLang="en-US" sz="1488">
+              <a:rPr lang="en-US" altLang="en-US" sz="1488" dirty="0">
                 <a:solidFill>
                   <a:srgbClr val="292929"/>
                 </a:solidFill>
@@ -8405,7 +8425,7 @@
               <a:t> with p ** 2 weights (one per filter coefficient) and one bias. </a:t>
             </a:r>
             <a:r>
-              <a:rPr lang="en-US" altLang="en-US" sz="1488">
+              <a:rPr lang="en-US" altLang="en-US" sz="1488" dirty="0">
                 <a:solidFill>
                   <a:srgbClr val="292929"/>
                 </a:solidFill>
@@ -8415,7 +8435,7 @@
               <a:t>There are </a:t>
             </a:r>
             <a:r>
-              <a:rPr lang="en-US" altLang="en-US" sz="1488" b="1">
+              <a:rPr lang="en-US" altLang="en-US" sz="1488" b="1" dirty="0">
                 <a:solidFill>
                   <a:srgbClr val="292929"/>
                 </a:solidFill>
@@ -8424,7 +8444,7 @@
               <a:t>p ** 2 + 1</a:t>
             </a:r>
             <a:r>
-              <a:rPr lang="en-US" altLang="en-US" sz="1488">
+              <a:rPr lang="en-US" altLang="en-US" sz="1488" dirty="0">
                 <a:solidFill>
                   <a:srgbClr val="292929"/>
                 </a:solidFill>
@@ -8442,7 +8462,7 @@
               <a:buFontTx/>
               <a:buNone/>
             </a:pPr>
-            <a:endParaRPr lang="en-US" altLang="en-US" sz="1488">
+            <a:endParaRPr lang="en-US" altLang="en-US" sz="1488" dirty="0">
               <a:solidFill>
                 <a:srgbClr val="292929"/>
               </a:solidFill>
@@ -8458,7 +8478,7 @@
               <a:buFontTx/>
               <a:buNone/>
             </a:pPr>
-            <a:endParaRPr lang="en-US" altLang="en-US" sz="1488">
+            <a:endParaRPr lang="en-US" altLang="en-US" sz="1488" dirty="0">
               <a:solidFill>
                 <a:srgbClr val="292929"/>
               </a:solidFill>
@@ -8475,7 +8495,7 @@
               <a:buNone/>
             </a:pPr>
             <a:r>
-              <a:rPr lang="en-US" altLang="en-US" sz="1488">
+              <a:rPr lang="en-US" altLang="en-US" sz="1488" dirty="0">
                 <a:solidFill>
                   <a:srgbClr val="292929"/>
                 </a:solidFill>
@@ -8493,7 +8513,7 @@
               <a:buFontTx/>
               <a:buNone/>
             </a:pPr>
-            <a:endParaRPr lang="en-US" altLang="en-US" sz="1488">
+            <a:endParaRPr lang="en-US" altLang="en-US" sz="1488" dirty="0">
               <a:solidFill>
                 <a:srgbClr val="292929"/>
               </a:solidFill>
@@ -8510,7 +8530,7 @@
               <a:buNone/>
             </a:pPr>
             <a:r>
-              <a:rPr lang="en-US" altLang="en-US" sz="1488">
+              <a:rPr lang="en-US" altLang="en-US" sz="1488" dirty="0">
                 <a:solidFill>
                   <a:srgbClr val="292929"/>
                 </a:solidFill>
@@ -8519,7 +8539,7 @@
               <a:t>With only </a:t>
             </a:r>
             <a:r>
-              <a:rPr lang="en-US" altLang="en-US" sz="1488" b="1">
+              <a:rPr lang="en-US" altLang="en-US" sz="1488" b="1" dirty="0">
                 <a:solidFill>
                   <a:srgbClr val="292929"/>
                 </a:solidFill>
@@ -8528,7 +8548,7 @@
               <a:t>26(5*5 + 1) parameters to learn</a:t>
             </a:r>
             <a:r>
-              <a:rPr lang="en-US" altLang="en-US" sz="1488">
+              <a:rPr lang="en-US" altLang="en-US" sz="1488" dirty="0">
                 <a:solidFill>
                   <a:srgbClr val="292929"/>
                 </a:solidFill>
@@ -9430,7 +9450,7 @@
               <a:buNone/>
             </a:pPr>
             <a:r>
-              <a:rPr lang="en-US" altLang="en-US" sz="1985">
+              <a:rPr lang="en-US" altLang="en-US" sz="1985" dirty="0">
                 <a:solidFill>
                   <a:srgbClr val="292929"/>
                 </a:solidFill>
@@ -9439,7 +9459,7 @@
               <a:t>To classify the image into a category(cat or dog)</a:t>
             </a:r>
             <a:r>
-              <a:rPr lang="en-US" altLang="en-US" sz="1985">
+              <a:rPr lang="en-US" altLang="en-US" sz="1985" dirty="0">
                 <a:solidFill>
                   <a:srgbClr val="292929"/>
                 </a:solidFill>
@@ -9449,7 +9469,7 @@
               <a:t></a:t>
             </a:r>
             <a:r>
-              <a:rPr lang="en-US" altLang="en-US" sz="1985">
+              <a:rPr lang="en-US" altLang="en-US" sz="1985" dirty="0">
                 <a:solidFill>
                   <a:srgbClr val="292929"/>
                 </a:solidFill>
@@ -9457,7 +9477,7 @@
               </a:rPr>
               <a:t> set up a multilayer perceptron (Multi-Layer Perceptron) on top of the last convolution layer. </a:t>
             </a:r>
-            <a:endParaRPr lang="en-US" altLang="en-US" sz="1985"/>
+            <a:endParaRPr lang="en-US" altLang="en-US" sz="1985" dirty="0"/>
           </a:p>
         </p:txBody>
       </p:sp>
@@ -9696,7 +9716,7 @@
               <a:buNone/>
             </a:pPr>
             <a:r>
-              <a:rPr lang="en-US" altLang="en-US" sz="1985">
+              <a:rPr lang="en-US" altLang="en-US" sz="1985" dirty="0">
                 <a:solidFill>
                   <a:srgbClr val="292929"/>
                 </a:solidFill>
@@ -9704,7 +9724,7 @@
               </a:rPr>
               <a:t>Since feeding a MLP requires input vectors (one-dimension arrays or 1d arrays), we need to “flatten” the output feature map. </a:t>
             </a:r>
-            <a:endParaRPr lang="en-US" altLang="en-US" sz="1985"/>
+            <a:endParaRPr lang="en-US" altLang="en-US" sz="1985" dirty="0"/>
           </a:p>
         </p:txBody>
       </p:sp>
@@ -9717,209 +9737,6 @@
 </file>
 
 <file path=ppt/slides/slide17.xml><?xml version="1.0" encoding="utf-8"?>
-<p:sld xmlns:a="http://schemas.openxmlformats.org/drawingml/2006/main" xmlns:r="http://schemas.openxmlformats.org/officeDocument/2006/relationships" xmlns:p="http://schemas.openxmlformats.org/presentationml/2006/main">
-  <p:cSld>
-    <p:spTree>
-      <p:nvGrpSpPr>
-        <p:cNvPr id="1" name=""/>
-        <p:cNvGrpSpPr/>
-        <p:nvPr/>
-      </p:nvGrpSpPr>
-      <p:grpSpPr>
-        <a:xfrm>
-          <a:off x="0" y="0"/>
-          <a:ext cx="0" cy="0"/>
-          <a:chOff x="0" y="0"/>
-          <a:chExt cx="0" cy="0"/>
-        </a:xfrm>
-      </p:grpSpPr>
-      <p:sp>
-        <p:nvSpPr>
-          <p:cNvPr id="2" name="Title 1">
-            <a:extLst>
-              <a:ext uri="{FF2B5EF4-FFF2-40B4-BE49-F238E27FC236}">
-                <a16:creationId xmlns:a16="http://schemas.microsoft.com/office/drawing/2014/main" id="{EA5FB5D8-9ECF-FD0E-B492-4943BCDE6D2A}"/>
-              </a:ext>
-            </a:extLst>
-          </p:cNvPr>
-          <p:cNvSpPr txBox="1">
-            <a:spLocks/>
-          </p:cNvSpPr>
-          <p:nvPr/>
-        </p:nvSpPr>
-        <p:spPr>
-          <a:xfrm>
-            <a:off x="2908300" y="244475"/>
-            <a:ext cx="2394232" cy="945092"/>
-          </a:xfrm>
-          <a:prstGeom prst="rect">
-            <a:avLst/>
-          </a:prstGeom>
-        </p:spPr>
-        <p:txBody>
-          <a:bodyPr/>
-          <a:lstStyle>
-            <a:lvl1pPr algn="l" rtl="0" eaLnBrk="0" fontAlgn="base" hangingPunct="0">
-              <a:spcBef>
-                <a:spcPct val="0"/>
-              </a:spcBef>
-              <a:spcAft>
-                <a:spcPct val="0"/>
-              </a:spcAft>
-              <a:defRPr sz="3800">
-                <a:solidFill>
-                  <a:schemeClr val="tx2"/>
-                </a:solidFill>
-                <a:latin typeface="+mj-lt"/>
-                <a:ea typeface="MS PGothic" panose="020B0600070205080204" pitchFamily="34" charset="-128"/>
-                <a:cs typeface="+mj-cs"/>
-              </a:defRPr>
-            </a:lvl1pPr>
-            <a:lvl2pPr algn="l" rtl="0" eaLnBrk="0" fontAlgn="base" hangingPunct="0">
-              <a:spcBef>
-                <a:spcPct val="0"/>
-              </a:spcBef>
-              <a:spcAft>
-                <a:spcPct val="0"/>
-              </a:spcAft>
-              <a:defRPr sz="3800">
-                <a:solidFill>
-                  <a:schemeClr val="tx2"/>
-                </a:solidFill>
-                <a:latin typeface="Arial" charset="0"/>
-                <a:ea typeface="MS PGothic" panose="020B0600070205080204" pitchFamily="34" charset="-128"/>
-                <a:cs typeface="Arial" charset="0"/>
-              </a:defRPr>
-            </a:lvl2pPr>
-            <a:lvl3pPr algn="l" rtl="0" eaLnBrk="0" fontAlgn="base" hangingPunct="0">
-              <a:spcBef>
-                <a:spcPct val="0"/>
-              </a:spcBef>
-              <a:spcAft>
-                <a:spcPct val="0"/>
-              </a:spcAft>
-              <a:defRPr sz="3800">
-                <a:solidFill>
-                  <a:schemeClr val="tx2"/>
-                </a:solidFill>
-                <a:latin typeface="Arial" charset="0"/>
-                <a:ea typeface="MS PGothic" panose="020B0600070205080204" pitchFamily="34" charset="-128"/>
-                <a:cs typeface="Arial" charset="0"/>
-              </a:defRPr>
-            </a:lvl3pPr>
-            <a:lvl4pPr algn="l" rtl="0" eaLnBrk="0" fontAlgn="base" hangingPunct="0">
-              <a:spcBef>
-                <a:spcPct val="0"/>
-              </a:spcBef>
-              <a:spcAft>
-                <a:spcPct val="0"/>
-              </a:spcAft>
-              <a:defRPr sz="3800">
-                <a:solidFill>
-                  <a:schemeClr val="tx2"/>
-                </a:solidFill>
-                <a:latin typeface="Arial" charset="0"/>
-                <a:ea typeface="MS PGothic" panose="020B0600070205080204" pitchFamily="34" charset="-128"/>
-                <a:cs typeface="Arial" charset="0"/>
-              </a:defRPr>
-            </a:lvl4pPr>
-            <a:lvl5pPr algn="l" rtl="0" eaLnBrk="0" fontAlgn="base" hangingPunct="0">
-              <a:spcBef>
-                <a:spcPct val="0"/>
-              </a:spcBef>
-              <a:spcAft>
-                <a:spcPct val="0"/>
-              </a:spcAft>
-              <a:defRPr sz="3800">
-                <a:solidFill>
-                  <a:schemeClr val="tx2"/>
-                </a:solidFill>
-                <a:latin typeface="Arial" charset="0"/>
-                <a:ea typeface="MS PGothic" panose="020B0600070205080204" pitchFamily="34" charset="-128"/>
-                <a:cs typeface="Arial" charset="0"/>
-              </a:defRPr>
-            </a:lvl5pPr>
-            <a:lvl6pPr marL="457200" algn="l" rtl="0" fontAlgn="base">
-              <a:spcBef>
-                <a:spcPct val="0"/>
-              </a:spcBef>
-              <a:spcAft>
-                <a:spcPct val="0"/>
-              </a:spcAft>
-              <a:defRPr sz="3800">
-                <a:solidFill>
-                  <a:schemeClr val="tx2"/>
-                </a:solidFill>
-                <a:latin typeface="Arial" charset="0"/>
-                <a:cs typeface="Arial" charset="0"/>
-              </a:defRPr>
-            </a:lvl6pPr>
-            <a:lvl7pPr marL="914400" algn="l" rtl="0" fontAlgn="base">
-              <a:spcBef>
-                <a:spcPct val="0"/>
-              </a:spcBef>
-              <a:spcAft>
-                <a:spcPct val="0"/>
-              </a:spcAft>
-              <a:defRPr sz="3800">
-                <a:solidFill>
-                  <a:schemeClr val="tx2"/>
-                </a:solidFill>
-                <a:latin typeface="Arial" charset="0"/>
-                <a:cs typeface="Arial" charset="0"/>
-              </a:defRPr>
-            </a:lvl7pPr>
-            <a:lvl8pPr marL="1371600" algn="l" rtl="0" fontAlgn="base">
-              <a:spcBef>
-                <a:spcPct val="0"/>
-              </a:spcBef>
-              <a:spcAft>
-                <a:spcPct val="0"/>
-              </a:spcAft>
-              <a:defRPr sz="3800">
-                <a:solidFill>
-                  <a:schemeClr val="tx2"/>
-                </a:solidFill>
-                <a:latin typeface="Arial" charset="0"/>
-                <a:cs typeface="Arial" charset="0"/>
-              </a:defRPr>
-            </a:lvl8pPr>
-            <a:lvl9pPr marL="1828800" algn="l" rtl="0" fontAlgn="base">
-              <a:spcBef>
-                <a:spcPct val="0"/>
-              </a:spcBef>
-              <a:spcAft>
-                <a:spcPct val="0"/>
-              </a:spcAft>
-              <a:defRPr sz="3800">
-                <a:solidFill>
-                  <a:schemeClr val="tx2"/>
-                </a:solidFill>
-                <a:latin typeface="Arial" charset="0"/>
-                <a:cs typeface="Arial" charset="0"/>
-              </a:defRPr>
-            </a:lvl9pPr>
-          </a:lstStyle>
-          <a:p>
-            <a:pPr>
-              <a:defRPr/>
-            </a:pPr>
-            <a:r>
-              <a:rPr lang="en-US" altLang="en-US" sz="3142" kern="0" dirty="0"/>
-              <a:t>Example </a:t>
-            </a:r>
-          </a:p>
-        </p:txBody>
-      </p:sp>
-    </p:spTree>
-  </p:cSld>
-  <p:clrMapOvr>
-    <a:masterClrMapping/>
-  </p:clrMapOvr>
-</p:sld>
-</file>
-
-<file path=ppt/slides/slide18.xml><?xml version="1.0" encoding="utf-8"?>
 <p:sld xmlns:a="http://schemas.openxmlformats.org/drawingml/2006/main" xmlns:r="http://schemas.openxmlformats.org/officeDocument/2006/relationships" xmlns:p="http://schemas.openxmlformats.org/presentationml/2006/main">
   <p:cSld>
     <p:spTree>
@@ -10638,7 +10455,7 @@
 </p:sld>
 </file>
 
-<file path=ppt/slides/slide19.xml><?xml version="1.0" encoding="utf-8"?>
+<file path=ppt/slides/slide18.xml><?xml version="1.0" encoding="utf-8"?>
 <p:sld xmlns:a="http://schemas.openxmlformats.org/drawingml/2006/main" xmlns:r="http://schemas.openxmlformats.org/officeDocument/2006/relationships" xmlns:p="http://schemas.openxmlformats.org/presentationml/2006/main">
   <p:cSld>
     <p:spTree>
@@ -11187,862 +11004,7 @@
 </p:sld>
 </file>
 
-<file path=ppt/slides/slide2.xml><?xml version="1.0" encoding="utf-8"?>
-<p:sld xmlns:a="http://schemas.openxmlformats.org/drawingml/2006/main" xmlns:r="http://schemas.openxmlformats.org/officeDocument/2006/relationships" xmlns:p="http://schemas.openxmlformats.org/presentationml/2006/main">
-  <p:cSld>
-    <p:spTree>
-      <p:nvGrpSpPr>
-        <p:cNvPr id="1" name=""/>
-        <p:cNvGrpSpPr/>
-        <p:nvPr/>
-      </p:nvGrpSpPr>
-      <p:grpSpPr>
-        <a:xfrm>
-          <a:off x="0" y="0"/>
-          <a:ext cx="0" cy="0"/>
-          <a:chOff x="0" y="0"/>
-          <a:chExt cx="0" cy="0"/>
-        </a:xfrm>
-      </p:grpSpPr>
-      <p:sp>
-        <p:nvSpPr>
-          <p:cNvPr id="15362" name="TextBox 2">
-            <a:extLst>
-              <a:ext uri="{FF2B5EF4-FFF2-40B4-BE49-F238E27FC236}">
-                <a16:creationId xmlns:a16="http://schemas.microsoft.com/office/drawing/2014/main" id="{BA8D56DB-8DDF-0CEF-3EF8-8EED01A3F509}"/>
-              </a:ext>
-            </a:extLst>
-          </p:cNvPr>
-          <p:cNvSpPr txBox="1">
-            <a:spLocks noChangeArrowheads="1"/>
-          </p:cNvSpPr>
-          <p:nvPr/>
-        </p:nvSpPr>
-        <p:spPr bwMode="auto">
-          <a:xfrm>
-            <a:off x="1289473" y="320675"/>
-            <a:ext cx="3780367" cy="1237198"/>
-          </a:xfrm>
-          <a:prstGeom prst="rect">
-            <a:avLst/>
-          </a:prstGeom>
-          <a:noFill/>
-          <a:ln>
-            <a:noFill/>
-          </a:ln>
-          <a:extLst>
-            <a:ext uri="{909E8E84-426E-40DD-AFC4-6F175D3DCCD1}">
-              <a14:hiddenFill xmlns:a14="http://schemas.microsoft.com/office/drawing/2010/main">
-                <a:solidFill>
-                  <a:srgbClr val="FFFFFF"/>
-                </a:solidFill>
-              </a14:hiddenFill>
-            </a:ext>
-            <a:ext uri="{91240B29-F687-4F45-9708-019B960494DF}">
-              <a14:hiddenLine xmlns:a14="http://schemas.microsoft.com/office/drawing/2010/main" w="9525">
-                <a:solidFill>
-                  <a:srgbClr val="000000"/>
-                </a:solidFill>
-                <a:miter lim="800000"/>
-                <a:headEnd/>
-                <a:tailEnd/>
-              </a14:hiddenLine>
-            </a:ext>
-          </a:extLst>
-        </p:spPr>
-        <p:txBody>
-          <a:bodyPr>
-            <a:spAutoFit/>
-          </a:bodyPr>
-          <a:lstStyle>
-            <a:lvl1pPr>
-              <a:spcBef>
-                <a:spcPct val="20000"/>
-              </a:spcBef>
-              <a:buClr>
-                <a:schemeClr val="accent1"/>
-              </a:buClr>
-              <a:buFont typeface="Wingdings" panose="05000000000000000000" pitchFamily="2" charset="2"/>
-              <a:buChar char="l"/>
-              <a:defRPr sz="3200">
-                <a:solidFill>
-                  <a:schemeClr val="tx1"/>
-                </a:solidFill>
-                <a:latin typeface="Arial" panose="020B0604020202020204" pitchFamily="34" charset="0"/>
-                <a:ea typeface="MS PGothic" panose="020B0600070205080204" pitchFamily="34" charset="-128"/>
-                <a:cs typeface="Arial" panose="020B0604020202020204" pitchFamily="34" charset="0"/>
-              </a:defRPr>
-            </a:lvl1pPr>
-            <a:lvl2pPr marL="742950" indent="-285750">
-              <a:spcBef>
-                <a:spcPct val="20000"/>
-              </a:spcBef>
-              <a:buClr>
-                <a:schemeClr val="accent1"/>
-              </a:buClr>
-              <a:buFont typeface="Wingdings" panose="05000000000000000000" pitchFamily="2" charset="2"/>
-              <a:buChar char="¡"/>
-              <a:defRPr sz="2700">
-                <a:solidFill>
-                  <a:schemeClr val="tx1"/>
-                </a:solidFill>
-                <a:latin typeface="Arial" panose="020B0604020202020204" pitchFamily="34" charset="0"/>
-                <a:ea typeface="Arial" panose="020B0604020202020204" pitchFamily="34" charset="0"/>
-                <a:cs typeface="Arial" panose="020B0604020202020204" pitchFamily="34" charset="0"/>
-              </a:defRPr>
-            </a:lvl2pPr>
-            <a:lvl3pPr marL="1143000" indent="-228600">
-              <a:spcBef>
-                <a:spcPct val="20000"/>
-              </a:spcBef>
-              <a:buClr>
-                <a:schemeClr val="accent1"/>
-              </a:buClr>
-              <a:buFont typeface="Wingdings" panose="05000000000000000000" pitchFamily="2" charset="2"/>
-              <a:buChar char="l"/>
-              <a:defRPr sz="2300">
-                <a:solidFill>
-                  <a:schemeClr val="tx1"/>
-                </a:solidFill>
-                <a:latin typeface="Arial" panose="020B0604020202020204" pitchFamily="34" charset="0"/>
-                <a:ea typeface="Arial" panose="020B0604020202020204" pitchFamily="34" charset="0"/>
-                <a:cs typeface="Arial" panose="020B0604020202020204" pitchFamily="34" charset="0"/>
-              </a:defRPr>
-            </a:lvl3pPr>
-            <a:lvl4pPr marL="1600200" indent="-228600">
-              <a:spcBef>
-                <a:spcPct val="20000"/>
-              </a:spcBef>
-              <a:buClr>
-                <a:schemeClr val="accent1"/>
-              </a:buClr>
-              <a:buChar char="•"/>
-              <a:defRPr sz="2000">
-                <a:solidFill>
-                  <a:schemeClr val="tx1"/>
-                </a:solidFill>
-                <a:latin typeface="Arial" panose="020B0604020202020204" pitchFamily="34" charset="0"/>
-                <a:ea typeface="Arial" panose="020B0604020202020204" pitchFamily="34" charset="0"/>
-                <a:cs typeface="Arial" panose="020B0604020202020204" pitchFamily="34" charset="0"/>
-              </a:defRPr>
-            </a:lvl4pPr>
-            <a:lvl5pPr marL="2057400" indent="-228600">
-              <a:spcBef>
-                <a:spcPct val="20000"/>
-              </a:spcBef>
-              <a:buClr>
-                <a:schemeClr val="accent1"/>
-              </a:buClr>
-              <a:buFont typeface="Wingdings" panose="05000000000000000000" pitchFamily="2" charset="2"/>
-              <a:buChar char=""/>
-              <a:defRPr sz="2000">
-                <a:solidFill>
-                  <a:schemeClr val="tx1"/>
-                </a:solidFill>
-                <a:latin typeface="Arial" panose="020B0604020202020204" pitchFamily="34" charset="0"/>
-                <a:ea typeface="Arial" panose="020B0604020202020204" pitchFamily="34" charset="0"/>
-                <a:cs typeface="Arial" panose="020B0604020202020204" pitchFamily="34" charset="0"/>
-              </a:defRPr>
-            </a:lvl5pPr>
-            <a:lvl6pPr marL="2514600" indent="-228600" eaLnBrk="0" fontAlgn="base" hangingPunct="0">
-              <a:spcBef>
-                <a:spcPct val="20000"/>
-              </a:spcBef>
-              <a:spcAft>
-                <a:spcPct val="0"/>
-              </a:spcAft>
-              <a:buClr>
-                <a:schemeClr val="accent1"/>
-              </a:buClr>
-              <a:buFont typeface="Wingdings" panose="05000000000000000000" pitchFamily="2" charset="2"/>
-              <a:buChar char=""/>
-              <a:defRPr sz="2000">
-                <a:solidFill>
-                  <a:schemeClr val="tx1"/>
-                </a:solidFill>
-                <a:latin typeface="Arial" panose="020B0604020202020204" pitchFamily="34" charset="0"/>
-                <a:ea typeface="Arial" panose="020B0604020202020204" pitchFamily="34" charset="0"/>
-                <a:cs typeface="Arial" panose="020B0604020202020204" pitchFamily="34" charset="0"/>
-              </a:defRPr>
-            </a:lvl6pPr>
-            <a:lvl7pPr marL="2971800" indent="-228600" eaLnBrk="0" fontAlgn="base" hangingPunct="0">
-              <a:spcBef>
-                <a:spcPct val="20000"/>
-              </a:spcBef>
-              <a:spcAft>
-                <a:spcPct val="0"/>
-              </a:spcAft>
-              <a:buClr>
-                <a:schemeClr val="accent1"/>
-              </a:buClr>
-              <a:buFont typeface="Wingdings" panose="05000000000000000000" pitchFamily="2" charset="2"/>
-              <a:buChar char=""/>
-              <a:defRPr sz="2000">
-                <a:solidFill>
-                  <a:schemeClr val="tx1"/>
-                </a:solidFill>
-                <a:latin typeface="Arial" panose="020B0604020202020204" pitchFamily="34" charset="0"/>
-                <a:ea typeface="Arial" panose="020B0604020202020204" pitchFamily="34" charset="0"/>
-                <a:cs typeface="Arial" panose="020B0604020202020204" pitchFamily="34" charset="0"/>
-              </a:defRPr>
-            </a:lvl7pPr>
-            <a:lvl8pPr marL="3429000" indent="-228600" eaLnBrk="0" fontAlgn="base" hangingPunct="0">
-              <a:spcBef>
-                <a:spcPct val="20000"/>
-              </a:spcBef>
-              <a:spcAft>
-                <a:spcPct val="0"/>
-              </a:spcAft>
-              <a:buClr>
-                <a:schemeClr val="accent1"/>
-              </a:buClr>
-              <a:buFont typeface="Wingdings" panose="05000000000000000000" pitchFamily="2" charset="2"/>
-              <a:buChar char=""/>
-              <a:defRPr sz="2000">
-                <a:solidFill>
-                  <a:schemeClr val="tx1"/>
-                </a:solidFill>
-                <a:latin typeface="Arial" panose="020B0604020202020204" pitchFamily="34" charset="0"/>
-                <a:ea typeface="Arial" panose="020B0604020202020204" pitchFamily="34" charset="0"/>
-                <a:cs typeface="Arial" panose="020B0604020202020204" pitchFamily="34" charset="0"/>
-              </a:defRPr>
-            </a:lvl8pPr>
-            <a:lvl9pPr marL="3886200" indent="-228600" eaLnBrk="0" fontAlgn="base" hangingPunct="0">
-              <a:spcBef>
-                <a:spcPct val="20000"/>
-              </a:spcBef>
-              <a:spcAft>
-                <a:spcPct val="0"/>
-              </a:spcAft>
-              <a:buClr>
-                <a:schemeClr val="accent1"/>
-              </a:buClr>
-              <a:buFont typeface="Wingdings" panose="05000000000000000000" pitchFamily="2" charset="2"/>
-              <a:buChar char=""/>
-              <a:defRPr sz="2000">
-                <a:solidFill>
-                  <a:schemeClr val="tx1"/>
-                </a:solidFill>
-                <a:latin typeface="Arial" panose="020B0604020202020204" pitchFamily="34" charset="0"/>
-                <a:ea typeface="Arial" panose="020B0604020202020204" pitchFamily="34" charset="0"/>
-                <a:cs typeface="Arial" panose="020B0604020202020204" pitchFamily="34" charset="0"/>
-              </a:defRPr>
-            </a:lvl9pPr>
-          </a:lstStyle>
-          <a:p>
-            <a:pPr eaLnBrk="1" hangingPunct="1">
-              <a:spcBef>
-                <a:spcPct val="0"/>
-              </a:spcBef>
-              <a:buClrTx/>
-              <a:buFontTx/>
-              <a:buNone/>
-            </a:pPr>
-            <a:r>
-              <a:rPr lang="en-US" altLang="en-US" sz="1488" dirty="0">
-                <a:solidFill>
-                  <a:srgbClr val="FF0000"/>
-                </a:solidFill>
-                <a:latin typeface="charter"/>
-              </a:rPr>
-              <a:t>Multilayer perceptron (MLP) </a:t>
-            </a:r>
-          </a:p>
-          <a:p>
-            <a:pPr eaLnBrk="1" hangingPunct="1">
-              <a:spcBef>
-                <a:spcPct val="0"/>
-              </a:spcBef>
-              <a:buClrTx/>
-              <a:buFontTx/>
-              <a:buNone/>
-            </a:pPr>
-            <a:r>
-              <a:rPr lang="en-US" altLang="en-US" sz="1488" dirty="0">
-                <a:solidFill>
-                  <a:srgbClr val="FF0000"/>
-                </a:solidFill>
-                <a:latin typeface="charter"/>
-              </a:rPr>
-              <a:t>Very common</a:t>
-            </a:r>
-          </a:p>
-          <a:p>
-            <a:pPr eaLnBrk="1" hangingPunct="1">
-              <a:spcBef>
-                <a:spcPct val="0"/>
-              </a:spcBef>
-              <a:buClrTx/>
-              <a:buFontTx/>
-              <a:buNone/>
-            </a:pPr>
-            <a:r>
-              <a:rPr lang="en-US" altLang="en-US" sz="1488" dirty="0">
-                <a:solidFill>
-                  <a:srgbClr val="292929"/>
-                </a:solidFill>
-                <a:latin typeface="charter"/>
-              </a:rPr>
-              <a:t>Provide very good results (great accuracy)</a:t>
-            </a:r>
-          </a:p>
-          <a:p>
-            <a:pPr eaLnBrk="1" hangingPunct="1">
-              <a:spcBef>
-                <a:spcPct val="0"/>
-              </a:spcBef>
-              <a:buClrTx/>
-              <a:buFontTx/>
-              <a:buNone/>
-            </a:pPr>
-            <a:r>
-              <a:rPr lang="en-US" altLang="en-US" sz="1488" dirty="0">
-                <a:solidFill>
-                  <a:srgbClr val="292929"/>
-                </a:solidFill>
-                <a:latin typeface="charter"/>
-              </a:rPr>
-              <a:t> the training time remains reasonable</a:t>
-            </a:r>
-          </a:p>
-          <a:p>
-            <a:pPr eaLnBrk="1" hangingPunct="1">
-              <a:spcBef>
-                <a:spcPct val="0"/>
-              </a:spcBef>
-              <a:buClrTx/>
-              <a:buFontTx/>
-              <a:buNone/>
-            </a:pPr>
-            <a:r>
-              <a:rPr lang="en-US" altLang="en-US" sz="1488" dirty="0">
-                <a:solidFill>
-                  <a:srgbClr val="292929"/>
-                </a:solidFill>
-                <a:latin typeface="charter"/>
-              </a:rPr>
-              <a:t>Good for small to average datasets</a:t>
-            </a:r>
-            <a:endParaRPr lang="en-US" altLang="en-US" sz="1488" dirty="0"/>
-          </a:p>
-        </p:txBody>
-      </p:sp>
-      <p:sp>
-        <p:nvSpPr>
-          <p:cNvPr id="15363" name="TextBox 4">
-            <a:extLst>
-              <a:ext uri="{FF2B5EF4-FFF2-40B4-BE49-F238E27FC236}">
-                <a16:creationId xmlns:a16="http://schemas.microsoft.com/office/drawing/2014/main" id="{F3EBB5AF-DBCF-2C04-B755-9E6567DEB935}"/>
-              </a:ext>
-            </a:extLst>
-          </p:cNvPr>
-          <p:cNvSpPr txBox="1">
-            <a:spLocks noChangeArrowheads="1"/>
-          </p:cNvSpPr>
-          <p:nvPr/>
-        </p:nvSpPr>
-        <p:spPr bwMode="auto">
-          <a:xfrm>
-            <a:off x="4348833" y="2016196"/>
-            <a:ext cx="3780367" cy="1008225"/>
-          </a:xfrm>
-          <a:prstGeom prst="rect">
-            <a:avLst/>
-          </a:prstGeom>
-          <a:noFill/>
-          <a:ln>
-            <a:noFill/>
-          </a:ln>
-          <a:extLst>
-            <a:ext uri="{909E8E84-426E-40DD-AFC4-6F175D3DCCD1}">
-              <a14:hiddenFill xmlns:a14="http://schemas.microsoft.com/office/drawing/2010/main">
-                <a:solidFill>
-                  <a:srgbClr val="FFFFFF"/>
-                </a:solidFill>
-              </a14:hiddenFill>
-            </a:ext>
-            <a:ext uri="{91240B29-F687-4F45-9708-019B960494DF}">
-              <a14:hiddenLine xmlns:a14="http://schemas.microsoft.com/office/drawing/2010/main" w="9525">
-                <a:solidFill>
-                  <a:srgbClr val="000000"/>
-                </a:solidFill>
-                <a:miter lim="800000"/>
-                <a:headEnd/>
-                <a:tailEnd/>
-              </a14:hiddenLine>
-            </a:ext>
-          </a:extLst>
-        </p:spPr>
-        <p:txBody>
-          <a:bodyPr>
-            <a:spAutoFit/>
-          </a:bodyPr>
-          <a:lstStyle>
-            <a:lvl1pPr>
-              <a:spcBef>
-                <a:spcPct val="20000"/>
-              </a:spcBef>
-              <a:buClr>
-                <a:schemeClr val="accent1"/>
-              </a:buClr>
-              <a:buFont typeface="Wingdings" panose="05000000000000000000" pitchFamily="2" charset="2"/>
-              <a:buChar char="l"/>
-              <a:defRPr sz="3200">
-                <a:solidFill>
-                  <a:schemeClr val="tx1"/>
-                </a:solidFill>
-                <a:latin typeface="Arial" panose="020B0604020202020204" pitchFamily="34" charset="0"/>
-                <a:ea typeface="MS PGothic" panose="020B0600070205080204" pitchFamily="34" charset="-128"/>
-                <a:cs typeface="Arial" panose="020B0604020202020204" pitchFamily="34" charset="0"/>
-              </a:defRPr>
-            </a:lvl1pPr>
-            <a:lvl2pPr marL="742950" indent="-285750">
-              <a:spcBef>
-                <a:spcPct val="20000"/>
-              </a:spcBef>
-              <a:buClr>
-                <a:schemeClr val="accent1"/>
-              </a:buClr>
-              <a:buFont typeface="Wingdings" panose="05000000000000000000" pitchFamily="2" charset="2"/>
-              <a:buChar char="¡"/>
-              <a:defRPr sz="2700">
-                <a:solidFill>
-                  <a:schemeClr val="tx1"/>
-                </a:solidFill>
-                <a:latin typeface="Arial" panose="020B0604020202020204" pitchFamily="34" charset="0"/>
-                <a:ea typeface="Arial" panose="020B0604020202020204" pitchFamily="34" charset="0"/>
-                <a:cs typeface="Arial" panose="020B0604020202020204" pitchFamily="34" charset="0"/>
-              </a:defRPr>
-            </a:lvl2pPr>
-            <a:lvl3pPr marL="1143000" indent="-228600">
-              <a:spcBef>
-                <a:spcPct val="20000"/>
-              </a:spcBef>
-              <a:buClr>
-                <a:schemeClr val="accent1"/>
-              </a:buClr>
-              <a:buFont typeface="Wingdings" panose="05000000000000000000" pitchFamily="2" charset="2"/>
-              <a:buChar char="l"/>
-              <a:defRPr sz="2300">
-                <a:solidFill>
-                  <a:schemeClr val="tx1"/>
-                </a:solidFill>
-                <a:latin typeface="Arial" panose="020B0604020202020204" pitchFamily="34" charset="0"/>
-                <a:ea typeface="Arial" panose="020B0604020202020204" pitchFamily="34" charset="0"/>
-                <a:cs typeface="Arial" panose="020B0604020202020204" pitchFamily="34" charset="0"/>
-              </a:defRPr>
-            </a:lvl3pPr>
-            <a:lvl4pPr marL="1600200" indent="-228600">
-              <a:spcBef>
-                <a:spcPct val="20000"/>
-              </a:spcBef>
-              <a:buClr>
-                <a:schemeClr val="accent1"/>
-              </a:buClr>
-              <a:buChar char="•"/>
-              <a:defRPr sz="2000">
-                <a:solidFill>
-                  <a:schemeClr val="tx1"/>
-                </a:solidFill>
-                <a:latin typeface="Arial" panose="020B0604020202020204" pitchFamily="34" charset="0"/>
-                <a:ea typeface="Arial" panose="020B0604020202020204" pitchFamily="34" charset="0"/>
-                <a:cs typeface="Arial" panose="020B0604020202020204" pitchFamily="34" charset="0"/>
-              </a:defRPr>
-            </a:lvl4pPr>
-            <a:lvl5pPr marL="2057400" indent="-228600">
-              <a:spcBef>
-                <a:spcPct val="20000"/>
-              </a:spcBef>
-              <a:buClr>
-                <a:schemeClr val="accent1"/>
-              </a:buClr>
-              <a:buFont typeface="Wingdings" panose="05000000000000000000" pitchFamily="2" charset="2"/>
-              <a:buChar char=""/>
-              <a:defRPr sz="2000">
-                <a:solidFill>
-                  <a:schemeClr val="tx1"/>
-                </a:solidFill>
-                <a:latin typeface="Arial" panose="020B0604020202020204" pitchFamily="34" charset="0"/>
-                <a:ea typeface="Arial" panose="020B0604020202020204" pitchFamily="34" charset="0"/>
-                <a:cs typeface="Arial" panose="020B0604020202020204" pitchFamily="34" charset="0"/>
-              </a:defRPr>
-            </a:lvl5pPr>
-            <a:lvl6pPr marL="2514600" indent="-228600" eaLnBrk="0" fontAlgn="base" hangingPunct="0">
-              <a:spcBef>
-                <a:spcPct val="20000"/>
-              </a:spcBef>
-              <a:spcAft>
-                <a:spcPct val="0"/>
-              </a:spcAft>
-              <a:buClr>
-                <a:schemeClr val="accent1"/>
-              </a:buClr>
-              <a:buFont typeface="Wingdings" panose="05000000000000000000" pitchFamily="2" charset="2"/>
-              <a:buChar char=""/>
-              <a:defRPr sz="2000">
-                <a:solidFill>
-                  <a:schemeClr val="tx1"/>
-                </a:solidFill>
-                <a:latin typeface="Arial" panose="020B0604020202020204" pitchFamily="34" charset="0"/>
-                <a:ea typeface="Arial" panose="020B0604020202020204" pitchFamily="34" charset="0"/>
-                <a:cs typeface="Arial" panose="020B0604020202020204" pitchFamily="34" charset="0"/>
-              </a:defRPr>
-            </a:lvl6pPr>
-            <a:lvl7pPr marL="2971800" indent="-228600" eaLnBrk="0" fontAlgn="base" hangingPunct="0">
-              <a:spcBef>
-                <a:spcPct val="20000"/>
-              </a:spcBef>
-              <a:spcAft>
-                <a:spcPct val="0"/>
-              </a:spcAft>
-              <a:buClr>
-                <a:schemeClr val="accent1"/>
-              </a:buClr>
-              <a:buFont typeface="Wingdings" panose="05000000000000000000" pitchFamily="2" charset="2"/>
-              <a:buChar char=""/>
-              <a:defRPr sz="2000">
-                <a:solidFill>
-                  <a:schemeClr val="tx1"/>
-                </a:solidFill>
-                <a:latin typeface="Arial" panose="020B0604020202020204" pitchFamily="34" charset="0"/>
-                <a:ea typeface="Arial" panose="020B0604020202020204" pitchFamily="34" charset="0"/>
-                <a:cs typeface="Arial" panose="020B0604020202020204" pitchFamily="34" charset="0"/>
-              </a:defRPr>
-            </a:lvl7pPr>
-            <a:lvl8pPr marL="3429000" indent="-228600" eaLnBrk="0" fontAlgn="base" hangingPunct="0">
-              <a:spcBef>
-                <a:spcPct val="20000"/>
-              </a:spcBef>
-              <a:spcAft>
-                <a:spcPct val="0"/>
-              </a:spcAft>
-              <a:buClr>
-                <a:schemeClr val="accent1"/>
-              </a:buClr>
-              <a:buFont typeface="Wingdings" panose="05000000000000000000" pitchFamily="2" charset="2"/>
-              <a:buChar char=""/>
-              <a:defRPr sz="2000">
-                <a:solidFill>
-                  <a:schemeClr val="tx1"/>
-                </a:solidFill>
-                <a:latin typeface="Arial" panose="020B0604020202020204" pitchFamily="34" charset="0"/>
-                <a:ea typeface="Arial" panose="020B0604020202020204" pitchFamily="34" charset="0"/>
-                <a:cs typeface="Arial" panose="020B0604020202020204" pitchFamily="34" charset="0"/>
-              </a:defRPr>
-            </a:lvl8pPr>
-            <a:lvl9pPr marL="3886200" indent="-228600" eaLnBrk="0" fontAlgn="base" hangingPunct="0">
-              <a:spcBef>
-                <a:spcPct val="20000"/>
-              </a:spcBef>
-              <a:spcAft>
-                <a:spcPct val="0"/>
-              </a:spcAft>
-              <a:buClr>
-                <a:schemeClr val="accent1"/>
-              </a:buClr>
-              <a:buFont typeface="Wingdings" panose="05000000000000000000" pitchFamily="2" charset="2"/>
-              <a:buChar char=""/>
-              <a:defRPr sz="2000">
-                <a:solidFill>
-                  <a:schemeClr val="tx1"/>
-                </a:solidFill>
-                <a:latin typeface="Arial" panose="020B0604020202020204" pitchFamily="34" charset="0"/>
-                <a:ea typeface="Arial" panose="020B0604020202020204" pitchFamily="34" charset="0"/>
-                <a:cs typeface="Arial" panose="020B0604020202020204" pitchFamily="34" charset="0"/>
-              </a:defRPr>
-            </a:lvl9pPr>
-          </a:lstStyle>
-          <a:p>
-            <a:pPr eaLnBrk="1" hangingPunct="1">
-              <a:spcBef>
-                <a:spcPct val="0"/>
-              </a:spcBef>
-              <a:buClrTx/>
-              <a:buFontTx/>
-              <a:buNone/>
-            </a:pPr>
-            <a:r>
-              <a:rPr lang="en-US" altLang="en-US" sz="1488" dirty="0">
-                <a:solidFill>
-                  <a:srgbClr val="292929"/>
-                </a:solidFill>
-                <a:latin typeface="charter"/>
-              </a:rPr>
-              <a:t>For larger datasets with larger images, the number of parameters for the model increases exponentially, therefore, </a:t>
-            </a:r>
-            <a:r>
-              <a:rPr lang="en-US" altLang="en-US" sz="1488" dirty="0">
-                <a:solidFill>
-                  <a:srgbClr val="FF0000"/>
-                </a:solidFill>
-                <a:latin typeface="charter"/>
-              </a:rPr>
-              <a:t>training becomes longer and performance poorer</a:t>
-            </a:r>
-            <a:endParaRPr lang="en-US" altLang="en-US" sz="1488" dirty="0">
-              <a:solidFill>
-                <a:srgbClr val="FF0000"/>
-              </a:solidFill>
-            </a:endParaRPr>
-          </a:p>
-        </p:txBody>
-      </p:sp>
-      <p:sp>
-        <p:nvSpPr>
-          <p:cNvPr id="15364" name="TextBox 6">
-            <a:extLst>
-              <a:ext uri="{FF2B5EF4-FFF2-40B4-BE49-F238E27FC236}">
-                <a16:creationId xmlns:a16="http://schemas.microsoft.com/office/drawing/2014/main" id="{682D8A30-5D71-F5DF-2CE9-34CD004595D8}"/>
-              </a:ext>
-            </a:extLst>
-          </p:cNvPr>
-          <p:cNvSpPr txBox="1">
-            <a:spLocks noChangeArrowheads="1"/>
-          </p:cNvSpPr>
-          <p:nvPr/>
-        </p:nvSpPr>
-        <p:spPr bwMode="auto">
-          <a:xfrm>
-            <a:off x="2017607" y="3134554"/>
-            <a:ext cx="3780367" cy="779252"/>
-          </a:xfrm>
-          <a:prstGeom prst="rect">
-            <a:avLst/>
-          </a:prstGeom>
-          <a:noFill/>
-          <a:ln>
-            <a:noFill/>
-          </a:ln>
-          <a:extLst>
-            <a:ext uri="{909E8E84-426E-40DD-AFC4-6F175D3DCCD1}">
-              <a14:hiddenFill xmlns:a14="http://schemas.microsoft.com/office/drawing/2010/main">
-                <a:solidFill>
-                  <a:srgbClr val="FFFFFF"/>
-                </a:solidFill>
-              </a14:hiddenFill>
-            </a:ext>
-            <a:ext uri="{91240B29-F687-4F45-9708-019B960494DF}">
-              <a14:hiddenLine xmlns:a14="http://schemas.microsoft.com/office/drawing/2010/main" w="9525">
-                <a:solidFill>
-                  <a:srgbClr val="000000"/>
-                </a:solidFill>
-                <a:miter lim="800000"/>
-                <a:headEnd/>
-                <a:tailEnd/>
-              </a14:hiddenLine>
-            </a:ext>
-          </a:extLst>
-        </p:spPr>
-        <p:txBody>
-          <a:bodyPr>
-            <a:spAutoFit/>
-          </a:bodyPr>
-          <a:lstStyle>
-            <a:lvl1pPr>
-              <a:spcBef>
-                <a:spcPct val="20000"/>
-              </a:spcBef>
-              <a:buClr>
-                <a:schemeClr val="accent1"/>
-              </a:buClr>
-              <a:buFont typeface="Wingdings" panose="05000000000000000000" pitchFamily="2" charset="2"/>
-              <a:buChar char="l"/>
-              <a:defRPr sz="3200">
-                <a:solidFill>
-                  <a:schemeClr val="tx1"/>
-                </a:solidFill>
-                <a:latin typeface="Arial" panose="020B0604020202020204" pitchFamily="34" charset="0"/>
-                <a:ea typeface="MS PGothic" panose="020B0600070205080204" pitchFamily="34" charset="-128"/>
-                <a:cs typeface="Arial" panose="020B0604020202020204" pitchFamily="34" charset="0"/>
-              </a:defRPr>
-            </a:lvl1pPr>
-            <a:lvl2pPr marL="742950" indent="-285750">
-              <a:spcBef>
-                <a:spcPct val="20000"/>
-              </a:spcBef>
-              <a:buClr>
-                <a:schemeClr val="accent1"/>
-              </a:buClr>
-              <a:buFont typeface="Wingdings" panose="05000000000000000000" pitchFamily="2" charset="2"/>
-              <a:buChar char="¡"/>
-              <a:defRPr sz="2700">
-                <a:solidFill>
-                  <a:schemeClr val="tx1"/>
-                </a:solidFill>
-                <a:latin typeface="Arial" panose="020B0604020202020204" pitchFamily="34" charset="0"/>
-                <a:ea typeface="Arial" panose="020B0604020202020204" pitchFamily="34" charset="0"/>
-                <a:cs typeface="Arial" panose="020B0604020202020204" pitchFamily="34" charset="0"/>
-              </a:defRPr>
-            </a:lvl2pPr>
-            <a:lvl3pPr marL="1143000" indent="-228600">
-              <a:spcBef>
-                <a:spcPct val="20000"/>
-              </a:spcBef>
-              <a:buClr>
-                <a:schemeClr val="accent1"/>
-              </a:buClr>
-              <a:buFont typeface="Wingdings" panose="05000000000000000000" pitchFamily="2" charset="2"/>
-              <a:buChar char="l"/>
-              <a:defRPr sz="2300">
-                <a:solidFill>
-                  <a:schemeClr val="tx1"/>
-                </a:solidFill>
-                <a:latin typeface="Arial" panose="020B0604020202020204" pitchFamily="34" charset="0"/>
-                <a:ea typeface="Arial" panose="020B0604020202020204" pitchFamily="34" charset="0"/>
-                <a:cs typeface="Arial" panose="020B0604020202020204" pitchFamily="34" charset="0"/>
-              </a:defRPr>
-            </a:lvl3pPr>
-            <a:lvl4pPr marL="1600200" indent="-228600">
-              <a:spcBef>
-                <a:spcPct val="20000"/>
-              </a:spcBef>
-              <a:buClr>
-                <a:schemeClr val="accent1"/>
-              </a:buClr>
-              <a:buChar char="•"/>
-              <a:defRPr sz="2000">
-                <a:solidFill>
-                  <a:schemeClr val="tx1"/>
-                </a:solidFill>
-                <a:latin typeface="Arial" panose="020B0604020202020204" pitchFamily="34" charset="0"/>
-                <a:ea typeface="Arial" panose="020B0604020202020204" pitchFamily="34" charset="0"/>
-                <a:cs typeface="Arial" panose="020B0604020202020204" pitchFamily="34" charset="0"/>
-              </a:defRPr>
-            </a:lvl4pPr>
-            <a:lvl5pPr marL="2057400" indent="-228600">
-              <a:spcBef>
-                <a:spcPct val="20000"/>
-              </a:spcBef>
-              <a:buClr>
-                <a:schemeClr val="accent1"/>
-              </a:buClr>
-              <a:buFont typeface="Wingdings" panose="05000000000000000000" pitchFamily="2" charset="2"/>
-              <a:buChar char=""/>
-              <a:defRPr sz="2000">
-                <a:solidFill>
-                  <a:schemeClr val="tx1"/>
-                </a:solidFill>
-                <a:latin typeface="Arial" panose="020B0604020202020204" pitchFamily="34" charset="0"/>
-                <a:ea typeface="Arial" panose="020B0604020202020204" pitchFamily="34" charset="0"/>
-                <a:cs typeface="Arial" panose="020B0604020202020204" pitchFamily="34" charset="0"/>
-              </a:defRPr>
-            </a:lvl5pPr>
-            <a:lvl6pPr marL="2514600" indent="-228600" eaLnBrk="0" fontAlgn="base" hangingPunct="0">
-              <a:spcBef>
-                <a:spcPct val="20000"/>
-              </a:spcBef>
-              <a:spcAft>
-                <a:spcPct val="0"/>
-              </a:spcAft>
-              <a:buClr>
-                <a:schemeClr val="accent1"/>
-              </a:buClr>
-              <a:buFont typeface="Wingdings" panose="05000000000000000000" pitchFamily="2" charset="2"/>
-              <a:buChar char=""/>
-              <a:defRPr sz="2000">
-                <a:solidFill>
-                  <a:schemeClr val="tx1"/>
-                </a:solidFill>
-                <a:latin typeface="Arial" panose="020B0604020202020204" pitchFamily="34" charset="0"/>
-                <a:ea typeface="Arial" panose="020B0604020202020204" pitchFamily="34" charset="0"/>
-                <a:cs typeface="Arial" panose="020B0604020202020204" pitchFamily="34" charset="0"/>
-              </a:defRPr>
-            </a:lvl6pPr>
-            <a:lvl7pPr marL="2971800" indent="-228600" eaLnBrk="0" fontAlgn="base" hangingPunct="0">
-              <a:spcBef>
-                <a:spcPct val="20000"/>
-              </a:spcBef>
-              <a:spcAft>
-                <a:spcPct val="0"/>
-              </a:spcAft>
-              <a:buClr>
-                <a:schemeClr val="accent1"/>
-              </a:buClr>
-              <a:buFont typeface="Wingdings" panose="05000000000000000000" pitchFamily="2" charset="2"/>
-              <a:buChar char=""/>
-              <a:defRPr sz="2000">
-                <a:solidFill>
-                  <a:schemeClr val="tx1"/>
-                </a:solidFill>
-                <a:latin typeface="Arial" panose="020B0604020202020204" pitchFamily="34" charset="0"/>
-                <a:ea typeface="Arial" panose="020B0604020202020204" pitchFamily="34" charset="0"/>
-                <a:cs typeface="Arial" panose="020B0604020202020204" pitchFamily="34" charset="0"/>
-              </a:defRPr>
-            </a:lvl7pPr>
-            <a:lvl8pPr marL="3429000" indent="-228600" eaLnBrk="0" fontAlgn="base" hangingPunct="0">
-              <a:spcBef>
-                <a:spcPct val="20000"/>
-              </a:spcBef>
-              <a:spcAft>
-                <a:spcPct val="0"/>
-              </a:spcAft>
-              <a:buClr>
-                <a:schemeClr val="accent1"/>
-              </a:buClr>
-              <a:buFont typeface="Wingdings" panose="05000000000000000000" pitchFamily="2" charset="2"/>
-              <a:buChar char=""/>
-              <a:defRPr sz="2000">
-                <a:solidFill>
-                  <a:schemeClr val="tx1"/>
-                </a:solidFill>
-                <a:latin typeface="Arial" panose="020B0604020202020204" pitchFamily="34" charset="0"/>
-                <a:ea typeface="Arial" panose="020B0604020202020204" pitchFamily="34" charset="0"/>
-                <a:cs typeface="Arial" panose="020B0604020202020204" pitchFamily="34" charset="0"/>
-              </a:defRPr>
-            </a:lvl8pPr>
-            <a:lvl9pPr marL="3886200" indent="-228600" eaLnBrk="0" fontAlgn="base" hangingPunct="0">
-              <a:spcBef>
-                <a:spcPct val="20000"/>
-              </a:spcBef>
-              <a:spcAft>
-                <a:spcPct val="0"/>
-              </a:spcAft>
-              <a:buClr>
-                <a:schemeClr val="accent1"/>
-              </a:buClr>
-              <a:buFont typeface="Wingdings" panose="05000000000000000000" pitchFamily="2" charset="2"/>
-              <a:buChar char=""/>
-              <a:defRPr sz="2000">
-                <a:solidFill>
-                  <a:schemeClr val="tx1"/>
-                </a:solidFill>
-                <a:latin typeface="Arial" panose="020B0604020202020204" pitchFamily="34" charset="0"/>
-                <a:ea typeface="Arial" panose="020B0604020202020204" pitchFamily="34" charset="0"/>
-                <a:cs typeface="Arial" panose="020B0604020202020204" pitchFamily="34" charset="0"/>
-              </a:defRPr>
-            </a:lvl9pPr>
-          </a:lstStyle>
-          <a:p>
-            <a:pPr eaLnBrk="1" hangingPunct="1">
-              <a:spcBef>
-                <a:spcPct val="0"/>
-              </a:spcBef>
-              <a:buClrTx/>
-              <a:buFontTx/>
-              <a:buNone/>
-            </a:pPr>
-            <a:r>
-              <a:rPr lang="en-US" altLang="en-US" sz="1488">
-                <a:solidFill>
-                  <a:srgbClr val="292929"/>
-                </a:solidFill>
-                <a:latin typeface="charter"/>
-              </a:rPr>
-              <a:t>MLPs are extremely efficient to solve several categories of problem such as classification, estimation, approximation, recognition, etc</a:t>
-            </a:r>
-            <a:endParaRPr lang="en-US" altLang="en-US" sz="1488"/>
-          </a:p>
-        </p:txBody>
-      </p:sp>
-    </p:spTree>
-  </p:cSld>
-  <p:clrMapOvr>
-    <a:masterClrMapping/>
-  </p:clrMapOvr>
-</p:sld>
-</file>
-
-<file path=ppt/slides/slide20.xml><?xml version="1.0" encoding="utf-8"?>
+<file path=ppt/slides/slide19.xml><?xml version="1.0" encoding="utf-8"?>
 <p:sld xmlns:a="http://schemas.openxmlformats.org/drawingml/2006/main" xmlns:r="http://schemas.openxmlformats.org/officeDocument/2006/relationships" xmlns:p="http://schemas.openxmlformats.org/presentationml/2006/main">
   <p:cSld>
     <p:spTree>
@@ -12293,7 +11255,862 @@
 </p:sld>
 </file>
 
-<file path=ppt/slides/slide21.xml><?xml version="1.0" encoding="utf-8"?>
+<file path=ppt/slides/slide2.xml><?xml version="1.0" encoding="utf-8"?>
+<p:sld xmlns:a="http://schemas.openxmlformats.org/drawingml/2006/main" xmlns:r="http://schemas.openxmlformats.org/officeDocument/2006/relationships" xmlns:p="http://schemas.openxmlformats.org/presentationml/2006/main">
+  <p:cSld>
+    <p:spTree>
+      <p:nvGrpSpPr>
+        <p:cNvPr id="1" name=""/>
+        <p:cNvGrpSpPr/>
+        <p:nvPr/>
+      </p:nvGrpSpPr>
+      <p:grpSpPr>
+        <a:xfrm>
+          <a:off x="0" y="0"/>
+          <a:ext cx="0" cy="0"/>
+          <a:chOff x="0" y="0"/>
+          <a:chExt cx="0" cy="0"/>
+        </a:xfrm>
+      </p:grpSpPr>
+      <p:sp>
+        <p:nvSpPr>
+          <p:cNvPr id="15362" name="TextBox 2">
+            <a:extLst>
+              <a:ext uri="{FF2B5EF4-FFF2-40B4-BE49-F238E27FC236}">
+                <a16:creationId xmlns:a16="http://schemas.microsoft.com/office/drawing/2014/main" id="{BA8D56DB-8DDF-0CEF-3EF8-8EED01A3F509}"/>
+              </a:ext>
+            </a:extLst>
+          </p:cNvPr>
+          <p:cNvSpPr txBox="1">
+            <a:spLocks noChangeArrowheads="1"/>
+          </p:cNvSpPr>
+          <p:nvPr/>
+        </p:nvSpPr>
+        <p:spPr bwMode="auto">
+          <a:xfrm>
+            <a:off x="1289473" y="320675"/>
+            <a:ext cx="3780367" cy="1237198"/>
+          </a:xfrm>
+          <a:prstGeom prst="rect">
+            <a:avLst/>
+          </a:prstGeom>
+          <a:noFill/>
+          <a:ln>
+            <a:noFill/>
+          </a:ln>
+          <a:extLst>
+            <a:ext uri="{909E8E84-426E-40DD-AFC4-6F175D3DCCD1}">
+              <a14:hiddenFill xmlns:a14="http://schemas.microsoft.com/office/drawing/2010/main">
+                <a:solidFill>
+                  <a:srgbClr val="FFFFFF"/>
+                </a:solidFill>
+              </a14:hiddenFill>
+            </a:ext>
+            <a:ext uri="{91240B29-F687-4F45-9708-019B960494DF}">
+              <a14:hiddenLine xmlns:a14="http://schemas.microsoft.com/office/drawing/2010/main" w="9525">
+                <a:solidFill>
+                  <a:srgbClr val="000000"/>
+                </a:solidFill>
+                <a:miter lim="800000"/>
+                <a:headEnd/>
+                <a:tailEnd/>
+              </a14:hiddenLine>
+            </a:ext>
+          </a:extLst>
+        </p:spPr>
+        <p:txBody>
+          <a:bodyPr>
+            <a:spAutoFit/>
+          </a:bodyPr>
+          <a:lstStyle>
+            <a:lvl1pPr>
+              <a:spcBef>
+                <a:spcPct val="20000"/>
+              </a:spcBef>
+              <a:buClr>
+                <a:schemeClr val="accent1"/>
+              </a:buClr>
+              <a:buFont typeface="Wingdings" panose="05000000000000000000" pitchFamily="2" charset="2"/>
+              <a:buChar char="l"/>
+              <a:defRPr sz="3200">
+                <a:solidFill>
+                  <a:schemeClr val="tx1"/>
+                </a:solidFill>
+                <a:latin typeface="Arial" panose="020B0604020202020204" pitchFamily="34" charset="0"/>
+                <a:ea typeface="MS PGothic" panose="020B0600070205080204" pitchFamily="34" charset="-128"/>
+                <a:cs typeface="Arial" panose="020B0604020202020204" pitchFamily="34" charset="0"/>
+              </a:defRPr>
+            </a:lvl1pPr>
+            <a:lvl2pPr marL="742950" indent="-285750">
+              <a:spcBef>
+                <a:spcPct val="20000"/>
+              </a:spcBef>
+              <a:buClr>
+                <a:schemeClr val="accent1"/>
+              </a:buClr>
+              <a:buFont typeface="Wingdings" panose="05000000000000000000" pitchFamily="2" charset="2"/>
+              <a:buChar char="¡"/>
+              <a:defRPr sz="2700">
+                <a:solidFill>
+                  <a:schemeClr val="tx1"/>
+                </a:solidFill>
+                <a:latin typeface="Arial" panose="020B0604020202020204" pitchFamily="34" charset="0"/>
+                <a:ea typeface="Arial" panose="020B0604020202020204" pitchFamily="34" charset="0"/>
+                <a:cs typeface="Arial" panose="020B0604020202020204" pitchFamily="34" charset="0"/>
+              </a:defRPr>
+            </a:lvl2pPr>
+            <a:lvl3pPr marL="1143000" indent="-228600">
+              <a:spcBef>
+                <a:spcPct val="20000"/>
+              </a:spcBef>
+              <a:buClr>
+                <a:schemeClr val="accent1"/>
+              </a:buClr>
+              <a:buFont typeface="Wingdings" panose="05000000000000000000" pitchFamily="2" charset="2"/>
+              <a:buChar char="l"/>
+              <a:defRPr sz="2300">
+                <a:solidFill>
+                  <a:schemeClr val="tx1"/>
+                </a:solidFill>
+                <a:latin typeface="Arial" panose="020B0604020202020204" pitchFamily="34" charset="0"/>
+                <a:ea typeface="Arial" panose="020B0604020202020204" pitchFamily="34" charset="0"/>
+                <a:cs typeface="Arial" panose="020B0604020202020204" pitchFamily="34" charset="0"/>
+              </a:defRPr>
+            </a:lvl3pPr>
+            <a:lvl4pPr marL="1600200" indent="-228600">
+              <a:spcBef>
+                <a:spcPct val="20000"/>
+              </a:spcBef>
+              <a:buClr>
+                <a:schemeClr val="accent1"/>
+              </a:buClr>
+              <a:buChar char="•"/>
+              <a:defRPr sz="2000">
+                <a:solidFill>
+                  <a:schemeClr val="tx1"/>
+                </a:solidFill>
+                <a:latin typeface="Arial" panose="020B0604020202020204" pitchFamily="34" charset="0"/>
+                <a:ea typeface="Arial" panose="020B0604020202020204" pitchFamily="34" charset="0"/>
+                <a:cs typeface="Arial" panose="020B0604020202020204" pitchFamily="34" charset="0"/>
+              </a:defRPr>
+            </a:lvl4pPr>
+            <a:lvl5pPr marL="2057400" indent="-228600">
+              <a:spcBef>
+                <a:spcPct val="20000"/>
+              </a:spcBef>
+              <a:buClr>
+                <a:schemeClr val="accent1"/>
+              </a:buClr>
+              <a:buFont typeface="Wingdings" panose="05000000000000000000" pitchFamily="2" charset="2"/>
+              <a:buChar char=""/>
+              <a:defRPr sz="2000">
+                <a:solidFill>
+                  <a:schemeClr val="tx1"/>
+                </a:solidFill>
+                <a:latin typeface="Arial" panose="020B0604020202020204" pitchFamily="34" charset="0"/>
+                <a:ea typeface="Arial" panose="020B0604020202020204" pitchFamily="34" charset="0"/>
+                <a:cs typeface="Arial" panose="020B0604020202020204" pitchFamily="34" charset="0"/>
+              </a:defRPr>
+            </a:lvl5pPr>
+            <a:lvl6pPr marL="2514600" indent="-228600" eaLnBrk="0" fontAlgn="base" hangingPunct="0">
+              <a:spcBef>
+                <a:spcPct val="20000"/>
+              </a:spcBef>
+              <a:spcAft>
+                <a:spcPct val="0"/>
+              </a:spcAft>
+              <a:buClr>
+                <a:schemeClr val="accent1"/>
+              </a:buClr>
+              <a:buFont typeface="Wingdings" panose="05000000000000000000" pitchFamily="2" charset="2"/>
+              <a:buChar char=""/>
+              <a:defRPr sz="2000">
+                <a:solidFill>
+                  <a:schemeClr val="tx1"/>
+                </a:solidFill>
+                <a:latin typeface="Arial" panose="020B0604020202020204" pitchFamily="34" charset="0"/>
+                <a:ea typeface="Arial" panose="020B0604020202020204" pitchFamily="34" charset="0"/>
+                <a:cs typeface="Arial" panose="020B0604020202020204" pitchFamily="34" charset="0"/>
+              </a:defRPr>
+            </a:lvl6pPr>
+            <a:lvl7pPr marL="2971800" indent="-228600" eaLnBrk="0" fontAlgn="base" hangingPunct="0">
+              <a:spcBef>
+                <a:spcPct val="20000"/>
+              </a:spcBef>
+              <a:spcAft>
+                <a:spcPct val="0"/>
+              </a:spcAft>
+              <a:buClr>
+                <a:schemeClr val="accent1"/>
+              </a:buClr>
+              <a:buFont typeface="Wingdings" panose="05000000000000000000" pitchFamily="2" charset="2"/>
+              <a:buChar char=""/>
+              <a:defRPr sz="2000">
+                <a:solidFill>
+                  <a:schemeClr val="tx1"/>
+                </a:solidFill>
+                <a:latin typeface="Arial" panose="020B0604020202020204" pitchFamily="34" charset="0"/>
+                <a:ea typeface="Arial" panose="020B0604020202020204" pitchFamily="34" charset="0"/>
+                <a:cs typeface="Arial" panose="020B0604020202020204" pitchFamily="34" charset="0"/>
+              </a:defRPr>
+            </a:lvl7pPr>
+            <a:lvl8pPr marL="3429000" indent="-228600" eaLnBrk="0" fontAlgn="base" hangingPunct="0">
+              <a:spcBef>
+                <a:spcPct val="20000"/>
+              </a:spcBef>
+              <a:spcAft>
+                <a:spcPct val="0"/>
+              </a:spcAft>
+              <a:buClr>
+                <a:schemeClr val="accent1"/>
+              </a:buClr>
+              <a:buFont typeface="Wingdings" panose="05000000000000000000" pitchFamily="2" charset="2"/>
+              <a:buChar char=""/>
+              <a:defRPr sz="2000">
+                <a:solidFill>
+                  <a:schemeClr val="tx1"/>
+                </a:solidFill>
+                <a:latin typeface="Arial" panose="020B0604020202020204" pitchFamily="34" charset="0"/>
+                <a:ea typeface="Arial" panose="020B0604020202020204" pitchFamily="34" charset="0"/>
+                <a:cs typeface="Arial" panose="020B0604020202020204" pitchFamily="34" charset="0"/>
+              </a:defRPr>
+            </a:lvl8pPr>
+            <a:lvl9pPr marL="3886200" indent="-228600" eaLnBrk="0" fontAlgn="base" hangingPunct="0">
+              <a:spcBef>
+                <a:spcPct val="20000"/>
+              </a:spcBef>
+              <a:spcAft>
+                <a:spcPct val="0"/>
+              </a:spcAft>
+              <a:buClr>
+                <a:schemeClr val="accent1"/>
+              </a:buClr>
+              <a:buFont typeface="Wingdings" panose="05000000000000000000" pitchFamily="2" charset="2"/>
+              <a:buChar char=""/>
+              <a:defRPr sz="2000">
+                <a:solidFill>
+                  <a:schemeClr val="tx1"/>
+                </a:solidFill>
+                <a:latin typeface="Arial" panose="020B0604020202020204" pitchFamily="34" charset="0"/>
+                <a:ea typeface="Arial" panose="020B0604020202020204" pitchFamily="34" charset="0"/>
+                <a:cs typeface="Arial" panose="020B0604020202020204" pitchFamily="34" charset="0"/>
+              </a:defRPr>
+            </a:lvl9pPr>
+          </a:lstStyle>
+          <a:p>
+            <a:pPr eaLnBrk="1" hangingPunct="1">
+              <a:spcBef>
+                <a:spcPct val="0"/>
+              </a:spcBef>
+              <a:buClrTx/>
+              <a:buFontTx/>
+              <a:buNone/>
+            </a:pPr>
+            <a:r>
+              <a:rPr lang="en-US" altLang="en-US" sz="1488" dirty="0">
+                <a:solidFill>
+                  <a:srgbClr val="FF0000"/>
+                </a:solidFill>
+                <a:latin typeface="charter"/>
+              </a:rPr>
+              <a:t>Multilayer perceptron (MLP) </a:t>
+            </a:r>
+          </a:p>
+          <a:p>
+            <a:pPr eaLnBrk="1" hangingPunct="1">
+              <a:spcBef>
+                <a:spcPct val="0"/>
+              </a:spcBef>
+              <a:buClrTx/>
+              <a:buFontTx/>
+              <a:buNone/>
+            </a:pPr>
+            <a:r>
+              <a:rPr lang="en-US" altLang="en-US" sz="1488" dirty="0">
+                <a:solidFill>
+                  <a:srgbClr val="FF0000"/>
+                </a:solidFill>
+                <a:latin typeface="charter"/>
+              </a:rPr>
+              <a:t>Very common</a:t>
+            </a:r>
+          </a:p>
+          <a:p>
+            <a:pPr eaLnBrk="1" hangingPunct="1">
+              <a:spcBef>
+                <a:spcPct val="0"/>
+              </a:spcBef>
+              <a:buClrTx/>
+              <a:buFontTx/>
+              <a:buNone/>
+            </a:pPr>
+            <a:r>
+              <a:rPr lang="en-US" altLang="en-US" sz="1488" dirty="0">
+                <a:solidFill>
+                  <a:srgbClr val="292929"/>
+                </a:solidFill>
+                <a:latin typeface="charter"/>
+              </a:rPr>
+              <a:t>Provide very good results (great accuracy)</a:t>
+            </a:r>
+          </a:p>
+          <a:p>
+            <a:pPr eaLnBrk="1" hangingPunct="1">
+              <a:spcBef>
+                <a:spcPct val="0"/>
+              </a:spcBef>
+              <a:buClrTx/>
+              <a:buFontTx/>
+              <a:buNone/>
+            </a:pPr>
+            <a:r>
+              <a:rPr lang="en-US" altLang="en-US" sz="1488" dirty="0">
+                <a:solidFill>
+                  <a:srgbClr val="292929"/>
+                </a:solidFill>
+                <a:latin typeface="charter"/>
+              </a:rPr>
+              <a:t> the training time remains reasonable</a:t>
+            </a:r>
+          </a:p>
+          <a:p>
+            <a:pPr eaLnBrk="1" hangingPunct="1">
+              <a:spcBef>
+                <a:spcPct val="0"/>
+              </a:spcBef>
+              <a:buClrTx/>
+              <a:buFontTx/>
+              <a:buNone/>
+            </a:pPr>
+            <a:r>
+              <a:rPr lang="en-US" altLang="en-US" sz="1488" dirty="0">
+                <a:solidFill>
+                  <a:srgbClr val="292929"/>
+                </a:solidFill>
+                <a:latin typeface="charter"/>
+              </a:rPr>
+              <a:t>Good for small to average datasets</a:t>
+            </a:r>
+            <a:endParaRPr lang="en-US" altLang="en-US" sz="1488" dirty="0"/>
+          </a:p>
+        </p:txBody>
+      </p:sp>
+      <p:sp>
+        <p:nvSpPr>
+          <p:cNvPr id="15363" name="TextBox 4">
+            <a:extLst>
+              <a:ext uri="{FF2B5EF4-FFF2-40B4-BE49-F238E27FC236}">
+                <a16:creationId xmlns:a16="http://schemas.microsoft.com/office/drawing/2014/main" id="{F3EBB5AF-DBCF-2C04-B755-9E6567DEB935}"/>
+              </a:ext>
+            </a:extLst>
+          </p:cNvPr>
+          <p:cNvSpPr txBox="1">
+            <a:spLocks noChangeArrowheads="1"/>
+          </p:cNvSpPr>
+          <p:nvPr/>
+        </p:nvSpPr>
+        <p:spPr bwMode="auto">
+          <a:xfrm>
+            <a:off x="4348833" y="2016196"/>
+            <a:ext cx="3780367" cy="1008225"/>
+          </a:xfrm>
+          <a:prstGeom prst="rect">
+            <a:avLst/>
+          </a:prstGeom>
+          <a:noFill/>
+          <a:ln>
+            <a:noFill/>
+          </a:ln>
+          <a:extLst>
+            <a:ext uri="{909E8E84-426E-40DD-AFC4-6F175D3DCCD1}">
+              <a14:hiddenFill xmlns:a14="http://schemas.microsoft.com/office/drawing/2010/main">
+                <a:solidFill>
+                  <a:srgbClr val="FFFFFF"/>
+                </a:solidFill>
+              </a14:hiddenFill>
+            </a:ext>
+            <a:ext uri="{91240B29-F687-4F45-9708-019B960494DF}">
+              <a14:hiddenLine xmlns:a14="http://schemas.microsoft.com/office/drawing/2010/main" w="9525">
+                <a:solidFill>
+                  <a:srgbClr val="000000"/>
+                </a:solidFill>
+                <a:miter lim="800000"/>
+                <a:headEnd/>
+                <a:tailEnd/>
+              </a14:hiddenLine>
+            </a:ext>
+          </a:extLst>
+        </p:spPr>
+        <p:txBody>
+          <a:bodyPr>
+            <a:spAutoFit/>
+          </a:bodyPr>
+          <a:lstStyle>
+            <a:lvl1pPr>
+              <a:spcBef>
+                <a:spcPct val="20000"/>
+              </a:spcBef>
+              <a:buClr>
+                <a:schemeClr val="accent1"/>
+              </a:buClr>
+              <a:buFont typeface="Wingdings" panose="05000000000000000000" pitchFamily="2" charset="2"/>
+              <a:buChar char="l"/>
+              <a:defRPr sz="3200">
+                <a:solidFill>
+                  <a:schemeClr val="tx1"/>
+                </a:solidFill>
+                <a:latin typeface="Arial" panose="020B0604020202020204" pitchFamily="34" charset="0"/>
+                <a:ea typeface="MS PGothic" panose="020B0600070205080204" pitchFamily="34" charset="-128"/>
+                <a:cs typeface="Arial" panose="020B0604020202020204" pitchFamily="34" charset="0"/>
+              </a:defRPr>
+            </a:lvl1pPr>
+            <a:lvl2pPr marL="742950" indent="-285750">
+              <a:spcBef>
+                <a:spcPct val="20000"/>
+              </a:spcBef>
+              <a:buClr>
+                <a:schemeClr val="accent1"/>
+              </a:buClr>
+              <a:buFont typeface="Wingdings" panose="05000000000000000000" pitchFamily="2" charset="2"/>
+              <a:buChar char="¡"/>
+              <a:defRPr sz="2700">
+                <a:solidFill>
+                  <a:schemeClr val="tx1"/>
+                </a:solidFill>
+                <a:latin typeface="Arial" panose="020B0604020202020204" pitchFamily="34" charset="0"/>
+                <a:ea typeface="Arial" panose="020B0604020202020204" pitchFamily="34" charset="0"/>
+                <a:cs typeface="Arial" panose="020B0604020202020204" pitchFamily="34" charset="0"/>
+              </a:defRPr>
+            </a:lvl2pPr>
+            <a:lvl3pPr marL="1143000" indent="-228600">
+              <a:spcBef>
+                <a:spcPct val="20000"/>
+              </a:spcBef>
+              <a:buClr>
+                <a:schemeClr val="accent1"/>
+              </a:buClr>
+              <a:buFont typeface="Wingdings" panose="05000000000000000000" pitchFamily="2" charset="2"/>
+              <a:buChar char="l"/>
+              <a:defRPr sz="2300">
+                <a:solidFill>
+                  <a:schemeClr val="tx1"/>
+                </a:solidFill>
+                <a:latin typeface="Arial" panose="020B0604020202020204" pitchFamily="34" charset="0"/>
+                <a:ea typeface="Arial" panose="020B0604020202020204" pitchFamily="34" charset="0"/>
+                <a:cs typeface="Arial" panose="020B0604020202020204" pitchFamily="34" charset="0"/>
+              </a:defRPr>
+            </a:lvl3pPr>
+            <a:lvl4pPr marL="1600200" indent="-228600">
+              <a:spcBef>
+                <a:spcPct val="20000"/>
+              </a:spcBef>
+              <a:buClr>
+                <a:schemeClr val="accent1"/>
+              </a:buClr>
+              <a:buChar char="•"/>
+              <a:defRPr sz="2000">
+                <a:solidFill>
+                  <a:schemeClr val="tx1"/>
+                </a:solidFill>
+                <a:latin typeface="Arial" panose="020B0604020202020204" pitchFamily="34" charset="0"/>
+                <a:ea typeface="Arial" panose="020B0604020202020204" pitchFamily="34" charset="0"/>
+                <a:cs typeface="Arial" panose="020B0604020202020204" pitchFamily="34" charset="0"/>
+              </a:defRPr>
+            </a:lvl4pPr>
+            <a:lvl5pPr marL="2057400" indent="-228600">
+              <a:spcBef>
+                <a:spcPct val="20000"/>
+              </a:spcBef>
+              <a:buClr>
+                <a:schemeClr val="accent1"/>
+              </a:buClr>
+              <a:buFont typeface="Wingdings" panose="05000000000000000000" pitchFamily="2" charset="2"/>
+              <a:buChar char=""/>
+              <a:defRPr sz="2000">
+                <a:solidFill>
+                  <a:schemeClr val="tx1"/>
+                </a:solidFill>
+                <a:latin typeface="Arial" panose="020B0604020202020204" pitchFamily="34" charset="0"/>
+                <a:ea typeface="Arial" panose="020B0604020202020204" pitchFamily="34" charset="0"/>
+                <a:cs typeface="Arial" panose="020B0604020202020204" pitchFamily="34" charset="0"/>
+              </a:defRPr>
+            </a:lvl5pPr>
+            <a:lvl6pPr marL="2514600" indent="-228600" eaLnBrk="0" fontAlgn="base" hangingPunct="0">
+              <a:spcBef>
+                <a:spcPct val="20000"/>
+              </a:spcBef>
+              <a:spcAft>
+                <a:spcPct val="0"/>
+              </a:spcAft>
+              <a:buClr>
+                <a:schemeClr val="accent1"/>
+              </a:buClr>
+              <a:buFont typeface="Wingdings" panose="05000000000000000000" pitchFamily="2" charset="2"/>
+              <a:buChar char=""/>
+              <a:defRPr sz="2000">
+                <a:solidFill>
+                  <a:schemeClr val="tx1"/>
+                </a:solidFill>
+                <a:latin typeface="Arial" panose="020B0604020202020204" pitchFamily="34" charset="0"/>
+                <a:ea typeface="Arial" panose="020B0604020202020204" pitchFamily="34" charset="0"/>
+                <a:cs typeface="Arial" panose="020B0604020202020204" pitchFamily="34" charset="0"/>
+              </a:defRPr>
+            </a:lvl6pPr>
+            <a:lvl7pPr marL="2971800" indent="-228600" eaLnBrk="0" fontAlgn="base" hangingPunct="0">
+              <a:spcBef>
+                <a:spcPct val="20000"/>
+              </a:spcBef>
+              <a:spcAft>
+                <a:spcPct val="0"/>
+              </a:spcAft>
+              <a:buClr>
+                <a:schemeClr val="accent1"/>
+              </a:buClr>
+              <a:buFont typeface="Wingdings" panose="05000000000000000000" pitchFamily="2" charset="2"/>
+              <a:buChar char=""/>
+              <a:defRPr sz="2000">
+                <a:solidFill>
+                  <a:schemeClr val="tx1"/>
+                </a:solidFill>
+                <a:latin typeface="Arial" panose="020B0604020202020204" pitchFamily="34" charset="0"/>
+                <a:ea typeface="Arial" panose="020B0604020202020204" pitchFamily="34" charset="0"/>
+                <a:cs typeface="Arial" panose="020B0604020202020204" pitchFamily="34" charset="0"/>
+              </a:defRPr>
+            </a:lvl7pPr>
+            <a:lvl8pPr marL="3429000" indent="-228600" eaLnBrk="0" fontAlgn="base" hangingPunct="0">
+              <a:spcBef>
+                <a:spcPct val="20000"/>
+              </a:spcBef>
+              <a:spcAft>
+                <a:spcPct val="0"/>
+              </a:spcAft>
+              <a:buClr>
+                <a:schemeClr val="accent1"/>
+              </a:buClr>
+              <a:buFont typeface="Wingdings" panose="05000000000000000000" pitchFamily="2" charset="2"/>
+              <a:buChar char=""/>
+              <a:defRPr sz="2000">
+                <a:solidFill>
+                  <a:schemeClr val="tx1"/>
+                </a:solidFill>
+                <a:latin typeface="Arial" panose="020B0604020202020204" pitchFamily="34" charset="0"/>
+                <a:ea typeface="Arial" panose="020B0604020202020204" pitchFamily="34" charset="0"/>
+                <a:cs typeface="Arial" panose="020B0604020202020204" pitchFamily="34" charset="0"/>
+              </a:defRPr>
+            </a:lvl8pPr>
+            <a:lvl9pPr marL="3886200" indent="-228600" eaLnBrk="0" fontAlgn="base" hangingPunct="0">
+              <a:spcBef>
+                <a:spcPct val="20000"/>
+              </a:spcBef>
+              <a:spcAft>
+                <a:spcPct val="0"/>
+              </a:spcAft>
+              <a:buClr>
+                <a:schemeClr val="accent1"/>
+              </a:buClr>
+              <a:buFont typeface="Wingdings" panose="05000000000000000000" pitchFamily="2" charset="2"/>
+              <a:buChar char=""/>
+              <a:defRPr sz="2000">
+                <a:solidFill>
+                  <a:schemeClr val="tx1"/>
+                </a:solidFill>
+                <a:latin typeface="Arial" panose="020B0604020202020204" pitchFamily="34" charset="0"/>
+                <a:ea typeface="Arial" panose="020B0604020202020204" pitchFamily="34" charset="0"/>
+                <a:cs typeface="Arial" panose="020B0604020202020204" pitchFamily="34" charset="0"/>
+              </a:defRPr>
+            </a:lvl9pPr>
+          </a:lstStyle>
+          <a:p>
+            <a:pPr eaLnBrk="1" hangingPunct="1">
+              <a:spcBef>
+                <a:spcPct val="0"/>
+              </a:spcBef>
+              <a:buClrTx/>
+              <a:buFontTx/>
+              <a:buNone/>
+            </a:pPr>
+            <a:r>
+              <a:rPr lang="en-US" altLang="en-US" sz="1488" dirty="0">
+                <a:solidFill>
+                  <a:srgbClr val="292929"/>
+                </a:solidFill>
+                <a:latin typeface="charter"/>
+              </a:rPr>
+              <a:t>For larger datasets with larger images, the number of parameters for the model increases exponentially, therefore, </a:t>
+            </a:r>
+            <a:r>
+              <a:rPr lang="en-US" altLang="en-US" sz="1488" dirty="0">
+                <a:solidFill>
+                  <a:srgbClr val="FF0000"/>
+                </a:solidFill>
+                <a:latin typeface="charter"/>
+              </a:rPr>
+              <a:t>training becomes longer and performance poorer</a:t>
+            </a:r>
+            <a:endParaRPr lang="en-US" altLang="en-US" sz="1488" dirty="0">
+              <a:solidFill>
+                <a:srgbClr val="FF0000"/>
+              </a:solidFill>
+            </a:endParaRPr>
+          </a:p>
+        </p:txBody>
+      </p:sp>
+      <p:sp>
+        <p:nvSpPr>
+          <p:cNvPr id="15364" name="TextBox 6">
+            <a:extLst>
+              <a:ext uri="{FF2B5EF4-FFF2-40B4-BE49-F238E27FC236}">
+                <a16:creationId xmlns:a16="http://schemas.microsoft.com/office/drawing/2014/main" id="{682D8A30-5D71-F5DF-2CE9-34CD004595D8}"/>
+              </a:ext>
+            </a:extLst>
+          </p:cNvPr>
+          <p:cNvSpPr txBox="1">
+            <a:spLocks noChangeArrowheads="1"/>
+          </p:cNvSpPr>
+          <p:nvPr/>
+        </p:nvSpPr>
+        <p:spPr bwMode="auto">
+          <a:xfrm>
+            <a:off x="2017607" y="3134554"/>
+            <a:ext cx="3780367" cy="779252"/>
+          </a:xfrm>
+          <a:prstGeom prst="rect">
+            <a:avLst/>
+          </a:prstGeom>
+          <a:noFill/>
+          <a:ln>
+            <a:noFill/>
+          </a:ln>
+          <a:extLst>
+            <a:ext uri="{909E8E84-426E-40DD-AFC4-6F175D3DCCD1}">
+              <a14:hiddenFill xmlns:a14="http://schemas.microsoft.com/office/drawing/2010/main">
+                <a:solidFill>
+                  <a:srgbClr val="FFFFFF"/>
+                </a:solidFill>
+              </a14:hiddenFill>
+            </a:ext>
+            <a:ext uri="{91240B29-F687-4F45-9708-019B960494DF}">
+              <a14:hiddenLine xmlns:a14="http://schemas.microsoft.com/office/drawing/2010/main" w="9525">
+                <a:solidFill>
+                  <a:srgbClr val="000000"/>
+                </a:solidFill>
+                <a:miter lim="800000"/>
+                <a:headEnd/>
+                <a:tailEnd/>
+              </a14:hiddenLine>
+            </a:ext>
+          </a:extLst>
+        </p:spPr>
+        <p:txBody>
+          <a:bodyPr>
+            <a:spAutoFit/>
+          </a:bodyPr>
+          <a:lstStyle>
+            <a:lvl1pPr>
+              <a:spcBef>
+                <a:spcPct val="20000"/>
+              </a:spcBef>
+              <a:buClr>
+                <a:schemeClr val="accent1"/>
+              </a:buClr>
+              <a:buFont typeface="Wingdings" panose="05000000000000000000" pitchFamily="2" charset="2"/>
+              <a:buChar char="l"/>
+              <a:defRPr sz="3200">
+                <a:solidFill>
+                  <a:schemeClr val="tx1"/>
+                </a:solidFill>
+                <a:latin typeface="Arial" panose="020B0604020202020204" pitchFamily="34" charset="0"/>
+                <a:ea typeface="MS PGothic" panose="020B0600070205080204" pitchFamily="34" charset="-128"/>
+                <a:cs typeface="Arial" panose="020B0604020202020204" pitchFamily="34" charset="0"/>
+              </a:defRPr>
+            </a:lvl1pPr>
+            <a:lvl2pPr marL="742950" indent="-285750">
+              <a:spcBef>
+                <a:spcPct val="20000"/>
+              </a:spcBef>
+              <a:buClr>
+                <a:schemeClr val="accent1"/>
+              </a:buClr>
+              <a:buFont typeface="Wingdings" panose="05000000000000000000" pitchFamily="2" charset="2"/>
+              <a:buChar char="¡"/>
+              <a:defRPr sz="2700">
+                <a:solidFill>
+                  <a:schemeClr val="tx1"/>
+                </a:solidFill>
+                <a:latin typeface="Arial" panose="020B0604020202020204" pitchFamily="34" charset="0"/>
+                <a:ea typeface="Arial" panose="020B0604020202020204" pitchFamily="34" charset="0"/>
+                <a:cs typeface="Arial" panose="020B0604020202020204" pitchFamily="34" charset="0"/>
+              </a:defRPr>
+            </a:lvl2pPr>
+            <a:lvl3pPr marL="1143000" indent="-228600">
+              <a:spcBef>
+                <a:spcPct val="20000"/>
+              </a:spcBef>
+              <a:buClr>
+                <a:schemeClr val="accent1"/>
+              </a:buClr>
+              <a:buFont typeface="Wingdings" panose="05000000000000000000" pitchFamily="2" charset="2"/>
+              <a:buChar char="l"/>
+              <a:defRPr sz="2300">
+                <a:solidFill>
+                  <a:schemeClr val="tx1"/>
+                </a:solidFill>
+                <a:latin typeface="Arial" panose="020B0604020202020204" pitchFamily="34" charset="0"/>
+                <a:ea typeface="Arial" panose="020B0604020202020204" pitchFamily="34" charset="0"/>
+                <a:cs typeface="Arial" panose="020B0604020202020204" pitchFamily="34" charset="0"/>
+              </a:defRPr>
+            </a:lvl3pPr>
+            <a:lvl4pPr marL="1600200" indent="-228600">
+              <a:spcBef>
+                <a:spcPct val="20000"/>
+              </a:spcBef>
+              <a:buClr>
+                <a:schemeClr val="accent1"/>
+              </a:buClr>
+              <a:buChar char="•"/>
+              <a:defRPr sz="2000">
+                <a:solidFill>
+                  <a:schemeClr val="tx1"/>
+                </a:solidFill>
+                <a:latin typeface="Arial" panose="020B0604020202020204" pitchFamily="34" charset="0"/>
+                <a:ea typeface="Arial" panose="020B0604020202020204" pitchFamily="34" charset="0"/>
+                <a:cs typeface="Arial" panose="020B0604020202020204" pitchFamily="34" charset="0"/>
+              </a:defRPr>
+            </a:lvl4pPr>
+            <a:lvl5pPr marL="2057400" indent="-228600">
+              <a:spcBef>
+                <a:spcPct val="20000"/>
+              </a:spcBef>
+              <a:buClr>
+                <a:schemeClr val="accent1"/>
+              </a:buClr>
+              <a:buFont typeface="Wingdings" panose="05000000000000000000" pitchFamily="2" charset="2"/>
+              <a:buChar char=""/>
+              <a:defRPr sz="2000">
+                <a:solidFill>
+                  <a:schemeClr val="tx1"/>
+                </a:solidFill>
+                <a:latin typeface="Arial" panose="020B0604020202020204" pitchFamily="34" charset="0"/>
+                <a:ea typeface="Arial" panose="020B0604020202020204" pitchFamily="34" charset="0"/>
+                <a:cs typeface="Arial" panose="020B0604020202020204" pitchFamily="34" charset="0"/>
+              </a:defRPr>
+            </a:lvl5pPr>
+            <a:lvl6pPr marL="2514600" indent="-228600" eaLnBrk="0" fontAlgn="base" hangingPunct="0">
+              <a:spcBef>
+                <a:spcPct val="20000"/>
+              </a:spcBef>
+              <a:spcAft>
+                <a:spcPct val="0"/>
+              </a:spcAft>
+              <a:buClr>
+                <a:schemeClr val="accent1"/>
+              </a:buClr>
+              <a:buFont typeface="Wingdings" panose="05000000000000000000" pitchFamily="2" charset="2"/>
+              <a:buChar char=""/>
+              <a:defRPr sz="2000">
+                <a:solidFill>
+                  <a:schemeClr val="tx1"/>
+                </a:solidFill>
+                <a:latin typeface="Arial" panose="020B0604020202020204" pitchFamily="34" charset="0"/>
+                <a:ea typeface="Arial" panose="020B0604020202020204" pitchFamily="34" charset="0"/>
+                <a:cs typeface="Arial" panose="020B0604020202020204" pitchFamily="34" charset="0"/>
+              </a:defRPr>
+            </a:lvl6pPr>
+            <a:lvl7pPr marL="2971800" indent="-228600" eaLnBrk="0" fontAlgn="base" hangingPunct="0">
+              <a:spcBef>
+                <a:spcPct val="20000"/>
+              </a:spcBef>
+              <a:spcAft>
+                <a:spcPct val="0"/>
+              </a:spcAft>
+              <a:buClr>
+                <a:schemeClr val="accent1"/>
+              </a:buClr>
+              <a:buFont typeface="Wingdings" panose="05000000000000000000" pitchFamily="2" charset="2"/>
+              <a:buChar char=""/>
+              <a:defRPr sz="2000">
+                <a:solidFill>
+                  <a:schemeClr val="tx1"/>
+                </a:solidFill>
+                <a:latin typeface="Arial" panose="020B0604020202020204" pitchFamily="34" charset="0"/>
+                <a:ea typeface="Arial" panose="020B0604020202020204" pitchFamily="34" charset="0"/>
+                <a:cs typeface="Arial" panose="020B0604020202020204" pitchFamily="34" charset="0"/>
+              </a:defRPr>
+            </a:lvl7pPr>
+            <a:lvl8pPr marL="3429000" indent="-228600" eaLnBrk="0" fontAlgn="base" hangingPunct="0">
+              <a:spcBef>
+                <a:spcPct val="20000"/>
+              </a:spcBef>
+              <a:spcAft>
+                <a:spcPct val="0"/>
+              </a:spcAft>
+              <a:buClr>
+                <a:schemeClr val="accent1"/>
+              </a:buClr>
+              <a:buFont typeface="Wingdings" panose="05000000000000000000" pitchFamily="2" charset="2"/>
+              <a:buChar char=""/>
+              <a:defRPr sz="2000">
+                <a:solidFill>
+                  <a:schemeClr val="tx1"/>
+                </a:solidFill>
+                <a:latin typeface="Arial" panose="020B0604020202020204" pitchFamily="34" charset="0"/>
+                <a:ea typeface="Arial" panose="020B0604020202020204" pitchFamily="34" charset="0"/>
+                <a:cs typeface="Arial" panose="020B0604020202020204" pitchFamily="34" charset="0"/>
+              </a:defRPr>
+            </a:lvl8pPr>
+            <a:lvl9pPr marL="3886200" indent="-228600" eaLnBrk="0" fontAlgn="base" hangingPunct="0">
+              <a:spcBef>
+                <a:spcPct val="20000"/>
+              </a:spcBef>
+              <a:spcAft>
+                <a:spcPct val="0"/>
+              </a:spcAft>
+              <a:buClr>
+                <a:schemeClr val="accent1"/>
+              </a:buClr>
+              <a:buFont typeface="Wingdings" panose="05000000000000000000" pitchFamily="2" charset="2"/>
+              <a:buChar char=""/>
+              <a:defRPr sz="2000">
+                <a:solidFill>
+                  <a:schemeClr val="tx1"/>
+                </a:solidFill>
+                <a:latin typeface="Arial" panose="020B0604020202020204" pitchFamily="34" charset="0"/>
+                <a:ea typeface="Arial" panose="020B0604020202020204" pitchFamily="34" charset="0"/>
+                <a:cs typeface="Arial" panose="020B0604020202020204" pitchFamily="34" charset="0"/>
+              </a:defRPr>
+            </a:lvl9pPr>
+          </a:lstStyle>
+          <a:p>
+            <a:pPr eaLnBrk="1" hangingPunct="1">
+              <a:spcBef>
+                <a:spcPct val="0"/>
+              </a:spcBef>
+              <a:buClrTx/>
+              <a:buFontTx/>
+              <a:buNone/>
+            </a:pPr>
+            <a:r>
+              <a:rPr lang="en-US" altLang="en-US" sz="1488">
+                <a:solidFill>
+                  <a:srgbClr val="292929"/>
+                </a:solidFill>
+                <a:latin typeface="charter"/>
+              </a:rPr>
+              <a:t>MLPs are extremely efficient to solve several categories of problem such as classification, estimation, approximation, recognition, etc</a:t>
+            </a:r>
+            <a:endParaRPr lang="en-US" altLang="en-US" sz="1488"/>
+          </a:p>
+        </p:txBody>
+      </p:sp>
+    </p:spTree>
+  </p:cSld>
+  <p:clrMapOvr>
+    <a:masterClrMapping/>
+  </p:clrMapOvr>
+</p:sld>
+</file>
+
+<file path=ppt/slides/slide20.xml><?xml version="1.0" encoding="utf-8"?>
 <p:sld xmlns:a="http://schemas.openxmlformats.org/drawingml/2006/main" xmlns:r="http://schemas.openxmlformats.org/officeDocument/2006/relationships" xmlns:p="http://schemas.openxmlformats.org/presentationml/2006/main">
   <p:cSld>
     <p:spTree>
@@ -12701,7 +12518,7 @@
 </p:sld>
 </file>
 
-<file path=ppt/slides/slide22.xml><?xml version="1.0" encoding="utf-8"?>
+<file path=ppt/slides/slide21.xml><?xml version="1.0" encoding="utf-8"?>
 <p:sld xmlns:a="http://schemas.openxmlformats.org/drawingml/2006/main" xmlns:r="http://schemas.openxmlformats.org/officeDocument/2006/relationships" xmlns:p="http://schemas.openxmlformats.org/presentationml/2006/main">
   <p:cSld>
     <p:spTree>
@@ -13402,7 +13219,7 @@
 </p:sld>
 </file>
 
-<file path=ppt/slides/slide23.xml><?xml version="1.0" encoding="utf-8"?>
+<file path=ppt/slides/slide22.xml><?xml version="1.0" encoding="utf-8"?>
 <p:sld xmlns:a="http://schemas.openxmlformats.org/drawingml/2006/main" xmlns:r="http://schemas.openxmlformats.org/officeDocument/2006/relationships" xmlns:p="http://schemas.openxmlformats.org/presentationml/2006/main">
   <p:cSld>
     <p:spTree>
@@ -13515,7 +13332,7 @@
 </p:sld>
 </file>
 
-<file path=ppt/slides/slide24.xml><?xml version="1.0" encoding="utf-8"?>
+<file path=ppt/slides/slide23.xml><?xml version="1.0" encoding="utf-8"?>
 <p:sld xmlns:a="http://schemas.openxmlformats.org/drawingml/2006/main" xmlns:r="http://schemas.openxmlformats.org/officeDocument/2006/relationships" xmlns:p="http://schemas.openxmlformats.org/presentationml/2006/main">
   <p:cSld>
     <p:spTree>
@@ -13740,7 +13557,7 @@
 </p:sld>
 </file>
 
-<file path=ppt/slides/slide25.xml><?xml version="1.0" encoding="utf-8"?>
+<file path=ppt/slides/slide24.xml><?xml version="1.0" encoding="utf-8"?>
 <p:sld xmlns:a="http://schemas.openxmlformats.org/drawingml/2006/main" xmlns:r="http://schemas.openxmlformats.org/officeDocument/2006/relationships" xmlns:p="http://schemas.openxmlformats.org/presentationml/2006/main">
   <p:cSld>
     <p:spTree>
@@ -13860,7 +13677,7 @@
 </p:sld>
 </file>
 
-<file path=ppt/slides/slide26.xml><?xml version="1.0" encoding="utf-8"?>
+<file path=ppt/slides/slide25.xml><?xml version="1.0" encoding="utf-8"?>
 <p:sld xmlns:a="http://schemas.openxmlformats.org/drawingml/2006/main" xmlns:r="http://schemas.openxmlformats.org/officeDocument/2006/relationships" xmlns:p="http://schemas.openxmlformats.org/presentationml/2006/main">
   <p:cSld>
     <p:spTree>
@@ -14624,7 +14441,7 @@
 </p:sld>
 </file>
 
-<file path=ppt/slides/slide27.xml><?xml version="1.0" encoding="utf-8"?>
+<file path=ppt/slides/slide26.xml><?xml version="1.0" encoding="utf-8"?>
 <p:sld xmlns:a="http://schemas.openxmlformats.org/drawingml/2006/main" xmlns:r="http://schemas.openxmlformats.org/officeDocument/2006/relationships" xmlns:p="http://schemas.openxmlformats.org/presentationml/2006/main">
   <p:cSld>
     <p:spTree>
@@ -15365,7 +15182,7 @@
 </p:sld>
 </file>
 
-<file path=ppt/slides/slide28.xml><?xml version="1.0" encoding="utf-8"?>
+<file path=ppt/slides/slide27.xml><?xml version="1.0" encoding="utf-8"?>
 <p:sld xmlns:a="http://schemas.openxmlformats.org/drawingml/2006/main" xmlns:r="http://schemas.openxmlformats.org/officeDocument/2006/relationships" xmlns:p="http://schemas.openxmlformats.org/presentationml/2006/main">
   <p:cSld>
     <p:spTree>
@@ -15915,7 +15732,7 @@
 </p:sld>
 </file>
 
-<file path=ppt/slides/slide29.xml><?xml version="1.0" encoding="utf-8"?>
+<file path=ppt/slides/slide28.xml><?xml version="1.0" encoding="utf-8"?>
 <p:sld xmlns:a="http://schemas.openxmlformats.org/drawingml/2006/main" xmlns:r="http://schemas.openxmlformats.org/officeDocument/2006/relationships" xmlns:p="http://schemas.openxmlformats.org/presentationml/2006/main">
   <p:cSld>
     <p:spTree>
@@ -16349,6 +16166,392 @@
             <a:r>
               <a:rPr lang="en-US" altLang="en-US" sz="1985"/>
               <a:t>Two filters =kernels (each filter extract different features)</a:t>
+            </a:r>
+          </a:p>
+        </p:txBody>
+      </p:sp>
+    </p:spTree>
+  </p:cSld>
+  <p:clrMapOvr>
+    <a:masterClrMapping/>
+  </p:clrMapOvr>
+</p:sld>
+</file>
+
+<file path=ppt/slides/slide29.xml><?xml version="1.0" encoding="utf-8"?>
+<p:sld xmlns:a="http://schemas.openxmlformats.org/drawingml/2006/main" xmlns:r="http://schemas.openxmlformats.org/officeDocument/2006/relationships" xmlns:p="http://schemas.openxmlformats.org/presentationml/2006/main">
+  <p:cSld>
+    <p:spTree>
+      <p:nvGrpSpPr>
+        <p:cNvPr id="1" name=""/>
+        <p:cNvGrpSpPr/>
+        <p:nvPr/>
+      </p:nvGrpSpPr>
+      <p:grpSpPr>
+        <a:xfrm>
+          <a:off x="0" y="0"/>
+          <a:ext cx="0" cy="0"/>
+          <a:chOff x="0" y="0"/>
+          <a:chExt cx="0" cy="0"/>
+        </a:xfrm>
+      </p:grpSpPr>
+      <p:pic>
+        <p:nvPicPr>
+          <p:cNvPr id="44034" name="Picture 1">
+            <a:extLst>
+              <a:ext uri="{FF2B5EF4-FFF2-40B4-BE49-F238E27FC236}">
+                <a16:creationId xmlns:a16="http://schemas.microsoft.com/office/drawing/2014/main" id="{B6F77A1D-ED7F-32A1-3B5D-8099C17B0FD5}"/>
+              </a:ext>
+            </a:extLst>
+          </p:cNvPr>
+          <p:cNvPicPr>
+            <a:picLocks noChangeAspect="1" noChangeArrowheads="1"/>
+          </p:cNvPicPr>
+          <p:nvPr/>
+        </p:nvPicPr>
+        <p:blipFill>
+          <a:blip r:embed="rId2">
+            <a:extLst>
+              <a:ext uri="{28A0092B-C50C-407E-A947-70E740481C1C}">
+                <a14:useLocalDpi xmlns:a14="http://schemas.microsoft.com/office/drawing/2010/main" val="0"/>
+              </a:ext>
+            </a:extLst>
+          </a:blip>
+          <a:srcRect/>
+          <a:stretch>
+            <a:fillRect/>
+          </a:stretch>
+        </p:blipFill>
+        <p:spPr bwMode="auto">
+          <a:xfrm>
+            <a:off x="2080613" y="252025"/>
+            <a:ext cx="5145499" cy="2374543"/>
+          </a:xfrm>
+          <a:prstGeom prst="rect">
+            <a:avLst/>
+          </a:prstGeom>
+          <a:noFill/>
+          <a:ln>
+            <a:noFill/>
+          </a:ln>
+          <a:extLst>
+            <a:ext uri="{909E8E84-426E-40DD-AFC4-6F175D3DCCD1}">
+              <a14:hiddenFill xmlns:a14="http://schemas.microsoft.com/office/drawing/2010/main">
+                <a:solidFill>
+                  <a:srgbClr val="FFFFFF"/>
+                </a:solidFill>
+              </a14:hiddenFill>
+            </a:ext>
+            <a:ext uri="{91240B29-F687-4F45-9708-019B960494DF}">
+              <a14:hiddenLine xmlns:a14="http://schemas.microsoft.com/office/drawing/2010/main" w="9525">
+                <a:solidFill>
+                  <a:srgbClr val="000000"/>
+                </a:solidFill>
+                <a:miter lim="800000"/>
+                <a:headEnd/>
+                <a:tailEnd/>
+              </a14:hiddenLine>
+            </a:ext>
+          </a:extLst>
+        </p:spPr>
+      </p:pic>
+      <p:pic>
+        <p:nvPicPr>
+          <p:cNvPr id="44035" name="Picture 3">
+            <a:extLst>
+              <a:ext uri="{FF2B5EF4-FFF2-40B4-BE49-F238E27FC236}">
+                <a16:creationId xmlns:a16="http://schemas.microsoft.com/office/drawing/2014/main" id="{AF413C59-8192-271E-FC0A-DE7DE1CD7BCA}"/>
+              </a:ext>
+            </a:extLst>
+          </p:cNvPr>
+          <p:cNvPicPr>
+            <a:picLocks noChangeAspect="1" noChangeArrowheads="1"/>
+          </p:cNvPicPr>
+          <p:nvPr/>
+        </p:nvPicPr>
+        <p:blipFill>
+          <a:blip r:embed="rId3">
+            <a:extLst>
+              <a:ext uri="{28A0092B-C50C-407E-A947-70E740481C1C}">
+                <a14:useLocalDpi xmlns:a14="http://schemas.microsoft.com/office/drawing/2010/main" val="0"/>
+              </a:ext>
+            </a:extLst>
+          </a:blip>
+          <a:srcRect/>
+          <a:stretch>
+            <a:fillRect/>
+          </a:stretch>
+        </p:blipFill>
+        <p:spPr bwMode="auto">
+          <a:xfrm>
+            <a:off x="2206625" y="2626568"/>
+            <a:ext cx="5174377" cy="2425735"/>
+          </a:xfrm>
+          <a:prstGeom prst="rect">
+            <a:avLst/>
+          </a:prstGeom>
+          <a:noFill/>
+          <a:ln>
+            <a:noFill/>
+          </a:ln>
+          <a:extLst>
+            <a:ext uri="{909E8E84-426E-40DD-AFC4-6F175D3DCCD1}">
+              <a14:hiddenFill xmlns:a14="http://schemas.microsoft.com/office/drawing/2010/main">
+                <a:solidFill>
+                  <a:srgbClr val="FFFFFF"/>
+                </a:solidFill>
+              </a14:hiddenFill>
+            </a:ext>
+            <a:ext uri="{91240B29-F687-4F45-9708-019B960494DF}">
+              <a14:hiddenLine xmlns:a14="http://schemas.microsoft.com/office/drawing/2010/main" w="9525">
+                <a:solidFill>
+                  <a:srgbClr val="000000"/>
+                </a:solidFill>
+                <a:miter lim="800000"/>
+                <a:headEnd/>
+                <a:tailEnd/>
+              </a14:hiddenLine>
+            </a:ext>
+          </a:extLst>
+        </p:spPr>
+      </p:pic>
+      <p:sp>
+        <p:nvSpPr>
+          <p:cNvPr id="44036" name="TextBox 4">
+            <a:extLst>
+              <a:ext uri="{FF2B5EF4-FFF2-40B4-BE49-F238E27FC236}">
+                <a16:creationId xmlns:a16="http://schemas.microsoft.com/office/drawing/2014/main" id="{44E4BE21-BF45-F338-BB38-8FCF6C0B2A1E}"/>
+              </a:ext>
+            </a:extLst>
+          </p:cNvPr>
+          <p:cNvSpPr txBox="1">
+            <a:spLocks noChangeArrowheads="1"/>
+          </p:cNvSpPr>
+          <p:nvPr/>
+        </p:nvSpPr>
+        <p:spPr bwMode="auto">
+          <a:xfrm flipH="1">
+            <a:off x="7360000" y="1764172"/>
+            <a:ext cx="1286375" cy="550279"/>
+          </a:xfrm>
+          <a:prstGeom prst="rect">
+            <a:avLst/>
+          </a:prstGeom>
+          <a:noFill/>
+          <a:ln>
+            <a:noFill/>
+          </a:ln>
+          <a:extLst>
+            <a:ext uri="{909E8E84-426E-40DD-AFC4-6F175D3DCCD1}">
+              <a14:hiddenFill xmlns:a14="http://schemas.microsoft.com/office/drawing/2010/main">
+                <a:solidFill>
+                  <a:srgbClr val="FFFFFF"/>
+                </a:solidFill>
+              </a14:hiddenFill>
+            </a:ext>
+            <a:ext uri="{91240B29-F687-4F45-9708-019B960494DF}">
+              <a14:hiddenLine xmlns:a14="http://schemas.microsoft.com/office/drawing/2010/main" w="9525">
+                <a:solidFill>
+                  <a:srgbClr val="000000"/>
+                </a:solidFill>
+                <a:miter lim="800000"/>
+                <a:headEnd/>
+                <a:tailEnd/>
+              </a14:hiddenLine>
+            </a:ext>
+          </a:extLst>
+        </p:spPr>
+        <p:txBody>
+          <a:bodyPr>
+            <a:spAutoFit/>
+          </a:bodyPr>
+          <a:lstStyle>
+            <a:lvl1pPr>
+              <a:spcBef>
+                <a:spcPct val="20000"/>
+              </a:spcBef>
+              <a:buClr>
+                <a:schemeClr val="accent1"/>
+              </a:buClr>
+              <a:buFont typeface="Wingdings" panose="05000000000000000000" pitchFamily="2" charset="2"/>
+              <a:buChar char="l"/>
+              <a:defRPr sz="3200">
+                <a:solidFill>
+                  <a:schemeClr val="tx1"/>
+                </a:solidFill>
+                <a:latin typeface="Arial" panose="020B0604020202020204" pitchFamily="34" charset="0"/>
+                <a:ea typeface="MS PGothic" panose="020B0600070205080204" pitchFamily="34" charset="-128"/>
+                <a:cs typeface="Arial" panose="020B0604020202020204" pitchFamily="34" charset="0"/>
+              </a:defRPr>
+            </a:lvl1pPr>
+            <a:lvl2pPr marL="742950" indent="-285750">
+              <a:spcBef>
+                <a:spcPct val="20000"/>
+              </a:spcBef>
+              <a:buClr>
+                <a:schemeClr val="accent1"/>
+              </a:buClr>
+              <a:buFont typeface="Wingdings" panose="05000000000000000000" pitchFamily="2" charset="2"/>
+              <a:buChar char="¡"/>
+              <a:defRPr sz="2700">
+                <a:solidFill>
+                  <a:schemeClr val="tx1"/>
+                </a:solidFill>
+                <a:latin typeface="Arial" panose="020B0604020202020204" pitchFamily="34" charset="0"/>
+                <a:ea typeface="Arial" panose="020B0604020202020204" pitchFamily="34" charset="0"/>
+                <a:cs typeface="Arial" panose="020B0604020202020204" pitchFamily="34" charset="0"/>
+              </a:defRPr>
+            </a:lvl2pPr>
+            <a:lvl3pPr marL="1143000" indent="-228600">
+              <a:spcBef>
+                <a:spcPct val="20000"/>
+              </a:spcBef>
+              <a:buClr>
+                <a:schemeClr val="accent1"/>
+              </a:buClr>
+              <a:buFont typeface="Wingdings" panose="05000000000000000000" pitchFamily="2" charset="2"/>
+              <a:buChar char="l"/>
+              <a:defRPr sz="2300">
+                <a:solidFill>
+                  <a:schemeClr val="tx1"/>
+                </a:solidFill>
+                <a:latin typeface="Arial" panose="020B0604020202020204" pitchFamily="34" charset="0"/>
+                <a:ea typeface="Arial" panose="020B0604020202020204" pitchFamily="34" charset="0"/>
+                <a:cs typeface="Arial" panose="020B0604020202020204" pitchFamily="34" charset="0"/>
+              </a:defRPr>
+            </a:lvl3pPr>
+            <a:lvl4pPr marL="1600200" indent="-228600">
+              <a:spcBef>
+                <a:spcPct val="20000"/>
+              </a:spcBef>
+              <a:buClr>
+                <a:schemeClr val="accent1"/>
+              </a:buClr>
+              <a:buChar char="•"/>
+              <a:defRPr sz="2000">
+                <a:solidFill>
+                  <a:schemeClr val="tx1"/>
+                </a:solidFill>
+                <a:latin typeface="Arial" panose="020B0604020202020204" pitchFamily="34" charset="0"/>
+                <a:ea typeface="Arial" panose="020B0604020202020204" pitchFamily="34" charset="0"/>
+                <a:cs typeface="Arial" panose="020B0604020202020204" pitchFamily="34" charset="0"/>
+              </a:defRPr>
+            </a:lvl4pPr>
+            <a:lvl5pPr marL="2057400" indent="-228600">
+              <a:spcBef>
+                <a:spcPct val="20000"/>
+              </a:spcBef>
+              <a:buClr>
+                <a:schemeClr val="accent1"/>
+              </a:buClr>
+              <a:buFont typeface="Wingdings" panose="05000000000000000000" pitchFamily="2" charset="2"/>
+              <a:buChar char=""/>
+              <a:defRPr sz="2000">
+                <a:solidFill>
+                  <a:schemeClr val="tx1"/>
+                </a:solidFill>
+                <a:latin typeface="Arial" panose="020B0604020202020204" pitchFamily="34" charset="0"/>
+                <a:ea typeface="Arial" panose="020B0604020202020204" pitchFamily="34" charset="0"/>
+                <a:cs typeface="Arial" panose="020B0604020202020204" pitchFamily="34" charset="0"/>
+              </a:defRPr>
+            </a:lvl5pPr>
+            <a:lvl6pPr marL="2514600" indent="-228600" eaLnBrk="0" fontAlgn="base" hangingPunct="0">
+              <a:spcBef>
+                <a:spcPct val="20000"/>
+              </a:spcBef>
+              <a:spcAft>
+                <a:spcPct val="0"/>
+              </a:spcAft>
+              <a:buClr>
+                <a:schemeClr val="accent1"/>
+              </a:buClr>
+              <a:buFont typeface="Wingdings" panose="05000000000000000000" pitchFamily="2" charset="2"/>
+              <a:buChar char=""/>
+              <a:defRPr sz="2000">
+                <a:solidFill>
+                  <a:schemeClr val="tx1"/>
+                </a:solidFill>
+                <a:latin typeface="Arial" panose="020B0604020202020204" pitchFamily="34" charset="0"/>
+                <a:ea typeface="Arial" panose="020B0604020202020204" pitchFamily="34" charset="0"/>
+                <a:cs typeface="Arial" panose="020B0604020202020204" pitchFamily="34" charset="0"/>
+              </a:defRPr>
+            </a:lvl6pPr>
+            <a:lvl7pPr marL="2971800" indent="-228600" eaLnBrk="0" fontAlgn="base" hangingPunct="0">
+              <a:spcBef>
+                <a:spcPct val="20000"/>
+              </a:spcBef>
+              <a:spcAft>
+                <a:spcPct val="0"/>
+              </a:spcAft>
+              <a:buClr>
+                <a:schemeClr val="accent1"/>
+              </a:buClr>
+              <a:buFont typeface="Wingdings" panose="05000000000000000000" pitchFamily="2" charset="2"/>
+              <a:buChar char=""/>
+              <a:defRPr sz="2000">
+                <a:solidFill>
+                  <a:schemeClr val="tx1"/>
+                </a:solidFill>
+                <a:latin typeface="Arial" panose="020B0604020202020204" pitchFamily="34" charset="0"/>
+                <a:ea typeface="Arial" panose="020B0604020202020204" pitchFamily="34" charset="0"/>
+                <a:cs typeface="Arial" panose="020B0604020202020204" pitchFamily="34" charset="0"/>
+              </a:defRPr>
+            </a:lvl7pPr>
+            <a:lvl8pPr marL="3429000" indent="-228600" eaLnBrk="0" fontAlgn="base" hangingPunct="0">
+              <a:spcBef>
+                <a:spcPct val="20000"/>
+              </a:spcBef>
+              <a:spcAft>
+                <a:spcPct val="0"/>
+              </a:spcAft>
+              <a:buClr>
+                <a:schemeClr val="accent1"/>
+              </a:buClr>
+              <a:buFont typeface="Wingdings" panose="05000000000000000000" pitchFamily="2" charset="2"/>
+              <a:buChar char=""/>
+              <a:defRPr sz="2000">
+                <a:solidFill>
+                  <a:schemeClr val="tx1"/>
+                </a:solidFill>
+                <a:latin typeface="Arial" panose="020B0604020202020204" pitchFamily="34" charset="0"/>
+                <a:ea typeface="Arial" panose="020B0604020202020204" pitchFamily="34" charset="0"/>
+                <a:cs typeface="Arial" panose="020B0604020202020204" pitchFamily="34" charset="0"/>
+              </a:defRPr>
+            </a:lvl8pPr>
+            <a:lvl9pPr marL="3886200" indent="-228600" eaLnBrk="0" fontAlgn="base" hangingPunct="0">
+              <a:spcBef>
+                <a:spcPct val="20000"/>
+              </a:spcBef>
+              <a:spcAft>
+                <a:spcPct val="0"/>
+              </a:spcAft>
+              <a:buClr>
+                <a:schemeClr val="accent1"/>
+              </a:buClr>
+              <a:buFont typeface="Wingdings" panose="05000000000000000000" pitchFamily="2" charset="2"/>
+              <a:buChar char=""/>
+              <a:defRPr sz="2000">
+                <a:solidFill>
+                  <a:schemeClr val="tx1"/>
+                </a:solidFill>
+                <a:latin typeface="Arial" panose="020B0604020202020204" pitchFamily="34" charset="0"/>
+                <a:ea typeface="Arial" panose="020B0604020202020204" pitchFamily="34" charset="0"/>
+                <a:cs typeface="Arial" panose="020B0604020202020204" pitchFamily="34" charset="0"/>
+              </a:defRPr>
+            </a:lvl9pPr>
+          </a:lstStyle>
+          <a:p>
+            <a:pPr eaLnBrk="1" hangingPunct="1">
+              <a:spcBef>
+                <a:spcPct val="0"/>
+              </a:spcBef>
+              <a:buClrTx/>
+              <a:buFontTx/>
+              <a:buNone/>
+            </a:pPr>
+            <a:r>
+              <a:rPr lang="en-US" altLang="en-US" sz="1488"/>
+              <a:t>This filter is useless </a:t>
             </a:r>
           </a:p>
         </p:txBody>
@@ -16706,392 +16909,6 @@
       </p:grpSpPr>
       <p:pic>
         <p:nvPicPr>
-          <p:cNvPr id="44034" name="Picture 1">
-            <a:extLst>
-              <a:ext uri="{FF2B5EF4-FFF2-40B4-BE49-F238E27FC236}">
-                <a16:creationId xmlns:a16="http://schemas.microsoft.com/office/drawing/2014/main" id="{B6F77A1D-ED7F-32A1-3B5D-8099C17B0FD5}"/>
-              </a:ext>
-            </a:extLst>
-          </p:cNvPr>
-          <p:cNvPicPr>
-            <a:picLocks noChangeAspect="1" noChangeArrowheads="1"/>
-          </p:cNvPicPr>
-          <p:nvPr/>
-        </p:nvPicPr>
-        <p:blipFill>
-          <a:blip r:embed="rId2">
-            <a:extLst>
-              <a:ext uri="{28A0092B-C50C-407E-A947-70E740481C1C}">
-                <a14:useLocalDpi xmlns:a14="http://schemas.microsoft.com/office/drawing/2010/main" val="0"/>
-              </a:ext>
-            </a:extLst>
-          </a:blip>
-          <a:srcRect/>
-          <a:stretch>
-            <a:fillRect/>
-          </a:stretch>
-        </p:blipFill>
-        <p:spPr bwMode="auto">
-          <a:xfrm>
-            <a:off x="2080613" y="252025"/>
-            <a:ext cx="5145499" cy="2374543"/>
-          </a:xfrm>
-          <a:prstGeom prst="rect">
-            <a:avLst/>
-          </a:prstGeom>
-          <a:noFill/>
-          <a:ln>
-            <a:noFill/>
-          </a:ln>
-          <a:extLst>
-            <a:ext uri="{909E8E84-426E-40DD-AFC4-6F175D3DCCD1}">
-              <a14:hiddenFill xmlns:a14="http://schemas.microsoft.com/office/drawing/2010/main">
-                <a:solidFill>
-                  <a:srgbClr val="FFFFFF"/>
-                </a:solidFill>
-              </a14:hiddenFill>
-            </a:ext>
-            <a:ext uri="{91240B29-F687-4F45-9708-019B960494DF}">
-              <a14:hiddenLine xmlns:a14="http://schemas.microsoft.com/office/drawing/2010/main" w="9525">
-                <a:solidFill>
-                  <a:srgbClr val="000000"/>
-                </a:solidFill>
-                <a:miter lim="800000"/>
-                <a:headEnd/>
-                <a:tailEnd/>
-              </a14:hiddenLine>
-            </a:ext>
-          </a:extLst>
-        </p:spPr>
-      </p:pic>
-      <p:pic>
-        <p:nvPicPr>
-          <p:cNvPr id="44035" name="Picture 3">
-            <a:extLst>
-              <a:ext uri="{FF2B5EF4-FFF2-40B4-BE49-F238E27FC236}">
-                <a16:creationId xmlns:a16="http://schemas.microsoft.com/office/drawing/2014/main" id="{AF413C59-8192-271E-FC0A-DE7DE1CD7BCA}"/>
-              </a:ext>
-            </a:extLst>
-          </p:cNvPr>
-          <p:cNvPicPr>
-            <a:picLocks noChangeAspect="1" noChangeArrowheads="1"/>
-          </p:cNvPicPr>
-          <p:nvPr/>
-        </p:nvPicPr>
-        <p:blipFill>
-          <a:blip r:embed="rId3">
-            <a:extLst>
-              <a:ext uri="{28A0092B-C50C-407E-A947-70E740481C1C}">
-                <a14:useLocalDpi xmlns:a14="http://schemas.microsoft.com/office/drawing/2010/main" val="0"/>
-              </a:ext>
-            </a:extLst>
-          </a:blip>
-          <a:srcRect/>
-          <a:stretch>
-            <a:fillRect/>
-          </a:stretch>
-        </p:blipFill>
-        <p:spPr bwMode="auto">
-          <a:xfrm>
-            <a:off x="2206625" y="2626568"/>
-            <a:ext cx="5174377" cy="2425735"/>
-          </a:xfrm>
-          <a:prstGeom prst="rect">
-            <a:avLst/>
-          </a:prstGeom>
-          <a:noFill/>
-          <a:ln>
-            <a:noFill/>
-          </a:ln>
-          <a:extLst>
-            <a:ext uri="{909E8E84-426E-40DD-AFC4-6F175D3DCCD1}">
-              <a14:hiddenFill xmlns:a14="http://schemas.microsoft.com/office/drawing/2010/main">
-                <a:solidFill>
-                  <a:srgbClr val="FFFFFF"/>
-                </a:solidFill>
-              </a14:hiddenFill>
-            </a:ext>
-            <a:ext uri="{91240B29-F687-4F45-9708-019B960494DF}">
-              <a14:hiddenLine xmlns:a14="http://schemas.microsoft.com/office/drawing/2010/main" w="9525">
-                <a:solidFill>
-                  <a:srgbClr val="000000"/>
-                </a:solidFill>
-                <a:miter lim="800000"/>
-                <a:headEnd/>
-                <a:tailEnd/>
-              </a14:hiddenLine>
-            </a:ext>
-          </a:extLst>
-        </p:spPr>
-      </p:pic>
-      <p:sp>
-        <p:nvSpPr>
-          <p:cNvPr id="44036" name="TextBox 4">
-            <a:extLst>
-              <a:ext uri="{FF2B5EF4-FFF2-40B4-BE49-F238E27FC236}">
-                <a16:creationId xmlns:a16="http://schemas.microsoft.com/office/drawing/2014/main" id="{44E4BE21-BF45-F338-BB38-8FCF6C0B2A1E}"/>
-              </a:ext>
-            </a:extLst>
-          </p:cNvPr>
-          <p:cNvSpPr txBox="1">
-            <a:spLocks noChangeArrowheads="1"/>
-          </p:cNvSpPr>
-          <p:nvPr/>
-        </p:nvSpPr>
-        <p:spPr bwMode="auto">
-          <a:xfrm flipH="1">
-            <a:off x="7360000" y="1764172"/>
-            <a:ext cx="1286375" cy="550279"/>
-          </a:xfrm>
-          <a:prstGeom prst="rect">
-            <a:avLst/>
-          </a:prstGeom>
-          <a:noFill/>
-          <a:ln>
-            <a:noFill/>
-          </a:ln>
-          <a:extLst>
-            <a:ext uri="{909E8E84-426E-40DD-AFC4-6F175D3DCCD1}">
-              <a14:hiddenFill xmlns:a14="http://schemas.microsoft.com/office/drawing/2010/main">
-                <a:solidFill>
-                  <a:srgbClr val="FFFFFF"/>
-                </a:solidFill>
-              </a14:hiddenFill>
-            </a:ext>
-            <a:ext uri="{91240B29-F687-4F45-9708-019B960494DF}">
-              <a14:hiddenLine xmlns:a14="http://schemas.microsoft.com/office/drawing/2010/main" w="9525">
-                <a:solidFill>
-                  <a:srgbClr val="000000"/>
-                </a:solidFill>
-                <a:miter lim="800000"/>
-                <a:headEnd/>
-                <a:tailEnd/>
-              </a14:hiddenLine>
-            </a:ext>
-          </a:extLst>
-        </p:spPr>
-        <p:txBody>
-          <a:bodyPr>
-            <a:spAutoFit/>
-          </a:bodyPr>
-          <a:lstStyle>
-            <a:lvl1pPr>
-              <a:spcBef>
-                <a:spcPct val="20000"/>
-              </a:spcBef>
-              <a:buClr>
-                <a:schemeClr val="accent1"/>
-              </a:buClr>
-              <a:buFont typeface="Wingdings" panose="05000000000000000000" pitchFamily="2" charset="2"/>
-              <a:buChar char="l"/>
-              <a:defRPr sz="3200">
-                <a:solidFill>
-                  <a:schemeClr val="tx1"/>
-                </a:solidFill>
-                <a:latin typeface="Arial" panose="020B0604020202020204" pitchFamily="34" charset="0"/>
-                <a:ea typeface="MS PGothic" panose="020B0600070205080204" pitchFamily="34" charset="-128"/>
-                <a:cs typeface="Arial" panose="020B0604020202020204" pitchFamily="34" charset="0"/>
-              </a:defRPr>
-            </a:lvl1pPr>
-            <a:lvl2pPr marL="742950" indent="-285750">
-              <a:spcBef>
-                <a:spcPct val="20000"/>
-              </a:spcBef>
-              <a:buClr>
-                <a:schemeClr val="accent1"/>
-              </a:buClr>
-              <a:buFont typeface="Wingdings" panose="05000000000000000000" pitchFamily="2" charset="2"/>
-              <a:buChar char="¡"/>
-              <a:defRPr sz="2700">
-                <a:solidFill>
-                  <a:schemeClr val="tx1"/>
-                </a:solidFill>
-                <a:latin typeface="Arial" panose="020B0604020202020204" pitchFamily="34" charset="0"/>
-                <a:ea typeface="Arial" panose="020B0604020202020204" pitchFamily="34" charset="0"/>
-                <a:cs typeface="Arial" panose="020B0604020202020204" pitchFamily="34" charset="0"/>
-              </a:defRPr>
-            </a:lvl2pPr>
-            <a:lvl3pPr marL="1143000" indent="-228600">
-              <a:spcBef>
-                <a:spcPct val="20000"/>
-              </a:spcBef>
-              <a:buClr>
-                <a:schemeClr val="accent1"/>
-              </a:buClr>
-              <a:buFont typeface="Wingdings" panose="05000000000000000000" pitchFamily="2" charset="2"/>
-              <a:buChar char="l"/>
-              <a:defRPr sz="2300">
-                <a:solidFill>
-                  <a:schemeClr val="tx1"/>
-                </a:solidFill>
-                <a:latin typeface="Arial" panose="020B0604020202020204" pitchFamily="34" charset="0"/>
-                <a:ea typeface="Arial" panose="020B0604020202020204" pitchFamily="34" charset="0"/>
-                <a:cs typeface="Arial" panose="020B0604020202020204" pitchFamily="34" charset="0"/>
-              </a:defRPr>
-            </a:lvl3pPr>
-            <a:lvl4pPr marL="1600200" indent="-228600">
-              <a:spcBef>
-                <a:spcPct val="20000"/>
-              </a:spcBef>
-              <a:buClr>
-                <a:schemeClr val="accent1"/>
-              </a:buClr>
-              <a:buChar char="•"/>
-              <a:defRPr sz="2000">
-                <a:solidFill>
-                  <a:schemeClr val="tx1"/>
-                </a:solidFill>
-                <a:latin typeface="Arial" panose="020B0604020202020204" pitchFamily="34" charset="0"/>
-                <a:ea typeface="Arial" panose="020B0604020202020204" pitchFamily="34" charset="0"/>
-                <a:cs typeface="Arial" panose="020B0604020202020204" pitchFamily="34" charset="0"/>
-              </a:defRPr>
-            </a:lvl4pPr>
-            <a:lvl5pPr marL="2057400" indent="-228600">
-              <a:spcBef>
-                <a:spcPct val="20000"/>
-              </a:spcBef>
-              <a:buClr>
-                <a:schemeClr val="accent1"/>
-              </a:buClr>
-              <a:buFont typeface="Wingdings" panose="05000000000000000000" pitchFamily="2" charset="2"/>
-              <a:buChar char=""/>
-              <a:defRPr sz="2000">
-                <a:solidFill>
-                  <a:schemeClr val="tx1"/>
-                </a:solidFill>
-                <a:latin typeface="Arial" panose="020B0604020202020204" pitchFamily="34" charset="0"/>
-                <a:ea typeface="Arial" panose="020B0604020202020204" pitchFamily="34" charset="0"/>
-                <a:cs typeface="Arial" panose="020B0604020202020204" pitchFamily="34" charset="0"/>
-              </a:defRPr>
-            </a:lvl5pPr>
-            <a:lvl6pPr marL="2514600" indent="-228600" eaLnBrk="0" fontAlgn="base" hangingPunct="0">
-              <a:spcBef>
-                <a:spcPct val="20000"/>
-              </a:spcBef>
-              <a:spcAft>
-                <a:spcPct val="0"/>
-              </a:spcAft>
-              <a:buClr>
-                <a:schemeClr val="accent1"/>
-              </a:buClr>
-              <a:buFont typeface="Wingdings" panose="05000000000000000000" pitchFamily="2" charset="2"/>
-              <a:buChar char=""/>
-              <a:defRPr sz="2000">
-                <a:solidFill>
-                  <a:schemeClr val="tx1"/>
-                </a:solidFill>
-                <a:latin typeface="Arial" panose="020B0604020202020204" pitchFamily="34" charset="0"/>
-                <a:ea typeface="Arial" panose="020B0604020202020204" pitchFamily="34" charset="0"/>
-                <a:cs typeface="Arial" panose="020B0604020202020204" pitchFamily="34" charset="0"/>
-              </a:defRPr>
-            </a:lvl6pPr>
-            <a:lvl7pPr marL="2971800" indent="-228600" eaLnBrk="0" fontAlgn="base" hangingPunct="0">
-              <a:spcBef>
-                <a:spcPct val="20000"/>
-              </a:spcBef>
-              <a:spcAft>
-                <a:spcPct val="0"/>
-              </a:spcAft>
-              <a:buClr>
-                <a:schemeClr val="accent1"/>
-              </a:buClr>
-              <a:buFont typeface="Wingdings" panose="05000000000000000000" pitchFamily="2" charset="2"/>
-              <a:buChar char=""/>
-              <a:defRPr sz="2000">
-                <a:solidFill>
-                  <a:schemeClr val="tx1"/>
-                </a:solidFill>
-                <a:latin typeface="Arial" panose="020B0604020202020204" pitchFamily="34" charset="0"/>
-                <a:ea typeface="Arial" panose="020B0604020202020204" pitchFamily="34" charset="0"/>
-                <a:cs typeface="Arial" panose="020B0604020202020204" pitchFamily="34" charset="0"/>
-              </a:defRPr>
-            </a:lvl7pPr>
-            <a:lvl8pPr marL="3429000" indent="-228600" eaLnBrk="0" fontAlgn="base" hangingPunct="0">
-              <a:spcBef>
-                <a:spcPct val="20000"/>
-              </a:spcBef>
-              <a:spcAft>
-                <a:spcPct val="0"/>
-              </a:spcAft>
-              <a:buClr>
-                <a:schemeClr val="accent1"/>
-              </a:buClr>
-              <a:buFont typeface="Wingdings" panose="05000000000000000000" pitchFamily="2" charset="2"/>
-              <a:buChar char=""/>
-              <a:defRPr sz="2000">
-                <a:solidFill>
-                  <a:schemeClr val="tx1"/>
-                </a:solidFill>
-                <a:latin typeface="Arial" panose="020B0604020202020204" pitchFamily="34" charset="0"/>
-                <a:ea typeface="Arial" panose="020B0604020202020204" pitchFamily="34" charset="0"/>
-                <a:cs typeface="Arial" panose="020B0604020202020204" pitchFamily="34" charset="0"/>
-              </a:defRPr>
-            </a:lvl8pPr>
-            <a:lvl9pPr marL="3886200" indent="-228600" eaLnBrk="0" fontAlgn="base" hangingPunct="0">
-              <a:spcBef>
-                <a:spcPct val="20000"/>
-              </a:spcBef>
-              <a:spcAft>
-                <a:spcPct val="0"/>
-              </a:spcAft>
-              <a:buClr>
-                <a:schemeClr val="accent1"/>
-              </a:buClr>
-              <a:buFont typeface="Wingdings" panose="05000000000000000000" pitchFamily="2" charset="2"/>
-              <a:buChar char=""/>
-              <a:defRPr sz="2000">
-                <a:solidFill>
-                  <a:schemeClr val="tx1"/>
-                </a:solidFill>
-                <a:latin typeface="Arial" panose="020B0604020202020204" pitchFamily="34" charset="0"/>
-                <a:ea typeface="Arial" panose="020B0604020202020204" pitchFamily="34" charset="0"/>
-                <a:cs typeface="Arial" panose="020B0604020202020204" pitchFamily="34" charset="0"/>
-              </a:defRPr>
-            </a:lvl9pPr>
-          </a:lstStyle>
-          <a:p>
-            <a:pPr eaLnBrk="1" hangingPunct="1">
-              <a:spcBef>
-                <a:spcPct val="0"/>
-              </a:spcBef>
-              <a:buClrTx/>
-              <a:buFontTx/>
-              <a:buNone/>
-            </a:pPr>
-            <a:r>
-              <a:rPr lang="en-US" altLang="en-US" sz="1488"/>
-              <a:t>This filter is useless </a:t>
-            </a:r>
-          </a:p>
-        </p:txBody>
-      </p:sp>
-    </p:spTree>
-  </p:cSld>
-  <p:clrMapOvr>
-    <a:masterClrMapping/>
-  </p:clrMapOvr>
-</p:sld>
-</file>
-
-<file path=ppt/slides/slide31.xml><?xml version="1.0" encoding="utf-8"?>
-<p:sld xmlns:a="http://schemas.openxmlformats.org/drawingml/2006/main" xmlns:r="http://schemas.openxmlformats.org/officeDocument/2006/relationships" xmlns:p="http://schemas.openxmlformats.org/presentationml/2006/main">
-  <p:cSld>
-    <p:spTree>
-      <p:nvGrpSpPr>
-        <p:cNvPr id="1" name=""/>
-        <p:cNvGrpSpPr/>
-        <p:nvPr/>
-      </p:nvGrpSpPr>
-      <p:grpSpPr>
-        <a:xfrm>
-          <a:off x="0" y="0"/>
-          <a:ext cx="0" cy="0"/>
-          <a:chOff x="0" y="0"/>
-          <a:chExt cx="0" cy="0"/>
-        </a:xfrm>
-      </p:grpSpPr>
-      <p:pic>
-        <p:nvPicPr>
           <p:cNvPr id="45058" name="Picture 2" descr="Diagram&#10;&#10;Description automatically generated">
             <a:extLst>
               <a:ext uri="{FF2B5EF4-FFF2-40B4-BE49-F238E27FC236}">
@@ -17218,7 +17035,7 @@
 </p:sld>
 </file>
 
-<file path=ppt/slides/slide32.xml><?xml version="1.0" encoding="utf-8"?>
+<file path=ppt/slides/slide31.xml><?xml version="1.0" encoding="utf-8"?>
 <p:sld xmlns:a="http://schemas.openxmlformats.org/drawingml/2006/main" xmlns:r="http://schemas.openxmlformats.org/officeDocument/2006/relationships" xmlns:p="http://schemas.openxmlformats.org/presentationml/2006/main">
   <p:cSld>
     <p:spTree>
@@ -17604,7 +17421,7 @@
 </p:sld>
 </file>
 
-<file path=ppt/slides/slide33.xml><?xml version="1.0" encoding="utf-8"?>
+<file path=ppt/slides/slide32.xml><?xml version="1.0" encoding="utf-8"?>
 <p:sld xmlns:a="http://schemas.openxmlformats.org/drawingml/2006/main" xmlns:r="http://schemas.openxmlformats.org/officeDocument/2006/relationships" xmlns:p="http://schemas.openxmlformats.org/presentationml/2006/main">
   <p:cSld>
     <p:spTree>
@@ -17867,7 +17684,7 @@
 </p:sld>
 </file>
 
-<file path=ppt/slides/slide34.xml><?xml version="1.0" encoding="utf-8"?>
+<file path=ppt/slides/slide33.xml><?xml version="1.0" encoding="utf-8"?>
 <p:sld xmlns:a="http://schemas.openxmlformats.org/drawingml/2006/main" xmlns:r="http://schemas.openxmlformats.org/officeDocument/2006/relationships" xmlns:p="http://schemas.openxmlformats.org/presentationml/2006/main">
   <p:cSld>
     <p:spTree>
@@ -18139,7 +17956,7 @@
 </p:sld>
 </file>
 
-<file path=ppt/slides/slide35.xml><?xml version="1.0" encoding="utf-8"?>
+<file path=ppt/slides/slide34.xml><?xml version="1.0" encoding="utf-8"?>
 <p:sld xmlns:a="http://schemas.openxmlformats.org/drawingml/2006/main" xmlns:r="http://schemas.openxmlformats.org/officeDocument/2006/relationships" xmlns:p="http://schemas.openxmlformats.org/presentationml/2006/main">
   <p:cSld>
     <p:spTree>
@@ -18643,7 +18460,7 @@
 </p:sld>
 </file>
 
-<file path=ppt/slides/slide36.xml><?xml version="1.0" encoding="utf-8"?>
+<file path=ppt/slides/slide35.xml><?xml version="1.0" encoding="utf-8"?>
 <p:sld xmlns:a="http://schemas.openxmlformats.org/drawingml/2006/main" xmlns:r="http://schemas.openxmlformats.org/officeDocument/2006/relationships" xmlns:p="http://schemas.openxmlformats.org/presentationml/2006/main">
   <p:cSld>
     <p:spTree>
@@ -18728,7 +18545,7 @@
 </p:sld>
 </file>
 
-<file path=ppt/slides/slide37.xml><?xml version="1.0" encoding="utf-8"?>
+<file path=ppt/slides/slide36.xml><?xml version="1.0" encoding="utf-8"?>
 <p:sld xmlns:a="http://schemas.openxmlformats.org/drawingml/2006/main" xmlns:r="http://schemas.openxmlformats.org/officeDocument/2006/relationships" xmlns:p="http://schemas.openxmlformats.org/presentationml/2006/main">
   <p:cSld>
     <p:spTree>
@@ -19060,7 +18877,7 @@
 </p:sld>
 </file>
 
-<file path=ppt/slides/slide38.xml><?xml version="1.0" encoding="utf-8"?>
+<file path=ppt/slides/slide37.xml><?xml version="1.0" encoding="utf-8"?>
 <p:sld xmlns:a="http://schemas.openxmlformats.org/drawingml/2006/main" xmlns:r="http://schemas.openxmlformats.org/officeDocument/2006/relationships" xmlns:p="http://schemas.openxmlformats.org/presentationml/2006/main">
   <p:cSld>
     <p:spTree>
@@ -19501,7 +19318,7 @@
 </p:sld>
 </file>
 
-<file path=ppt/slides/slide39.xml><?xml version="1.0" encoding="utf-8"?>
+<file path=ppt/slides/slide38.xml><?xml version="1.0" encoding="utf-8"?>
 <p:sld xmlns:a="http://schemas.openxmlformats.org/drawingml/2006/main" xmlns:r="http://schemas.openxmlformats.org/officeDocument/2006/relationships" xmlns:p="http://schemas.openxmlformats.org/presentationml/2006/main">
   <p:cSld>
     <p:spTree>
@@ -19764,1171 +19581,7 @@
 </p:sld>
 </file>
 
-<file path=ppt/slides/slide4.xml><?xml version="1.0" encoding="utf-8"?>
-<p:sld xmlns:a="http://schemas.openxmlformats.org/drawingml/2006/main" xmlns:r="http://schemas.openxmlformats.org/officeDocument/2006/relationships" xmlns:p="http://schemas.openxmlformats.org/presentationml/2006/main">
-  <p:cSld>
-    <p:spTree>
-      <p:nvGrpSpPr>
-        <p:cNvPr id="1" name=""/>
-        <p:cNvGrpSpPr/>
-        <p:nvPr/>
-      </p:nvGrpSpPr>
-      <p:grpSpPr>
-        <a:xfrm>
-          <a:off x="0" y="0"/>
-          <a:ext cx="0" cy="0"/>
-          <a:chOff x="0" y="0"/>
-          <a:chExt cx="0" cy="0"/>
-        </a:xfrm>
-      </p:grpSpPr>
-      <p:sp>
-        <p:nvSpPr>
-          <p:cNvPr id="17410" name="Title 1">
-            <a:extLst>
-              <a:ext uri="{FF2B5EF4-FFF2-40B4-BE49-F238E27FC236}">
-                <a16:creationId xmlns:a16="http://schemas.microsoft.com/office/drawing/2014/main" id="{1C78FF26-004C-D3F8-3C1F-21ACCACF5F98}"/>
-              </a:ext>
-            </a:extLst>
-          </p:cNvPr>
-          <p:cNvSpPr>
-            <a:spLocks noGrp="1" noChangeArrowheads="1"/>
-          </p:cNvSpPr>
-          <p:nvPr>
-            <p:ph type="title"/>
-          </p:nvPr>
-        </p:nvSpPr>
-        <p:spPr/>
-        <p:txBody>
-          <a:bodyPr/>
-          <a:lstStyle/>
-          <a:p>
-            <a:r>
-              <a:rPr lang="en-US" altLang="en-US" dirty="0">
-                <a:solidFill>
-                  <a:srgbClr val="292929"/>
-                </a:solidFill>
-                <a:latin typeface="charter"/>
-              </a:rPr>
-              <a:t>Create a Deep Learning model to perform a cat or dog </a:t>
-            </a:r>
-            <a:r>
-              <a:rPr lang="en-US" altLang="en-US" dirty="0">
-                <a:solidFill>
-                  <a:srgbClr val="FF0000"/>
-                </a:solidFill>
-                <a:latin typeface="charter"/>
-              </a:rPr>
-              <a:t>classification task</a:t>
-            </a:r>
-            <a:endParaRPr lang="en-US" altLang="en-US" dirty="0">
-              <a:solidFill>
-                <a:srgbClr val="FF0000"/>
-              </a:solidFill>
-            </a:endParaRPr>
-          </a:p>
-        </p:txBody>
-      </p:sp>
-      <p:sp>
-        <p:nvSpPr>
-          <p:cNvPr id="17411" name="TextBox 3">
-            <a:extLst>
-              <a:ext uri="{FF2B5EF4-FFF2-40B4-BE49-F238E27FC236}">
-                <a16:creationId xmlns:a16="http://schemas.microsoft.com/office/drawing/2014/main" id="{959A0048-B017-D824-F7D6-96ADD1391F1B}"/>
-              </a:ext>
-            </a:extLst>
-          </p:cNvPr>
-          <p:cNvSpPr txBox="1">
-            <a:spLocks noChangeArrowheads="1"/>
-          </p:cNvSpPr>
-          <p:nvPr/>
-        </p:nvSpPr>
-        <p:spPr bwMode="auto">
-          <a:xfrm>
-            <a:off x="1639570" y="1260123"/>
-            <a:ext cx="3780367" cy="703269"/>
-          </a:xfrm>
-          <a:prstGeom prst="rect">
-            <a:avLst/>
-          </a:prstGeom>
-          <a:noFill/>
-          <a:ln>
-            <a:noFill/>
-          </a:ln>
-          <a:extLst>
-            <a:ext uri="{909E8E84-426E-40DD-AFC4-6F175D3DCCD1}">
-              <a14:hiddenFill xmlns:a14="http://schemas.microsoft.com/office/drawing/2010/main">
-                <a:solidFill>
-                  <a:srgbClr val="FFFFFF"/>
-                </a:solidFill>
-              </a14:hiddenFill>
-            </a:ext>
-            <a:ext uri="{91240B29-F687-4F45-9708-019B960494DF}">
-              <a14:hiddenLine xmlns:a14="http://schemas.microsoft.com/office/drawing/2010/main" w="9525">
-                <a:solidFill>
-                  <a:srgbClr val="000000"/>
-                </a:solidFill>
-                <a:miter lim="800000"/>
-                <a:headEnd/>
-                <a:tailEnd/>
-              </a14:hiddenLine>
-            </a:ext>
-          </a:extLst>
-        </p:spPr>
-        <p:txBody>
-          <a:bodyPr>
-            <a:spAutoFit/>
-          </a:bodyPr>
-          <a:lstStyle>
-            <a:lvl1pPr>
-              <a:spcBef>
-                <a:spcPct val="20000"/>
-              </a:spcBef>
-              <a:buClr>
-                <a:schemeClr val="accent1"/>
-              </a:buClr>
-              <a:buFont typeface="Wingdings" panose="05000000000000000000" pitchFamily="2" charset="2"/>
-              <a:buChar char="l"/>
-              <a:defRPr sz="3200">
-                <a:solidFill>
-                  <a:schemeClr val="tx1"/>
-                </a:solidFill>
-                <a:latin typeface="Arial" panose="020B0604020202020204" pitchFamily="34" charset="0"/>
-                <a:ea typeface="MS PGothic" panose="020B0600070205080204" pitchFamily="34" charset="-128"/>
-                <a:cs typeface="Arial" panose="020B0604020202020204" pitchFamily="34" charset="0"/>
-              </a:defRPr>
-            </a:lvl1pPr>
-            <a:lvl2pPr marL="742950" indent="-285750">
-              <a:spcBef>
-                <a:spcPct val="20000"/>
-              </a:spcBef>
-              <a:buClr>
-                <a:schemeClr val="accent1"/>
-              </a:buClr>
-              <a:buFont typeface="Wingdings" panose="05000000000000000000" pitchFamily="2" charset="2"/>
-              <a:buChar char="¡"/>
-              <a:defRPr sz="2700">
-                <a:solidFill>
-                  <a:schemeClr val="tx1"/>
-                </a:solidFill>
-                <a:latin typeface="Arial" panose="020B0604020202020204" pitchFamily="34" charset="0"/>
-                <a:ea typeface="Arial" panose="020B0604020202020204" pitchFamily="34" charset="0"/>
-                <a:cs typeface="Arial" panose="020B0604020202020204" pitchFamily="34" charset="0"/>
-              </a:defRPr>
-            </a:lvl2pPr>
-            <a:lvl3pPr marL="1143000" indent="-228600">
-              <a:spcBef>
-                <a:spcPct val="20000"/>
-              </a:spcBef>
-              <a:buClr>
-                <a:schemeClr val="accent1"/>
-              </a:buClr>
-              <a:buFont typeface="Wingdings" panose="05000000000000000000" pitchFamily="2" charset="2"/>
-              <a:buChar char="l"/>
-              <a:defRPr sz="2300">
-                <a:solidFill>
-                  <a:schemeClr val="tx1"/>
-                </a:solidFill>
-                <a:latin typeface="Arial" panose="020B0604020202020204" pitchFamily="34" charset="0"/>
-                <a:ea typeface="Arial" panose="020B0604020202020204" pitchFamily="34" charset="0"/>
-                <a:cs typeface="Arial" panose="020B0604020202020204" pitchFamily="34" charset="0"/>
-              </a:defRPr>
-            </a:lvl3pPr>
-            <a:lvl4pPr marL="1600200" indent="-228600">
-              <a:spcBef>
-                <a:spcPct val="20000"/>
-              </a:spcBef>
-              <a:buClr>
-                <a:schemeClr val="accent1"/>
-              </a:buClr>
-              <a:buChar char="•"/>
-              <a:defRPr sz="2000">
-                <a:solidFill>
-                  <a:schemeClr val="tx1"/>
-                </a:solidFill>
-                <a:latin typeface="Arial" panose="020B0604020202020204" pitchFamily="34" charset="0"/>
-                <a:ea typeface="Arial" panose="020B0604020202020204" pitchFamily="34" charset="0"/>
-                <a:cs typeface="Arial" panose="020B0604020202020204" pitchFamily="34" charset="0"/>
-              </a:defRPr>
-            </a:lvl4pPr>
-            <a:lvl5pPr marL="2057400" indent="-228600">
-              <a:spcBef>
-                <a:spcPct val="20000"/>
-              </a:spcBef>
-              <a:buClr>
-                <a:schemeClr val="accent1"/>
-              </a:buClr>
-              <a:buFont typeface="Wingdings" panose="05000000000000000000" pitchFamily="2" charset="2"/>
-              <a:buChar char=""/>
-              <a:defRPr sz="2000">
-                <a:solidFill>
-                  <a:schemeClr val="tx1"/>
-                </a:solidFill>
-                <a:latin typeface="Arial" panose="020B0604020202020204" pitchFamily="34" charset="0"/>
-                <a:ea typeface="Arial" panose="020B0604020202020204" pitchFamily="34" charset="0"/>
-                <a:cs typeface="Arial" panose="020B0604020202020204" pitchFamily="34" charset="0"/>
-              </a:defRPr>
-            </a:lvl5pPr>
-            <a:lvl6pPr marL="2514600" indent="-228600" eaLnBrk="0" fontAlgn="base" hangingPunct="0">
-              <a:spcBef>
-                <a:spcPct val="20000"/>
-              </a:spcBef>
-              <a:spcAft>
-                <a:spcPct val="0"/>
-              </a:spcAft>
-              <a:buClr>
-                <a:schemeClr val="accent1"/>
-              </a:buClr>
-              <a:buFont typeface="Wingdings" panose="05000000000000000000" pitchFamily="2" charset="2"/>
-              <a:buChar char=""/>
-              <a:defRPr sz="2000">
-                <a:solidFill>
-                  <a:schemeClr val="tx1"/>
-                </a:solidFill>
-                <a:latin typeface="Arial" panose="020B0604020202020204" pitchFamily="34" charset="0"/>
-                <a:ea typeface="Arial" panose="020B0604020202020204" pitchFamily="34" charset="0"/>
-                <a:cs typeface="Arial" panose="020B0604020202020204" pitchFamily="34" charset="0"/>
-              </a:defRPr>
-            </a:lvl6pPr>
-            <a:lvl7pPr marL="2971800" indent="-228600" eaLnBrk="0" fontAlgn="base" hangingPunct="0">
-              <a:spcBef>
-                <a:spcPct val="20000"/>
-              </a:spcBef>
-              <a:spcAft>
-                <a:spcPct val="0"/>
-              </a:spcAft>
-              <a:buClr>
-                <a:schemeClr val="accent1"/>
-              </a:buClr>
-              <a:buFont typeface="Wingdings" panose="05000000000000000000" pitchFamily="2" charset="2"/>
-              <a:buChar char=""/>
-              <a:defRPr sz="2000">
-                <a:solidFill>
-                  <a:schemeClr val="tx1"/>
-                </a:solidFill>
-                <a:latin typeface="Arial" panose="020B0604020202020204" pitchFamily="34" charset="0"/>
-                <a:ea typeface="Arial" panose="020B0604020202020204" pitchFamily="34" charset="0"/>
-                <a:cs typeface="Arial" panose="020B0604020202020204" pitchFamily="34" charset="0"/>
-              </a:defRPr>
-            </a:lvl7pPr>
-            <a:lvl8pPr marL="3429000" indent="-228600" eaLnBrk="0" fontAlgn="base" hangingPunct="0">
-              <a:spcBef>
-                <a:spcPct val="20000"/>
-              </a:spcBef>
-              <a:spcAft>
-                <a:spcPct val="0"/>
-              </a:spcAft>
-              <a:buClr>
-                <a:schemeClr val="accent1"/>
-              </a:buClr>
-              <a:buFont typeface="Wingdings" panose="05000000000000000000" pitchFamily="2" charset="2"/>
-              <a:buChar char=""/>
-              <a:defRPr sz="2000">
-                <a:solidFill>
-                  <a:schemeClr val="tx1"/>
-                </a:solidFill>
-                <a:latin typeface="Arial" panose="020B0604020202020204" pitchFamily="34" charset="0"/>
-                <a:ea typeface="Arial" panose="020B0604020202020204" pitchFamily="34" charset="0"/>
-                <a:cs typeface="Arial" panose="020B0604020202020204" pitchFamily="34" charset="0"/>
-              </a:defRPr>
-            </a:lvl8pPr>
-            <a:lvl9pPr marL="3886200" indent="-228600" eaLnBrk="0" fontAlgn="base" hangingPunct="0">
-              <a:spcBef>
-                <a:spcPct val="20000"/>
-              </a:spcBef>
-              <a:spcAft>
-                <a:spcPct val="0"/>
-              </a:spcAft>
-              <a:buClr>
-                <a:schemeClr val="accent1"/>
-              </a:buClr>
-              <a:buFont typeface="Wingdings" panose="05000000000000000000" pitchFamily="2" charset="2"/>
-              <a:buChar char=""/>
-              <a:defRPr sz="2000">
-                <a:solidFill>
-                  <a:schemeClr val="tx1"/>
-                </a:solidFill>
-                <a:latin typeface="Arial" panose="020B0604020202020204" pitchFamily="34" charset="0"/>
-                <a:ea typeface="Arial" panose="020B0604020202020204" pitchFamily="34" charset="0"/>
-                <a:cs typeface="Arial" panose="020B0604020202020204" pitchFamily="34" charset="0"/>
-              </a:defRPr>
-            </a:lvl9pPr>
-          </a:lstStyle>
-          <a:p>
-            <a:pPr eaLnBrk="1" hangingPunct="1">
-              <a:spcBef>
-                <a:spcPct val="0"/>
-              </a:spcBef>
-              <a:buClrTx/>
-              <a:buFontTx/>
-              <a:buNone/>
-            </a:pPr>
-            <a:r>
-              <a:rPr lang="en-US" altLang="en-US" sz="1985">
-                <a:solidFill>
-                  <a:srgbClr val="292929"/>
-                </a:solidFill>
-                <a:latin typeface="charter"/>
-              </a:rPr>
-              <a:t>Dataset of images sized 420x420px grayscale</a:t>
-            </a:r>
-            <a:endParaRPr lang="en-US" altLang="en-US" sz="1985"/>
-          </a:p>
-        </p:txBody>
-      </p:sp>
-      <p:sp>
-        <p:nvSpPr>
-          <p:cNvPr id="17412" name="TextBox 5">
-            <a:extLst>
-              <a:ext uri="{FF2B5EF4-FFF2-40B4-BE49-F238E27FC236}">
-                <a16:creationId xmlns:a16="http://schemas.microsoft.com/office/drawing/2014/main" id="{116E34B2-CA74-709C-4F85-99D78BD774C0}"/>
-              </a:ext>
-            </a:extLst>
-          </p:cNvPr>
-          <p:cNvSpPr txBox="1">
-            <a:spLocks noChangeArrowheads="1"/>
-          </p:cNvSpPr>
-          <p:nvPr/>
-        </p:nvSpPr>
-        <p:spPr bwMode="auto">
-          <a:xfrm>
-            <a:off x="4852882" y="1737919"/>
-            <a:ext cx="3780367" cy="1008738"/>
-          </a:xfrm>
-          <a:prstGeom prst="rect">
-            <a:avLst/>
-          </a:prstGeom>
-          <a:noFill/>
-          <a:ln>
-            <a:noFill/>
-          </a:ln>
-          <a:extLst>
-            <a:ext uri="{909E8E84-426E-40DD-AFC4-6F175D3DCCD1}">
-              <a14:hiddenFill xmlns:a14="http://schemas.microsoft.com/office/drawing/2010/main">
-                <a:solidFill>
-                  <a:srgbClr val="FFFFFF"/>
-                </a:solidFill>
-              </a14:hiddenFill>
-            </a:ext>
-            <a:ext uri="{91240B29-F687-4F45-9708-019B960494DF}">
-              <a14:hiddenLine xmlns:a14="http://schemas.microsoft.com/office/drawing/2010/main" w="9525">
-                <a:solidFill>
-                  <a:srgbClr val="000000"/>
-                </a:solidFill>
-                <a:miter lim="800000"/>
-                <a:headEnd/>
-                <a:tailEnd/>
-              </a14:hiddenLine>
-            </a:ext>
-          </a:extLst>
-        </p:spPr>
-        <p:txBody>
-          <a:bodyPr>
-            <a:spAutoFit/>
-          </a:bodyPr>
-          <a:lstStyle>
-            <a:lvl1pPr>
-              <a:spcBef>
-                <a:spcPct val="20000"/>
-              </a:spcBef>
-              <a:buClr>
-                <a:schemeClr val="accent1"/>
-              </a:buClr>
-              <a:buFont typeface="Wingdings" panose="05000000000000000000" pitchFamily="2" charset="2"/>
-              <a:buChar char="l"/>
-              <a:defRPr sz="3200">
-                <a:solidFill>
-                  <a:schemeClr val="tx1"/>
-                </a:solidFill>
-                <a:latin typeface="Arial" panose="020B0604020202020204" pitchFamily="34" charset="0"/>
-                <a:ea typeface="MS PGothic" panose="020B0600070205080204" pitchFamily="34" charset="-128"/>
-                <a:cs typeface="Arial" panose="020B0604020202020204" pitchFamily="34" charset="0"/>
-              </a:defRPr>
-            </a:lvl1pPr>
-            <a:lvl2pPr marL="742950" indent="-285750">
-              <a:spcBef>
-                <a:spcPct val="20000"/>
-              </a:spcBef>
-              <a:buClr>
-                <a:schemeClr val="accent1"/>
-              </a:buClr>
-              <a:buFont typeface="Wingdings" panose="05000000000000000000" pitchFamily="2" charset="2"/>
-              <a:buChar char="¡"/>
-              <a:defRPr sz="2700">
-                <a:solidFill>
-                  <a:schemeClr val="tx1"/>
-                </a:solidFill>
-                <a:latin typeface="Arial" panose="020B0604020202020204" pitchFamily="34" charset="0"/>
-                <a:ea typeface="Arial" panose="020B0604020202020204" pitchFamily="34" charset="0"/>
-                <a:cs typeface="Arial" panose="020B0604020202020204" pitchFamily="34" charset="0"/>
-              </a:defRPr>
-            </a:lvl2pPr>
-            <a:lvl3pPr marL="1143000" indent="-228600">
-              <a:spcBef>
-                <a:spcPct val="20000"/>
-              </a:spcBef>
-              <a:buClr>
-                <a:schemeClr val="accent1"/>
-              </a:buClr>
-              <a:buFont typeface="Wingdings" panose="05000000000000000000" pitchFamily="2" charset="2"/>
-              <a:buChar char="l"/>
-              <a:defRPr sz="2300">
-                <a:solidFill>
-                  <a:schemeClr val="tx1"/>
-                </a:solidFill>
-                <a:latin typeface="Arial" panose="020B0604020202020204" pitchFamily="34" charset="0"/>
-                <a:ea typeface="Arial" panose="020B0604020202020204" pitchFamily="34" charset="0"/>
-                <a:cs typeface="Arial" panose="020B0604020202020204" pitchFamily="34" charset="0"/>
-              </a:defRPr>
-            </a:lvl3pPr>
-            <a:lvl4pPr marL="1600200" indent="-228600">
-              <a:spcBef>
-                <a:spcPct val="20000"/>
-              </a:spcBef>
-              <a:buClr>
-                <a:schemeClr val="accent1"/>
-              </a:buClr>
-              <a:buChar char="•"/>
-              <a:defRPr sz="2000">
-                <a:solidFill>
-                  <a:schemeClr val="tx1"/>
-                </a:solidFill>
-                <a:latin typeface="Arial" panose="020B0604020202020204" pitchFamily="34" charset="0"/>
-                <a:ea typeface="Arial" panose="020B0604020202020204" pitchFamily="34" charset="0"/>
-                <a:cs typeface="Arial" panose="020B0604020202020204" pitchFamily="34" charset="0"/>
-              </a:defRPr>
-            </a:lvl4pPr>
-            <a:lvl5pPr marL="2057400" indent="-228600">
-              <a:spcBef>
-                <a:spcPct val="20000"/>
-              </a:spcBef>
-              <a:buClr>
-                <a:schemeClr val="accent1"/>
-              </a:buClr>
-              <a:buFont typeface="Wingdings" panose="05000000000000000000" pitchFamily="2" charset="2"/>
-              <a:buChar char=""/>
-              <a:defRPr sz="2000">
-                <a:solidFill>
-                  <a:schemeClr val="tx1"/>
-                </a:solidFill>
-                <a:latin typeface="Arial" panose="020B0604020202020204" pitchFamily="34" charset="0"/>
-                <a:ea typeface="Arial" panose="020B0604020202020204" pitchFamily="34" charset="0"/>
-                <a:cs typeface="Arial" panose="020B0604020202020204" pitchFamily="34" charset="0"/>
-              </a:defRPr>
-            </a:lvl5pPr>
-            <a:lvl6pPr marL="2514600" indent="-228600" eaLnBrk="0" fontAlgn="base" hangingPunct="0">
-              <a:spcBef>
-                <a:spcPct val="20000"/>
-              </a:spcBef>
-              <a:spcAft>
-                <a:spcPct val="0"/>
-              </a:spcAft>
-              <a:buClr>
-                <a:schemeClr val="accent1"/>
-              </a:buClr>
-              <a:buFont typeface="Wingdings" panose="05000000000000000000" pitchFamily="2" charset="2"/>
-              <a:buChar char=""/>
-              <a:defRPr sz="2000">
-                <a:solidFill>
-                  <a:schemeClr val="tx1"/>
-                </a:solidFill>
-                <a:latin typeface="Arial" panose="020B0604020202020204" pitchFamily="34" charset="0"/>
-                <a:ea typeface="Arial" panose="020B0604020202020204" pitchFamily="34" charset="0"/>
-                <a:cs typeface="Arial" panose="020B0604020202020204" pitchFamily="34" charset="0"/>
-              </a:defRPr>
-            </a:lvl6pPr>
-            <a:lvl7pPr marL="2971800" indent="-228600" eaLnBrk="0" fontAlgn="base" hangingPunct="0">
-              <a:spcBef>
-                <a:spcPct val="20000"/>
-              </a:spcBef>
-              <a:spcAft>
-                <a:spcPct val="0"/>
-              </a:spcAft>
-              <a:buClr>
-                <a:schemeClr val="accent1"/>
-              </a:buClr>
-              <a:buFont typeface="Wingdings" panose="05000000000000000000" pitchFamily="2" charset="2"/>
-              <a:buChar char=""/>
-              <a:defRPr sz="2000">
-                <a:solidFill>
-                  <a:schemeClr val="tx1"/>
-                </a:solidFill>
-                <a:latin typeface="Arial" panose="020B0604020202020204" pitchFamily="34" charset="0"/>
-                <a:ea typeface="Arial" panose="020B0604020202020204" pitchFamily="34" charset="0"/>
-                <a:cs typeface="Arial" panose="020B0604020202020204" pitchFamily="34" charset="0"/>
-              </a:defRPr>
-            </a:lvl7pPr>
-            <a:lvl8pPr marL="3429000" indent="-228600" eaLnBrk="0" fontAlgn="base" hangingPunct="0">
-              <a:spcBef>
-                <a:spcPct val="20000"/>
-              </a:spcBef>
-              <a:spcAft>
-                <a:spcPct val="0"/>
-              </a:spcAft>
-              <a:buClr>
-                <a:schemeClr val="accent1"/>
-              </a:buClr>
-              <a:buFont typeface="Wingdings" panose="05000000000000000000" pitchFamily="2" charset="2"/>
-              <a:buChar char=""/>
-              <a:defRPr sz="2000">
-                <a:solidFill>
-                  <a:schemeClr val="tx1"/>
-                </a:solidFill>
-                <a:latin typeface="Arial" panose="020B0604020202020204" pitchFamily="34" charset="0"/>
-                <a:ea typeface="Arial" panose="020B0604020202020204" pitchFamily="34" charset="0"/>
-                <a:cs typeface="Arial" panose="020B0604020202020204" pitchFamily="34" charset="0"/>
-              </a:defRPr>
-            </a:lvl8pPr>
-            <a:lvl9pPr marL="3886200" indent="-228600" eaLnBrk="0" fontAlgn="base" hangingPunct="0">
-              <a:spcBef>
-                <a:spcPct val="20000"/>
-              </a:spcBef>
-              <a:spcAft>
-                <a:spcPct val="0"/>
-              </a:spcAft>
-              <a:buClr>
-                <a:schemeClr val="accent1"/>
-              </a:buClr>
-              <a:buFont typeface="Wingdings" panose="05000000000000000000" pitchFamily="2" charset="2"/>
-              <a:buChar char=""/>
-              <a:defRPr sz="2000">
-                <a:solidFill>
-                  <a:schemeClr val="tx1"/>
-                </a:solidFill>
-                <a:latin typeface="Arial" panose="020B0604020202020204" pitchFamily="34" charset="0"/>
-                <a:ea typeface="Arial" panose="020B0604020202020204" pitchFamily="34" charset="0"/>
-                <a:cs typeface="Arial" panose="020B0604020202020204" pitchFamily="34" charset="0"/>
-              </a:defRPr>
-            </a:lvl9pPr>
-          </a:lstStyle>
-          <a:p>
-            <a:pPr eaLnBrk="1" hangingPunct="1">
-              <a:spcBef>
-                <a:spcPct val="0"/>
-              </a:spcBef>
-              <a:buClrTx/>
-              <a:buFontTx/>
-              <a:buNone/>
-            </a:pPr>
-            <a:r>
-              <a:rPr lang="en-US" altLang="en-US" sz="1985">
-                <a:solidFill>
-                  <a:srgbClr val="292929"/>
-                </a:solidFill>
-                <a:latin typeface="charter"/>
-              </a:rPr>
-              <a:t>After the training, the model is supposed to classify the  image as a dog or cat</a:t>
-            </a:r>
-            <a:endParaRPr lang="en-US" altLang="en-US" sz="1985"/>
-          </a:p>
-        </p:txBody>
-      </p:sp>
-      <p:sp>
-        <p:nvSpPr>
-          <p:cNvPr id="17413" name="TextBox 7">
-            <a:extLst>
-              <a:ext uri="{FF2B5EF4-FFF2-40B4-BE49-F238E27FC236}">
-                <a16:creationId xmlns:a16="http://schemas.microsoft.com/office/drawing/2014/main" id="{9C37DC54-B6D6-6D63-D138-D0FEC219F7DE}"/>
-              </a:ext>
-            </a:extLst>
-          </p:cNvPr>
-          <p:cNvSpPr txBox="1">
-            <a:spLocks noChangeArrowheads="1"/>
-          </p:cNvSpPr>
-          <p:nvPr/>
-        </p:nvSpPr>
-        <p:spPr bwMode="auto">
-          <a:xfrm>
-            <a:off x="1576564" y="2429674"/>
-            <a:ext cx="3780367" cy="3147015"/>
-          </a:xfrm>
-          <a:prstGeom prst="rect">
-            <a:avLst/>
-          </a:prstGeom>
-          <a:noFill/>
-          <a:ln>
-            <a:noFill/>
-          </a:ln>
-          <a:extLst>
-            <a:ext uri="{909E8E84-426E-40DD-AFC4-6F175D3DCCD1}">
-              <a14:hiddenFill xmlns:a14="http://schemas.microsoft.com/office/drawing/2010/main">
-                <a:solidFill>
-                  <a:srgbClr val="FFFFFF"/>
-                </a:solidFill>
-              </a14:hiddenFill>
-            </a:ext>
-            <a:ext uri="{91240B29-F687-4F45-9708-019B960494DF}">
-              <a14:hiddenLine xmlns:a14="http://schemas.microsoft.com/office/drawing/2010/main" w="9525">
-                <a:solidFill>
-                  <a:srgbClr val="000000"/>
-                </a:solidFill>
-                <a:miter lim="800000"/>
-                <a:headEnd/>
-                <a:tailEnd/>
-              </a14:hiddenLine>
-            </a:ext>
-          </a:extLst>
-        </p:spPr>
-        <p:txBody>
-          <a:bodyPr>
-            <a:spAutoFit/>
-          </a:bodyPr>
-          <a:lstStyle>
-            <a:lvl1pPr>
-              <a:spcBef>
-                <a:spcPct val="20000"/>
-              </a:spcBef>
-              <a:buClr>
-                <a:schemeClr val="accent1"/>
-              </a:buClr>
-              <a:buFont typeface="Wingdings" panose="05000000000000000000" pitchFamily="2" charset="2"/>
-              <a:buChar char="l"/>
-              <a:defRPr sz="3200">
-                <a:solidFill>
-                  <a:schemeClr val="tx1"/>
-                </a:solidFill>
-                <a:latin typeface="Arial" panose="020B0604020202020204" pitchFamily="34" charset="0"/>
-                <a:ea typeface="MS PGothic" panose="020B0600070205080204" pitchFamily="34" charset="-128"/>
-                <a:cs typeface="Arial" panose="020B0604020202020204" pitchFamily="34" charset="0"/>
-              </a:defRPr>
-            </a:lvl1pPr>
-            <a:lvl2pPr marL="742950" indent="-285750">
-              <a:spcBef>
-                <a:spcPct val="20000"/>
-              </a:spcBef>
-              <a:buClr>
-                <a:schemeClr val="accent1"/>
-              </a:buClr>
-              <a:buFont typeface="Wingdings" panose="05000000000000000000" pitchFamily="2" charset="2"/>
-              <a:buChar char="¡"/>
-              <a:defRPr sz="2700">
-                <a:solidFill>
-                  <a:schemeClr val="tx1"/>
-                </a:solidFill>
-                <a:latin typeface="Arial" panose="020B0604020202020204" pitchFamily="34" charset="0"/>
-                <a:ea typeface="Arial" panose="020B0604020202020204" pitchFamily="34" charset="0"/>
-                <a:cs typeface="Arial" panose="020B0604020202020204" pitchFamily="34" charset="0"/>
-              </a:defRPr>
-            </a:lvl2pPr>
-            <a:lvl3pPr marL="1143000" indent="-228600">
-              <a:spcBef>
-                <a:spcPct val="20000"/>
-              </a:spcBef>
-              <a:buClr>
-                <a:schemeClr val="accent1"/>
-              </a:buClr>
-              <a:buFont typeface="Wingdings" panose="05000000000000000000" pitchFamily="2" charset="2"/>
-              <a:buChar char="l"/>
-              <a:defRPr sz="2300">
-                <a:solidFill>
-                  <a:schemeClr val="tx1"/>
-                </a:solidFill>
-                <a:latin typeface="Arial" panose="020B0604020202020204" pitchFamily="34" charset="0"/>
-                <a:ea typeface="Arial" panose="020B0604020202020204" pitchFamily="34" charset="0"/>
-                <a:cs typeface="Arial" panose="020B0604020202020204" pitchFamily="34" charset="0"/>
-              </a:defRPr>
-            </a:lvl3pPr>
-            <a:lvl4pPr marL="1600200" indent="-228600">
-              <a:spcBef>
-                <a:spcPct val="20000"/>
-              </a:spcBef>
-              <a:buClr>
-                <a:schemeClr val="accent1"/>
-              </a:buClr>
-              <a:buChar char="•"/>
-              <a:defRPr sz="2000">
-                <a:solidFill>
-                  <a:schemeClr val="tx1"/>
-                </a:solidFill>
-                <a:latin typeface="Arial" panose="020B0604020202020204" pitchFamily="34" charset="0"/>
-                <a:ea typeface="Arial" panose="020B0604020202020204" pitchFamily="34" charset="0"/>
-                <a:cs typeface="Arial" panose="020B0604020202020204" pitchFamily="34" charset="0"/>
-              </a:defRPr>
-            </a:lvl4pPr>
-            <a:lvl5pPr marL="2057400" indent="-228600">
-              <a:spcBef>
-                <a:spcPct val="20000"/>
-              </a:spcBef>
-              <a:buClr>
-                <a:schemeClr val="accent1"/>
-              </a:buClr>
-              <a:buFont typeface="Wingdings" panose="05000000000000000000" pitchFamily="2" charset="2"/>
-              <a:buChar char=""/>
-              <a:defRPr sz="2000">
-                <a:solidFill>
-                  <a:schemeClr val="tx1"/>
-                </a:solidFill>
-                <a:latin typeface="Arial" panose="020B0604020202020204" pitchFamily="34" charset="0"/>
-                <a:ea typeface="Arial" panose="020B0604020202020204" pitchFamily="34" charset="0"/>
-                <a:cs typeface="Arial" panose="020B0604020202020204" pitchFamily="34" charset="0"/>
-              </a:defRPr>
-            </a:lvl5pPr>
-            <a:lvl6pPr marL="2514600" indent="-228600" eaLnBrk="0" fontAlgn="base" hangingPunct="0">
-              <a:spcBef>
-                <a:spcPct val="20000"/>
-              </a:spcBef>
-              <a:spcAft>
-                <a:spcPct val="0"/>
-              </a:spcAft>
-              <a:buClr>
-                <a:schemeClr val="accent1"/>
-              </a:buClr>
-              <a:buFont typeface="Wingdings" panose="05000000000000000000" pitchFamily="2" charset="2"/>
-              <a:buChar char=""/>
-              <a:defRPr sz="2000">
-                <a:solidFill>
-                  <a:schemeClr val="tx1"/>
-                </a:solidFill>
-                <a:latin typeface="Arial" panose="020B0604020202020204" pitchFamily="34" charset="0"/>
-                <a:ea typeface="Arial" panose="020B0604020202020204" pitchFamily="34" charset="0"/>
-                <a:cs typeface="Arial" panose="020B0604020202020204" pitchFamily="34" charset="0"/>
-              </a:defRPr>
-            </a:lvl6pPr>
-            <a:lvl7pPr marL="2971800" indent="-228600" eaLnBrk="0" fontAlgn="base" hangingPunct="0">
-              <a:spcBef>
-                <a:spcPct val="20000"/>
-              </a:spcBef>
-              <a:spcAft>
-                <a:spcPct val="0"/>
-              </a:spcAft>
-              <a:buClr>
-                <a:schemeClr val="accent1"/>
-              </a:buClr>
-              <a:buFont typeface="Wingdings" panose="05000000000000000000" pitchFamily="2" charset="2"/>
-              <a:buChar char=""/>
-              <a:defRPr sz="2000">
-                <a:solidFill>
-                  <a:schemeClr val="tx1"/>
-                </a:solidFill>
-                <a:latin typeface="Arial" panose="020B0604020202020204" pitchFamily="34" charset="0"/>
-                <a:ea typeface="Arial" panose="020B0604020202020204" pitchFamily="34" charset="0"/>
-                <a:cs typeface="Arial" panose="020B0604020202020204" pitchFamily="34" charset="0"/>
-              </a:defRPr>
-            </a:lvl7pPr>
-            <a:lvl8pPr marL="3429000" indent="-228600" eaLnBrk="0" fontAlgn="base" hangingPunct="0">
-              <a:spcBef>
-                <a:spcPct val="20000"/>
-              </a:spcBef>
-              <a:spcAft>
-                <a:spcPct val="0"/>
-              </a:spcAft>
-              <a:buClr>
-                <a:schemeClr val="accent1"/>
-              </a:buClr>
-              <a:buFont typeface="Wingdings" panose="05000000000000000000" pitchFamily="2" charset="2"/>
-              <a:buChar char=""/>
-              <a:defRPr sz="2000">
-                <a:solidFill>
-                  <a:schemeClr val="tx1"/>
-                </a:solidFill>
-                <a:latin typeface="Arial" panose="020B0604020202020204" pitchFamily="34" charset="0"/>
-                <a:ea typeface="Arial" panose="020B0604020202020204" pitchFamily="34" charset="0"/>
-                <a:cs typeface="Arial" panose="020B0604020202020204" pitchFamily="34" charset="0"/>
-              </a:defRPr>
-            </a:lvl8pPr>
-            <a:lvl9pPr marL="3886200" indent="-228600" eaLnBrk="0" fontAlgn="base" hangingPunct="0">
-              <a:spcBef>
-                <a:spcPct val="20000"/>
-              </a:spcBef>
-              <a:spcAft>
-                <a:spcPct val="0"/>
-              </a:spcAft>
-              <a:buClr>
-                <a:schemeClr val="accent1"/>
-              </a:buClr>
-              <a:buFont typeface="Wingdings" panose="05000000000000000000" pitchFamily="2" charset="2"/>
-              <a:buChar char=""/>
-              <a:defRPr sz="2000">
-                <a:solidFill>
-                  <a:schemeClr val="tx1"/>
-                </a:solidFill>
-                <a:latin typeface="Arial" panose="020B0604020202020204" pitchFamily="34" charset="0"/>
-                <a:ea typeface="Arial" panose="020B0604020202020204" pitchFamily="34" charset="0"/>
-                <a:cs typeface="Arial" panose="020B0604020202020204" pitchFamily="34" charset="0"/>
-              </a:defRPr>
-            </a:lvl9pPr>
-          </a:lstStyle>
-          <a:p>
-            <a:pPr eaLnBrk="1" hangingPunct="1">
-              <a:spcBef>
-                <a:spcPct val="0"/>
-              </a:spcBef>
-              <a:buClrTx/>
-              <a:buFontTx/>
-              <a:buNone/>
-            </a:pPr>
-            <a:r>
-              <a:rPr lang="en-US" altLang="en-US" sz="1985" dirty="0">
-                <a:solidFill>
-                  <a:srgbClr val="292929"/>
-                </a:solidFill>
-                <a:latin typeface="charter"/>
-              </a:rPr>
-              <a:t>Multilayer perceptron</a:t>
-            </a:r>
-          </a:p>
-          <a:p>
-            <a:pPr eaLnBrk="1" hangingPunct="1">
-              <a:spcBef>
-                <a:spcPct val="0"/>
-              </a:spcBef>
-              <a:buClrTx/>
-              <a:buFontTx/>
-              <a:buNone/>
-            </a:pPr>
-            <a:r>
-              <a:rPr lang="en-US" altLang="en-US" sz="1985" dirty="0">
-                <a:solidFill>
-                  <a:srgbClr val="292929"/>
-                </a:solidFill>
-                <a:latin typeface="charter"/>
-              </a:rPr>
-              <a:t>Input layer of 128 neurons </a:t>
-            </a:r>
-          </a:p>
-          <a:p>
-            <a:pPr eaLnBrk="1" hangingPunct="1">
-              <a:spcBef>
-                <a:spcPct val="0"/>
-              </a:spcBef>
-              <a:buClrTx/>
-              <a:buFontTx/>
-              <a:buNone/>
-            </a:pPr>
-            <a:r>
-              <a:rPr lang="en-US" altLang="en-US" sz="1985" dirty="0">
-                <a:solidFill>
-                  <a:srgbClr val="292929"/>
-                </a:solidFill>
-                <a:latin typeface="charter"/>
-              </a:rPr>
-              <a:t>each neuron of the layer receives the 420x420 pixels values as input and assigns a weight per pixel value, which is 420x420 = 176400 weights per neuron </a:t>
-            </a:r>
-          </a:p>
-          <a:p>
-            <a:pPr eaLnBrk="1" hangingPunct="1">
-              <a:spcBef>
-                <a:spcPct val="0"/>
-              </a:spcBef>
-              <a:buClrTx/>
-              <a:buFontTx/>
-              <a:buNone/>
-            </a:pPr>
-            <a:r>
-              <a:rPr lang="en-US" altLang="en-US" sz="1985" dirty="0">
-                <a:solidFill>
-                  <a:srgbClr val="292929"/>
-                </a:solidFill>
-                <a:latin typeface="charter"/>
-              </a:rPr>
-              <a:t>Multiplied by total 128 neurons </a:t>
-            </a:r>
-          </a:p>
-          <a:p>
-            <a:pPr eaLnBrk="1" hangingPunct="1">
-              <a:spcBef>
-                <a:spcPct val="0"/>
-              </a:spcBef>
-              <a:buClrTx/>
-              <a:buFontTx/>
-              <a:buNone/>
-            </a:pPr>
-            <a:r>
-              <a:rPr lang="en-US" altLang="en-US" sz="1985" dirty="0">
-                <a:solidFill>
-                  <a:srgbClr val="292929"/>
-                </a:solidFill>
-                <a:latin typeface="charter"/>
-              </a:rPr>
-              <a:t>add 128 bias (one bias per neuron)</a:t>
-            </a:r>
-          </a:p>
-          <a:p>
-            <a:pPr eaLnBrk="1" hangingPunct="1">
-              <a:spcBef>
-                <a:spcPct val="0"/>
-              </a:spcBef>
-              <a:buClrTx/>
-              <a:buFontTx/>
-              <a:buNone/>
-            </a:pPr>
-            <a:endParaRPr lang="en-US" altLang="en-US" sz="1985" dirty="0">
-              <a:solidFill>
-                <a:srgbClr val="292929"/>
-              </a:solidFill>
-              <a:latin typeface="charter"/>
-            </a:endParaRPr>
-          </a:p>
-        </p:txBody>
-      </p:sp>
-      <p:sp>
-        <p:nvSpPr>
-          <p:cNvPr id="17414" name="TextBox 9">
-            <a:extLst>
-              <a:ext uri="{FF2B5EF4-FFF2-40B4-BE49-F238E27FC236}">
-                <a16:creationId xmlns:a16="http://schemas.microsoft.com/office/drawing/2014/main" id="{8C4D1145-7B8E-A47E-7888-5DAB815AAE7C}"/>
-              </a:ext>
-            </a:extLst>
-          </p:cNvPr>
-          <p:cNvSpPr txBox="1">
-            <a:spLocks noChangeArrowheads="1"/>
-          </p:cNvSpPr>
-          <p:nvPr/>
-        </p:nvSpPr>
-        <p:spPr bwMode="auto">
-          <a:xfrm>
-            <a:off x="5293924" y="3717360"/>
-            <a:ext cx="3780367" cy="1314206"/>
-          </a:xfrm>
-          <a:prstGeom prst="rect">
-            <a:avLst/>
-          </a:prstGeom>
-          <a:noFill/>
-          <a:ln>
-            <a:noFill/>
-          </a:ln>
-          <a:extLst>
-            <a:ext uri="{909E8E84-426E-40DD-AFC4-6F175D3DCCD1}">
-              <a14:hiddenFill xmlns:a14="http://schemas.microsoft.com/office/drawing/2010/main">
-                <a:solidFill>
-                  <a:srgbClr val="FFFFFF"/>
-                </a:solidFill>
-              </a14:hiddenFill>
-            </a:ext>
-            <a:ext uri="{91240B29-F687-4F45-9708-019B960494DF}">
-              <a14:hiddenLine xmlns:a14="http://schemas.microsoft.com/office/drawing/2010/main" w="9525">
-                <a:solidFill>
-                  <a:srgbClr val="000000"/>
-                </a:solidFill>
-                <a:miter lim="800000"/>
-                <a:headEnd/>
-                <a:tailEnd/>
-              </a14:hiddenLine>
-            </a:ext>
-          </a:extLst>
-        </p:spPr>
-        <p:txBody>
-          <a:bodyPr>
-            <a:spAutoFit/>
-          </a:bodyPr>
-          <a:lstStyle>
-            <a:lvl1pPr>
-              <a:spcBef>
-                <a:spcPct val="20000"/>
-              </a:spcBef>
-              <a:buClr>
-                <a:schemeClr val="accent1"/>
-              </a:buClr>
-              <a:buFont typeface="Wingdings" panose="05000000000000000000" pitchFamily="2" charset="2"/>
-              <a:buChar char="l"/>
-              <a:defRPr sz="3200">
-                <a:solidFill>
-                  <a:schemeClr val="tx1"/>
-                </a:solidFill>
-                <a:latin typeface="Arial" panose="020B0604020202020204" pitchFamily="34" charset="0"/>
-                <a:ea typeface="MS PGothic" panose="020B0600070205080204" pitchFamily="34" charset="-128"/>
-                <a:cs typeface="Arial" panose="020B0604020202020204" pitchFamily="34" charset="0"/>
-              </a:defRPr>
-            </a:lvl1pPr>
-            <a:lvl2pPr marL="742950" indent="-285750">
-              <a:spcBef>
-                <a:spcPct val="20000"/>
-              </a:spcBef>
-              <a:buClr>
-                <a:schemeClr val="accent1"/>
-              </a:buClr>
-              <a:buFont typeface="Wingdings" panose="05000000000000000000" pitchFamily="2" charset="2"/>
-              <a:buChar char="¡"/>
-              <a:defRPr sz="2700">
-                <a:solidFill>
-                  <a:schemeClr val="tx1"/>
-                </a:solidFill>
-                <a:latin typeface="Arial" panose="020B0604020202020204" pitchFamily="34" charset="0"/>
-                <a:ea typeface="Arial" panose="020B0604020202020204" pitchFamily="34" charset="0"/>
-                <a:cs typeface="Arial" panose="020B0604020202020204" pitchFamily="34" charset="0"/>
-              </a:defRPr>
-            </a:lvl2pPr>
-            <a:lvl3pPr marL="1143000" indent="-228600">
-              <a:spcBef>
-                <a:spcPct val="20000"/>
-              </a:spcBef>
-              <a:buClr>
-                <a:schemeClr val="accent1"/>
-              </a:buClr>
-              <a:buFont typeface="Wingdings" panose="05000000000000000000" pitchFamily="2" charset="2"/>
-              <a:buChar char="l"/>
-              <a:defRPr sz="2300">
-                <a:solidFill>
-                  <a:schemeClr val="tx1"/>
-                </a:solidFill>
-                <a:latin typeface="Arial" panose="020B0604020202020204" pitchFamily="34" charset="0"/>
-                <a:ea typeface="Arial" panose="020B0604020202020204" pitchFamily="34" charset="0"/>
-                <a:cs typeface="Arial" panose="020B0604020202020204" pitchFamily="34" charset="0"/>
-              </a:defRPr>
-            </a:lvl3pPr>
-            <a:lvl4pPr marL="1600200" indent="-228600">
-              <a:spcBef>
-                <a:spcPct val="20000"/>
-              </a:spcBef>
-              <a:buClr>
-                <a:schemeClr val="accent1"/>
-              </a:buClr>
-              <a:buChar char="•"/>
-              <a:defRPr sz="2000">
-                <a:solidFill>
-                  <a:schemeClr val="tx1"/>
-                </a:solidFill>
-                <a:latin typeface="Arial" panose="020B0604020202020204" pitchFamily="34" charset="0"/>
-                <a:ea typeface="Arial" panose="020B0604020202020204" pitchFamily="34" charset="0"/>
-                <a:cs typeface="Arial" panose="020B0604020202020204" pitchFamily="34" charset="0"/>
-              </a:defRPr>
-            </a:lvl4pPr>
-            <a:lvl5pPr marL="2057400" indent="-228600">
-              <a:spcBef>
-                <a:spcPct val="20000"/>
-              </a:spcBef>
-              <a:buClr>
-                <a:schemeClr val="accent1"/>
-              </a:buClr>
-              <a:buFont typeface="Wingdings" panose="05000000000000000000" pitchFamily="2" charset="2"/>
-              <a:buChar char=""/>
-              <a:defRPr sz="2000">
-                <a:solidFill>
-                  <a:schemeClr val="tx1"/>
-                </a:solidFill>
-                <a:latin typeface="Arial" panose="020B0604020202020204" pitchFamily="34" charset="0"/>
-                <a:ea typeface="Arial" panose="020B0604020202020204" pitchFamily="34" charset="0"/>
-                <a:cs typeface="Arial" panose="020B0604020202020204" pitchFamily="34" charset="0"/>
-              </a:defRPr>
-            </a:lvl5pPr>
-            <a:lvl6pPr marL="2514600" indent="-228600" eaLnBrk="0" fontAlgn="base" hangingPunct="0">
-              <a:spcBef>
-                <a:spcPct val="20000"/>
-              </a:spcBef>
-              <a:spcAft>
-                <a:spcPct val="0"/>
-              </a:spcAft>
-              <a:buClr>
-                <a:schemeClr val="accent1"/>
-              </a:buClr>
-              <a:buFont typeface="Wingdings" panose="05000000000000000000" pitchFamily="2" charset="2"/>
-              <a:buChar char=""/>
-              <a:defRPr sz="2000">
-                <a:solidFill>
-                  <a:schemeClr val="tx1"/>
-                </a:solidFill>
-                <a:latin typeface="Arial" panose="020B0604020202020204" pitchFamily="34" charset="0"/>
-                <a:ea typeface="Arial" panose="020B0604020202020204" pitchFamily="34" charset="0"/>
-                <a:cs typeface="Arial" panose="020B0604020202020204" pitchFamily="34" charset="0"/>
-              </a:defRPr>
-            </a:lvl6pPr>
-            <a:lvl7pPr marL="2971800" indent="-228600" eaLnBrk="0" fontAlgn="base" hangingPunct="0">
-              <a:spcBef>
-                <a:spcPct val="20000"/>
-              </a:spcBef>
-              <a:spcAft>
-                <a:spcPct val="0"/>
-              </a:spcAft>
-              <a:buClr>
-                <a:schemeClr val="accent1"/>
-              </a:buClr>
-              <a:buFont typeface="Wingdings" panose="05000000000000000000" pitchFamily="2" charset="2"/>
-              <a:buChar char=""/>
-              <a:defRPr sz="2000">
-                <a:solidFill>
-                  <a:schemeClr val="tx1"/>
-                </a:solidFill>
-                <a:latin typeface="Arial" panose="020B0604020202020204" pitchFamily="34" charset="0"/>
-                <a:ea typeface="Arial" panose="020B0604020202020204" pitchFamily="34" charset="0"/>
-                <a:cs typeface="Arial" panose="020B0604020202020204" pitchFamily="34" charset="0"/>
-              </a:defRPr>
-            </a:lvl7pPr>
-            <a:lvl8pPr marL="3429000" indent="-228600" eaLnBrk="0" fontAlgn="base" hangingPunct="0">
-              <a:spcBef>
-                <a:spcPct val="20000"/>
-              </a:spcBef>
-              <a:spcAft>
-                <a:spcPct val="0"/>
-              </a:spcAft>
-              <a:buClr>
-                <a:schemeClr val="accent1"/>
-              </a:buClr>
-              <a:buFont typeface="Wingdings" panose="05000000000000000000" pitchFamily="2" charset="2"/>
-              <a:buChar char=""/>
-              <a:defRPr sz="2000">
-                <a:solidFill>
-                  <a:schemeClr val="tx1"/>
-                </a:solidFill>
-                <a:latin typeface="Arial" panose="020B0604020202020204" pitchFamily="34" charset="0"/>
-                <a:ea typeface="Arial" panose="020B0604020202020204" pitchFamily="34" charset="0"/>
-                <a:cs typeface="Arial" panose="020B0604020202020204" pitchFamily="34" charset="0"/>
-              </a:defRPr>
-            </a:lvl8pPr>
-            <a:lvl9pPr marL="3886200" indent="-228600" eaLnBrk="0" fontAlgn="base" hangingPunct="0">
-              <a:spcBef>
-                <a:spcPct val="20000"/>
-              </a:spcBef>
-              <a:spcAft>
-                <a:spcPct val="0"/>
-              </a:spcAft>
-              <a:buClr>
-                <a:schemeClr val="accent1"/>
-              </a:buClr>
-              <a:buFont typeface="Wingdings" panose="05000000000000000000" pitchFamily="2" charset="2"/>
-              <a:buChar char=""/>
-              <a:defRPr sz="2000">
-                <a:solidFill>
-                  <a:schemeClr val="tx1"/>
-                </a:solidFill>
-                <a:latin typeface="Arial" panose="020B0604020202020204" pitchFamily="34" charset="0"/>
-                <a:ea typeface="Arial" panose="020B0604020202020204" pitchFamily="34" charset="0"/>
-                <a:cs typeface="Arial" panose="020B0604020202020204" pitchFamily="34" charset="0"/>
-              </a:defRPr>
-            </a:lvl9pPr>
-          </a:lstStyle>
-          <a:p>
-            <a:pPr eaLnBrk="1" hangingPunct="1">
-              <a:spcBef>
-                <a:spcPct val="0"/>
-              </a:spcBef>
-              <a:buClrTx/>
-              <a:buFontTx/>
-              <a:buNone/>
-            </a:pPr>
-            <a:r>
-              <a:rPr lang="en-US" altLang="en-US" sz="1985" dirty="0">
-                <a:solidFill>
-                  <a:srgbClr val="292929"/>
-                </a:solidFill>
-                <a:latin typeface="charter"/>
-              </a:rPr>
-              <a:t>This tiny model will have to learn more than </a:t>
-            </a:r>
-            <a:r>
-              <a:rPr lang="en-US" altLang="en-US" sz="1985" dirty="0">
-                <a:solidFill>
-                  <a:srgbClr val="FF0000"/>
-                </a:solidFill>
-                <a:latin typeface="charter"/>
-              </a:rPr>
-              <a:t>22 million parameters, for only 128 neurons and a single intermediate layer.</a:t>
-            </a:r>
-            <a:endParaRPr lang="en-US" altLang="en-US" sz="1985" dirty="0">
-              <a:solidFill>
-                <a:srgbClr val="FF0000"/>
-              </a:solidFill>
-            </a:endParaRPr>
-          </a:p>
-        </p:txBody>
-      </p:sp>
-    </p:spTree>
-  </p:cSld>
-  <p:clrMapOvr>
-    <a:masterClrMapping/>
-  </p:clrMapOvr>
-</p:sld>
-</file>
-
-<file path=ppt/slides/slide40.xml><?xml version="1.0" encoding="utf-8"?>
+<file path=ppt/slides/slide39.xml><?xml version="1.0" encoding="utf-8"?>
 <p:sld xmlns:a="http://schemas.openxmlformats.org/drawingml/2006/main" xmlns:r="http://schemas.openxmlformats.org/officeDocument/2006/relationships" xmlns:p="http://schemas.openxmlformats.org/presentationml/2006/main">
   <p:cSld>
     <p:spTree>
@@ -21191,7 +19844,1171 @@
 </p:sld>
 </file>
 
-<file path=ppt/slides/slide41.xml><?xml version="1.0" encoding="utf-8"?>
+<file path=ppt/slides/slide4.xml><?xml version="1.0" encoding="utf-8"?>
+<p:sld xmlns:a="http://schemas.openxmlformats.org/drawingml/2006/main" xmlns:r="http://schemas.openxmlformats.org/officeDocument/2006/relationships" xmlns:p="http://schemas.openxmlformats.org/presentationml/2006/main">
+  <p:cSld>
+    <p:spTree>
+      <p:nvGrpSpPr>
+        <p:cNvPr id="1" name=""/>
+        <p:cNvGrpSpPr/>
+        <p:nvPr/>
+      </p:nvGrpSpPr>
+      <p:grpSpPr>
+        <a:xfrm>
+          <a:off x="0" y="0"/>
+          <a:ext cx="0" cy="0"/>
+          <a:chOff x="0" y="0"/>
+          <a:chExt cx="0" cy="0"/>
+        </a:xfrm>
+      </p:grpSpPr>
+      <p:sp>
+        <p:nvSpPr>
+          <p:cNvPr id="17410" name="Title 1">
+            <a:extLst>
+              <a:ext uri="{FF2B5EF4-FFF2-40B4-BE49-F238E27FC236}">
+                <a16:creationId xmlns:a16="http://schemas.microsoft.com/office/drawing/2014/main" id="{1C78FF26-004C-D3F8-3C1F-21ACCACF5F98}"/>
+              </a:ext>
+            </a:extLst>
+          </p:cNvPr>
+          <p:cNvSpPr>
+            <a:spLocks noGrp="1" noChangeArrowheads="1"/>
+          </p:cNvSpPr>
+          <p:nvPr>
+            <p:ph type="title"/>
+          </p:nvPr>
+        </p:nvSpPr>
+        <p:spPr/>
+        <p:txBody>
+          <a:bodyPr/>
+          <a:lstStyle/>
+          <a:p>
+            <a:r>
+              <a:rPr lang="en-US" altLang="en-US" dirty="0">
+                <a:solidFill>
+                  <a:srgbClr val="292929"/>
+                </a:solidFill>
+                <a:latin typeface="charter"/>
+              </a:rPr>
+              <a:t>Create a Deep Learning model to perform a cat or dog </a:t>
+            </a:r>
+            <a:r>
+              <a:rPr lang="en-US" altLang="en-US" dirty="0">
+                <a:solidFill>
+                  <a:srgbClr val="FF0000"/>
+                </a:solidFill>
+                <a:latin typeface="charter"/>
+              </a:rPr>
+              <a:t>classification task</a:t>
+            </a:r>
+            <a:endParaRPr lang="en-US" altLang="en-US" dirty="0">
+              <a:solidFill>
+                <a:srgbClr val="FF0000"/>
+              </a:solidFill>
+            </a:endParaRPr>
+          </a:p>
+        </p:txBody>
+      </p:sp>
+      <p:sp>
+        <p:nvSpPr>
+          <p:cNvPr id="17411" name="TextBox 3">
+            <a:extLst>
+              <a:ext uri="{FF2B5EF4-FFF2-40B4-BE49-F238E27FC236}">
+                <a16:creationId xmlns:a16="http://schemas.microsoft.com/office/drawing/2014/main" id="{959A0048-B017-D824-F7D6-96ADD1391F1B}"/>
+              </a:ext>
+            </a:extLst>
+          </p:cNvPr>
+          <p:cNvSpPr txBox="1">
+            <a:spLocks noChangeArrowheads="1"/>
+          </p:cNvSpPr>
+          <p:nvPr/>
+        </p:nvSpPr>
+        <p:spPr bwMode="auto">
+          <a:xfrm>
+            <a:off x="1639570" y="1260123"/>
+            <a:ext cx="3780367" cy="703269"/>
+          </a:xfrm>
+          <a:prstGeom prst="rect">
+            <a:avLst/>
+          </a:prstGeom>
+          <a:noFill/>
+          <a:ln>
+            <a:noFill/>
+          </a:ln>
+          <a:extLst>
+            <a:ext uri="{909E8E84-426E-40DD-AFC4-6F175D3DCCD1}">
+              <a14:hiddenFill xmlns:a14="http://schemas.microsoft.com/office/drawing/2010/main">
+                <a:solidFill>
+                  <a:srgbClr val="FFFFFF"/>
+                </a:solidFill>
+              </a14:hiddenFill>
+            </a:ext>
+            <a:ext uri="{91240B29-F687-4F45-9708-019B960494DF}">
+              <a14:hiddenLine xmlns:a14="http://schemas.microsoft.com/office/drawing/2010/main" w="9525">
+                <a:solidFill>
+                  <a:srgbClr val="000000"/>
+                </a:solidFill>
+                <a:miter lim="800000"/>
+                <a:headEnd/>
+                <a:tailEnd/>
+              </a14:hiddenLine>
+            </a:ext>
+          </a:extLst>
+        </p:spPr>
+        <p:txBody>
+          <a:bodyPr>
+            <a:spAutoFit/>
+          </a:bodyPr>
+          <a:lstStyle>
+            <a:lvl1pPr>
+              <a:spcBef>
+                <a:spcPct val="20000"/>
+              </a:spcBef>
+              <a:buClr>
+                <a:schemeClr val="accent1"/>
+              </a:buClr>
+              <a:buFont typeface="Wingdings" panose="05000000000000000000" pitchFamily="2" charset="2"/>
+              <a:buChar char="l"/>
+              <a:defRPr sz="3200">
+                <a:solidFill>
+                  <a:schemeClr val="tx1"/>
+                </a:solidFill>
+                <a:latin typeface="Arial" panose="020B0604020202020204" pitchFamily="34" charset="0"/>
+                <a:ea typeface="MS PGothic" panose="020B0600070205080204" pitchFamily="34" charset="-128"/>
+                <a:cs typeface="Arial" panose="020B0604020202020204" pitchFamily="34" charset="0"/>
+              </a:defRPr>
+            </a:lvl1pPr>
+            <a:lvl2pPr marL="742950" indent="-285750">
+              <a:spcBef>
+                <a:spcPct val="20000"/>
+              </a:spcBef>
+              <a:buClr>
+                <a:schemeClr val="accent1"/>
+              </a:buClr>
+              <a:buFont typeface="Wingdings" panose="05000000000000000000" pitchFamily="2" charset="2"/>
+              <a:buChar char="¡"/>
+              <a:defRPr sz="2700">
+                <a:solidFill>
+                  <a:schemeClr val="tx1"/>
+                </a:solidFill>
+                <a:latin typeface="Arial" panose="020B0604020202020204" pitchFamily="34" charset="0"/>
+                <a:ea typeface="Arial" panose="020B0604020202020204" pitchFamily="34" charset="0"/>
+                <a:cs typeface="Arial" panose="020B0604020202020204" pitchFamily="34" charset="0"/>
+              </a:defRPr>
+            </a:lvl2pPr>
+            <a:lvl3pPr marL="1143000" indent="-228600">
+              <a:spcBef>
+                <a:spcPct val="20000"/>
+              </a:spcBef>
+              <a:buClr>
+                <a:schemeClr val="accent1"/>
+              </a:buClr>
+              <a:buFont typeface="Wingdings" panose="05000000000000000000" pitchFamily="2" charset="2"/>
+              <a:buChar char="l"/>
+              <a:defRPr sz="2300">
+                <a:solidFill>
+                  <a:schemeClr val="tx1"/>
+                </a:solidFill>
+                <a:latin typeface="Arial" panose="020B0604020202020204" pitchFamily="34" charset="0"/>
+                <a:ea typeface="Arial" panose="020B0604020202020204" pitchFamily="34" charset="0"/>
+                <a:cs typeface="Arial" panose="020B0604020202020204" pitchFamily="34" charset="0"/>
+              </a:defRPr>
+            </a:lvl3pPr>
+            <a:lvl4pPr marL="1600200" indent="-228600">
+              <a:spcBef>
+                <a:spcPct val="20000"/>
+              </a:spcBef>
+              <a:buClr>
+                <a:schemeClr val="accent1"/>
+              </a:buClr>
+              <a:buChar char="•"/>
+              <a:defRPr sz="2000">
+                <a:solidFill>
+                  <a:schemeClr val="tx1"/>
+                </a:solidFill>
+                <a:latin typeface="Arial" panose="020B0604020202020204" pitchFamily="34" charset="0"/>
+                <a:ea typeface="Arial" panose="020B0604020202020204" pitchFamily="34" charset="0"/>
+                <a:cs typeface="Arial" panose="020B0604020202020204" pitchFamily="34" charset="0"/>
+              </a:defRPr>
+            </a:lvl4pPr>
+            <a:lvl5pPr marL="2057400" indent="-228600">
+              <a:spcBef>
+                <a:spcPct val="20000"/>
+              </a:spcBef>
+              <a:buClr>
+                <a:schemeClr val="accent1"/>
+              </a:buClr>
+              <a:buFont typeface="Wingdings" panose="05000000000000000000" pitchFamily="2" charset="2"/>
+              <a:buChar char=""/>
+              <a:defRPr sz="2000">
+                <a:solidFill>
+                  <a:schemeClr val="tx1"/>
+                </a:solidFill>
+                <a:latin typeface="Arial" panose="020B0604020202020204" pitchFamily="34" charset="0"/>
+                <a:ea typeface="Arial" panose="020B0604020202020204" pitchFamily="34" charset="0"/>
+                <a:cs typeface="Arial" panose="020B0604020202020204" pitchFamily="34" charset="0"/>
+              </a:defRPr>
+            </a:lvl5pPr>
+            <a:lvl6pPr marL="2514600" indent="-228600" eaLnBrk="0" fontAlgn="base" hangingPunct="0">
+              <a:spcBef>
+                <a:spcPct val="20000"/>
+              </a:spcBef>
+              <a:spcAft>
+                <a:spcPct val="0"/>
+              </a:spcAft>
+              <a:buClr>
+                <a:schemeClr val="accent1"/>
+              </a:buClr>
+              <a:buFont typeface="Wingdings" panose="05000000000000000000" pitchFamily="2" charset="2"/>
+              <a:buChar char=""/>
+              <a:defRPr sz="2000">
+                <a:solidFill>
+                  <a:schemeClr val="tx1"/>
+                </a:solidFill>
+                <a:latin typeface="Arial" panose="020B0604020202020204" pitchFamily="34" charset="0"/>
+                <a:ea typeface="Arial" panose="020B0604020202020204" pitchFamily="34" charset="0"/>
+                <a:cs typeface="Arial" panose="020B0604020202020204" pitchFamily="34" charset="0"/>
+              </a:defRPr>
+            </a:lvl6pPr>
+            <a:lvl7pPr marL="2971800" indent="-228600" eaLnBrk="0" fontAlgn="base" hangingPunct="0">
+              <a:spcBef>
+                <a:spcPct val="20000"/>
+              </a:spcBef>
+              <a:spcAft>
+                <a:spcPct val="0"/>
+              </a:spcAft>
+              <a:buClr>
+                <a:schemeClr val="accent1"/>
+              </a:buClr>
+              <a:buFont typeface="Wingdings" panose="05000000000000000000" pitchFamily="2" charset="2"/>
+              <a:buChar char=""/>
+              <a:defRPr sz="2000">
+                <a:solidFill>
+                  <a:schemeClr val="tx1"/>
+                </a:solidFill>
+                <a:latin typeface="Arial" panose="020B0604020202020204" pitchFamily="34" charset="0"/>
+                <a:ea typeface="Arial" panose="020B0604020202020204" pitchFamily="34" charset="0"/>
+                <a:cs typeface="Arial" panose="020B0604020202020204" pitchFamily="34" charset="0"/>
+              </a:defRPr>
+            </a:lvl7pPr>
+            <a:lvl8pPr marL="3429000" indent="-228600" eaLnBrk="0" fontAlgn="base" hangingPunct="0">
+              <a:spcBef>
+                <a:spcPct val="20000"/>
+              </a:spcBef>
+              <a:spcAft>
+                <a:spcPct val="0"/>
+              </a:spcAft>
+              <a:buClr>
+                <a:schemeClr val="accent1"/>
+              </a:buClr>
+              <a:buFont typeface="Wingdings" panose="05000000000000000000" pitchFamily="2" charset="2"/>
+              <a:buChar char=""/>
+              <a:defRPr sz="2000">
+                <a:solidFill>
+                  <a:schemeClr val="tx1"/>
+                </a:solidFill>
+                <a:latin typeface="Arial" panose="020B0604020202020204" pitchFamily="34" charset="0"/>
+                <a:ea typeface="Arial" panose="020B0604020202020204" pitchFamily="34" charset="0"/>
+                <a:cs typeface="Arial" panose="020B0604020202020204" pitchFamily="34" charset="0"/>
+              </a:defRPr>
+            </a:lvl8pPr>
+            <a:lvl9pPr marL="3886200" indent="-228600" eaLnBrk="0" fontAlgn="base" hangingPunct="0">
+              <a:spcBef>
+                <a:spcPct val="20000"/>
+              </a:spcBef>
+              <a:spcAft>
+                <a:spcPct val="0"/>
+              </a:spcAft>
+              <a:buClr>
+                <a:schemeClr val="accent1"/>
+              </a:buClr>
+              <a:buFont typeface="Wingdings" panose="05000000000000000000" pitchFamily="2" charset="2"/>
+              <a:buChar char=""/>
+              <a:defRPr sz="2000">
+                <a:solidFill>
+                  <a:schemeClr val="tx1"/>
+                </a:solidFill>
+                <a:latin typeface="Arial" panose="020B0604020202020204" pitchFamily="34" charset="0"/>
+                <a:ea typeface="Arial" panose="020B0604020202020204" pitchFamily="34" charset="0"/>
+                <a:cs typeface="Arial" panose="020B0604020202020204" pitchFamily="34" charset="0"/>
+              </a:defRPr>
+            </a:lvl9pPr>
+          </a:lstStyle>
+          <a:p>
+            <a:pPr eaLnBrk="1" hangingPunct="1">
+              <a:spcBef>
+                <a:spcPct val="0"/>
+              </a:spcBef>
+              <a:buClrTx/>
+              <a:buFontTx/>
+              <a:buNone/>
+            </a:pPr>
+            <a:r>
+              <a:rPr lang="en-US" altLang="en-US" sz="1985">
+                <a:solidFill>
+                  <a:srgbClr val="292929"/>
+                </a:solidFill>
+                <a:latin typeface="charter"/>
+              </a:rPr>
+              <a:t>Dataset of images sized 420x420px grayscale</a:t>
+            </a:r>
+            <a:endParaRPr lang="en-US" altLang="en-US" sz="1985"/>
+          </a:p>
+        </p:txBody>
+      </p:sp>
+      <p:sp>
+        <p:nvSpPr>
+          <p:cNvPr id="17412" name="TextBox 5">
+            <a:extLst>
+              <a:ext uri="{FF2B5EF4-FFF2-40B4-BE49-F238E27FC236}">
+                <a16:creationId xmlns:a16="http://schemas.microsoft.com/office/drawing/2014/main" id="{116E34B2-CA74-709C-4F85-99D78BD774C0}"/>
+              </a:ext>
+            </a:extLst>
+          </p:cNvPr>
+          <p:cNvSpPr txBox="1">
+            <a:spLocks noChangeArrowheads="1"/>
+          </p:cNvSpPr>
+          <p:nvPr/>
+        </p:nvSpPr>
+        <p:spPr bwMode="auto">
+          <a:xfrm>
+            <a:off x="4852882" y="1737919"/>
+            <a:ext cx="3780367" cy="1008738"/>
+          </a:xfrm>
+          <a:prstGeom prst="rect">
+            <a:avLst/>
+          </a:prstGeom>
+          <a:noFill/>
+          <a:ln>
+            <a:noFill/>
+          </a:ln>
+          <a:extLst>
+            <a:ext uri="{909E8E84-426E-40DD-AFC4-6F175D3DCCD1}">
+              <a14:hiddenFill xmlns:a14="http://schemas.microsoft.com/office/drawing/2010/main">
+                <a:solidFill>
+                  <a:srgbClr val="FFFFFF"/>
+                </a:solidFill>
+              </a14:hiddenFill>
+            </a:ext>
+            <a:ext uri="{91240B29-F687-4F45-9708-019B960494DF}">
+              <a14:hiddenLine xmlns:a14="http://schemas.microsoft.com/office/drawing/2010/main" w="9525">
+                <a:solidFill>
+                  <a:srgbClr val="000000"/>
+                </a:solidFill>
+                <a:miter lim="800000"/>
+                <a:headEnd/>
+                <a:tailEnd/>
+              </a14:hiddenLine>
+            </a:ext>
+          </a:extLst>
+        </p:spPr>
+        <p:txBody>
+          <a:bodyPr>
+            <a:spAutoFit/>
+          </a:bodyPr>
+          <a:lstStyle>
+            <a:lvl1pPr>
+              <a:spcBef>
+                <a:spcPct val="20000"/>
+              </a:spcBef>
+              <a:buClr>
+                <a:schemeClr val="accent1"/>
+              </a:buClr>
+              <a:buFont typeface="Wingdings" panose="05000000000000000000" pitchFamily="2" charset="2"/>
+              <a:buChar char="l"/>
+              <a:defRPr sz="3200">
+                <a:solidFill>
+                  <a:schemeClr val="tx1"/>
+                </a:solidFill>
+                <a:latin typeface="Arial" panose="020B0604020202020204" pitchFamily="34" charset="0"/>
+                <a:ea typeface="MS PGothic" panose="020B0600070205080204" pitchFamily="34" charset="-128"/>
+                <a:cs typeface="Arial" panose="020B0604020202020204" pitchFamily="34" charset="0"/>
+              </a:defRPr>
+            </a:lvl1pPr>
+            <a:lvl2pPr marL="742950" indent="-285750">
+              <a:spcBef>
+                <a:spcPct val="20000"/>
+              </a:spcBef>
+              <a:buClr>
+                <a:schemeClr val="accent1"/>
+              </a:buClr>
+              <a:buFont typeface="Wingdings" panose="05000000000000000000" pitchFamily="2" charset="2"/>
+              <a:buChar char="¡"/>
+              <a:defRPr sz="2700">
+                <a:solidFill>
+                  <a:schemeClr val="tx1"/>
+                </a:solidFill>
+                <a:latin typeface="Arial" panose="020B0604020202020204" pitchFamily="34" charset="0"/>
+                <a:ea typeface="Arial" panose="020B0604020202020204" pitchFamily="34" charset="0"/>
+                <a:cs typeface="Arial" panose="020B0604020202020204" pitchFamily="34" charset="0"/>
+              </a:defRPr>
+            </a:lvl2pPr>
+            <a:lvl3pPr marL="1143000" indent="-228600">
+              <a:spcBef>
+                <a:spcPct val="20000"/>
+              </a:spcBef>
+              <a:buClr>
+                <a:schemeClr val="accent1"/>
+              </a:buClr>
+              <a:buFont typeface="Wingdings" panose="05000000000000000000" pitchFamily="2" charset="2"/>
+              <a:buChar char="l"/>
+              <a:defRPr sz="2300">
+                <a:solidFill>
+                  <a:schemeClr val="tx1"/>
+                </a:solidFill>
+                <a:latin typeface="Arial" panose="020B0604020202020204" pitchFamily="34" charset="0"/>
+                <a:ea typeface="Arial" panose="020B0604020202020204" pitchFamily="34" charset="0"/>
+                <a:cs typeface="Arial" panose="020B0604020202020204" pitchFamily="34" charset="0"/>
+              </a:defRPr>
+            </a:lvl3pPr>
+            <a:lvl4pPr marL="1600200" indent="-228600">
+              <a:spcBef>
+                <a:spcPct val="20000"/>
+              </a:spcBef>
+              <a:buClr>
+                <a:schemeClr val="accent1"/>
+              </a:buClr>
+              <a:buChar char="•"/>
+              <a:defRPr sz="2000">
+                <a:solidFill>
+                  <a:schemeClr val="tx1"/>
+                </a:solidFill>
+                <a:latin typeface="Arial" panose="020B0604020202020204" pitchFamily="34" charset="0"/>
+                <a:ea typeface="Arial" panose="020B0604020202020204" pitchFamily="34" charset="0"/>
+                <a:cs typeface="Arial" panose="020B0604020202020204" pitchFamily="34" charset="0"/>
+              </a:defRPr>
+            </a:lvl4pPr>
+            <a:lvl5pPr marL="2057400" indent="-228600">
+              <a:spcBef>
+                <a:spcPct val="20000"/>
+              </a:spcBef>
+              <a:buClr>
+                <a:schemeClr val="accent1"/>
+              </a:buClr>
+              <a:buFont typeface="Wingdings" panose="05000000000000000000" pitchFamily="2" charset="2"/>
+              <a:buChar char=""/>
+              <a:defRPr sz="2000">
+                <a:solidFill>
+                  <a:schemeClr val="tx1"/>
+                </a:solidFill>
+                <a:latin typeface="Arial" panose="020B0604020202020204" pitchFamily="34" charset="0"/>
+                <a:ea typeface="Arial" panose="020B0604020202020204" pitchFamily="34" charset="0"/>
+                <a:cs typeface="Arial" panose="020B0604020202020204" pitchFamily="34" charset="0"/>
+              </a:defRPr>
+            </a:lvl5pPr>
+            <a:lvl6pPr marL="2514600" indent="-228600" eaLnBrk="0" fontAlgn="base" hangingPunct="0">
+              <a:spcBef>
+                <a:spcPct val="20000"/>
+              </a:spcBef>
+              <a:spcAft>
+                <a:spcPct val="0"/>
+              </a:spcAft>
+              <a:buClr>
+                <a:schemeClr val="accent1"/>
+              </a:buClr>
+              <a:buFont typeface="Wingdings" panose="05000000000000000000" pitchFamily="2" charset="2"/>
+              <a:buChar char=""/>
+              <a:defRPr sz="2000">
+                <a:solidFill>
+                  <a:schemeClr val="tx1"/>
+                </a:solidFill>
+                <a:latin typeface="Arial" panose="020B0604020202020204" pitchFamily="34" charset="0"/>
+                <a:ea typeface="Arial" panose="020B0604020202020204" pitchFamily="34" charset="0"/>
+                <a:cs typeface="Arial" panose="020B0604020202020204" pitchFamily="34" charset="0"/>
+              </a:defRPr>
+            </a:lvl6pPr>
+            <a:lvl7pPr marL="2971800" indent="-228600" eaLnBrk="0" fontAlgn="base" hangingPunct="0">
+              <a:spcBef>
+                <a:spcPct val="20000"/>
+              </a:spcBef>
+              <a:spcAft>
+                <a:spcPct val="0"/>
+              </a:spcAft>
+              <a:buClr>
+                <a:schemeClr val="accent1"/>
+              </a:buClr>
+              <a:buFont typeface="Wingdings" panose="05000000000000000000" pitchFamily="2" charset="2"/>
+              <a:buChar char=""/>
+              <a:defRPr sz="2000">
+                <a:solidFill>
+                  <a:schemeClr val="tx1"/>
+                </a:solidFill>
+                <a:latin typeface="Arial" panose="020B0604020202020204" pitchFamily="34" charset="0"/>
+                <a:ea typeface="Arial" panose="020B0604020202020204" pitchFamily="34" charset="0"/>
+                <a:cs typeface="Arial" panose="020B0604020202020204" pitchFamily="34" charset="0"/>
+              </a:defRPr>
+            </a:lvl7pPr>
+            <a:lvl8pPr marL="3429000" indent="-228600" eaLnBrk="0" fontAlgn="base" hangingPunct="0">
+              <a:spcBef>
+                <a:spcPct val="20000"/>
+              </a:spcBef>
+              <a:spcAft>
+                <a:spcPct val="0"/>
+              </a:spcAft>
+              <a:buClr>
+                <a:schemeClr val="accent1"/>
+              </a:buClr>
+              <a:buFont typeface="Wingdings" panose="05000000000000000000" pitchFamily="2" charset="2"/>
+              <a:buChar char=""/>
+              <a:defRPr sz="2000">
+                <a:solidFill>
+                  <a:schemeClr val="tx1"/>
+                </a:solidFill>
+                <a:latin typeface="Arial" panose="020B0604020202020204" pitchFamily="34" charset="0"/>
+                <a:ea typeface="Arial" panose="020B0604020202020204" pitchFamily="34" charset="0"/>
+                <a:cs typeface="Arial" panose="020B0604020202020204" pitchFamily="34" charset="0"/>
+              </a:defRPr>
+            </a:lvl8pPr>
+            <a:lvl9pPr marL="3886200" indent="-228600" eaLnBrk="0" fontAlgn="base" hangingPunct="0">
+              <a:spcBef>
+                <a:spcPct val="20000"/>
+              </a:spcBef>
+              <a:spcAft>
+                <a:spcPct val="0"/>
+              </a:spcAft>
+              <a:buClr>
+                <a:schemeClr val="accent1"/>
+              </a:buClr>
+              <a:buFont typeface="Wingdings" panose="05000000000000000000" pitchFamily="2" charset="2"/>
+              <a:buChar char=""/>
+              <a:defRPr sz="2000">
+                <a:solidFill>
+                  <a:schemeClr val="tx1"/>
+                </a:solidFill>
+                <a:latin typeface="Arial" panose="020B0604020202020204" pitchFamily="34" charset="0"/>
+                <a:ea typeface="Arial" panose="020B0604020202020204" pitchFamily="34" charset="0"/>
+                <a:cs typeface="Arial" panose="020B0604020202020204" pitchFamily="34" charset="0"/>
+              </a:defRPr>
+            </a:lvl9pPr>
+          </a:lstStyle>
+          <a:p>
+            <a:pPr eaLnBrk="1" hangingPunct="1">
+              <a:spcBef>
+                <a:spcPct val="0"/>
+              </a:spcBef>
+              <a:buClrTx/>
+              <a:buFontTx/>
+              <a:buNone/>
+            </a:pPr>
+            <a:r>
+              <a:rPr lang="en-US" altLang="en-US" sz="1985">
+                <a:solidFill>
+                  <a:srgbClr val="292929"/>
+                </a:solidFill>
+                <a:latin typeface="charter"/>
+              </a:rPr>
+              <a:t>After the training, the model is supposed to classify the  image as a dog or cat</a:t>
+            </a:r>
+            <a:endParaRPr lang="en-US" altLang="en-US" sz="1985"/>
+          </a:p>
+        </p:txBody>
+      </p:sp>
+      <p:sp>
+        <p:nvSpPr>
+          <p:cNvPr id="17413" name="TextBox 7">
+            <a:extLst>
+              <a:ext uri="{FF2B5EF4-FFF2-40B4-BE49-F238E27FC236}">
+                <a16:creationId xmlns:a16="http://schemas.microsoft.com/office/drawing/2014/main" id="{9C37DC54-B6D6-6D63-D138-D0FEC219F7DE}"/>
+              </a:ext>
+            </a:extLst>
+          </p:cNvPr>
+          <p:cNvSpPr txBox="1">
+            <a:spLocks noChangeArrowheads="1"/>
+          </p:cNvSpPr>
+          <p:nvPr/>
+        </p:nvSpPr>
+        <p:spPr bwMode="auto">
+          <a:xfrm>
+            <a:off x="1576564" y="2429674"/>
+            <a:ext cx="3780367" cy="3147015"/>
+          </a:xfrm>
+          <a:prstGeom prst="rect">
+            <a:avLst/>
+          </a:prstGeom>
+          <a:noFill/>
+          <a:ln>
+            <a:noFill/>
+          </a:ln>
+          <a:extLst>
+            <a:ext uri="{909E8E84-426E-40DD-AFC4-6F175D3DCCD1}">
+              <a14:hiddenFill xmlns:a14="http://schemas.microsoft.com/office/drawing/2010/main">
+                <a:solidFill>
+                  <a:srgbClr val="FFFFFF"/>
+                </a:solidFill>
+              </a14:hiddenFill>
+            </a:ext>
+            <a:ext uri="{91240B29-F687-4F45-9708-019B960494DF}">
+              <a14:hiddenLine xmlns:a14="http://schemas.microsoft.com/office/drawing/2010/main" w="9525">
+                <a:solidFill>
+                  <a:srgbClr val="000000"/>
+                </a:solidFill>
+                <a:miter lim="800000"/>
+                <a:headEnd/>
+                <a:tailEnd/>
+              </a14:hiddenLine>
+            </a:ext>
+          </a:extLst>
+        </p:spPr>
+        <p:txBody>
+          <a:bodyPr>
+            <a:spAutoFit/>
+          </a:bodyPr>
+          <a:lstStyle>
+            <a:lvl1pPr>
+              <a:spcBef>
+                <a:spcPct val="20000"/>
+              </a:spcBef>
+              <a:buClr>
+                <a:schemeClr val="accent1"/>
+              </a:buClr>
+              <a:buFont typeface="Wingdings" panose="05000000000000000000" pitchFamily="2" charset="2"/>
+              <a:buChar char="l"/>
+              <a:defRPr sz="3200">
+                <a:solidFill>
+                  <a:schemeClr val="tx1"/>
+                </a:solidFill>
+                <a:latin typeface="Arial" panose="020B0604020202020204" pitchFamily="34" charset="0"/>
+                <a:ea typeface="MS PGothic" panose="020B0600070205080204" pitchFamily="34" charset="-128"/>
+                <a:cs typeface="Arial" panose="020B0604020202020204" pitchFamily="34" charset="0"/>
+              </a:defRPr>
+            </a:lvl1pPr>
+            <a:lvl2pPr marL="742950" indent="-285750">
+              <a:spcBef>
+                <a:spcPct val="20000"/>
+              </a:spcBef>
+              <a:buClr>
+                <a:schemeClr val="accent1"/>
+              </a:buClr>
+              <a:buFont typeface="Wingdings" panose="05000000000000000000" pitchFamily="2" charset="2"/>
+              <a:buChar char="¡"/>
+              <a:defRPr sz="2700">
+                <a:solidFill>
+                  <a:schemeClr val="tx1"/>
+                </a:solidFill>
+                <a:latin typeface="Arial" panose="020B0604020202020204" pitchFamily="34" charset="0"/>
+                <a:ea typeface="Arial" panose="020B0604020202020204" pitchFamily="34" charset="0"/>
+                <a:cs typeface="Arial" panose="020B0604020202020204" pitchFamily="34" charset="0"/>
+              </a:defRPr>
+            </a:lvl2pPr>
+            <a:lvl3pPr marL="1143000" indent="-228600">
+              <a:spcBef>
+                <a:spcPct val="20000"/>
+              </a:spcBef>
+              <a:buClr>
+                <a:schemeClr val="accent1"/>
+              </a:buClr>
+              <a:buFont typeface="Wingdings" panose="05000000000000000000" pitchFamily="2" charset="2"/>
+              <a:buChar char="l"/>
+              <a:defRPr sz="2300">
+                <a:solidFill>
+                  <a:schemeClr val="tx1"/>
+                </a:solidFill>
+                <a:latin typeface="Arial" panose="020B0604020202020204" pitchFamily="34" charset="0"/>
+                <a:ea typeface="Arial" panose="020B0604020202020204" pitchFamily="34" charset="0"/>
+                <a:cs typeface="Arial" panose="020B0604020202020204" pitchFamily="34" charset="0"/>
+              </a:defRPr>
+            </a:lvl3pPr>
+            <a:lvl4pPr marL="1600200" indent="-228600">
+              <a:spcBef>
+                <a:spcPct val="20000"/>
+              </a:spcBef>
+              <a:buClr>
+                <a:schemeClr val="accent1"/>
+              </a:buClr>
+              <a:buChar char="•"/>
+              <a:defRPr sz="2000">
+                <a:solidFill>
+                  <a:schemeClr val="tx1"/>
+                </a:solidFill>
+                <a:latin typeface="Arial" panose="020B0604020202020204" pitchFamily="34" charset="0"/>
+                <a:ea typeface="Arial" panose="020B0604020202020204" pitchFamily="34" charset="0"/>
+                <a:cs typeface="Arial" panose="020B0604020202020204" pitchFamily="34" charset="0"/>
+              </a:defRPr>
+            </a:lvl4pPr>
+            <a:lvl5pPr marL="2057400" indent="-228600">
+              <a:spcBef>
+                <a:spcPct val="20000"/>
+              </a:spcBef>
+              <a:buClr>
+                <a:schemeClr val="accent1"/>
+              </a:buClr>
+              <a:buFont typeface="Wingdings" panose="05000000000000000000" pitchFamily="2" charset="2"/>
+              <a:buChar char=""/>
+              <a:defRPr sz="2000">
+                <a:solidFill>
+                  <a:schemeClr val="tx1"/>
+                </a:solidFill>
+                <a:latin typeface="Arial" panose="020B0604020202020204" pitchFamily="34" charset="0"/>
+                <a:ea typeface="Arial" panose="020B0604020202020204" pitchFamily="34" charset="0"/>
+                <a:cs typeface="Arial" panose="020B0604020202020204" pitchFamily="34" charset="0"/>
+              </a:defRPr>
+            </a:lvl5pPr>
+            <a:lvl6pPr marL="2514600" indent="-228600" eaLnBrk="0" fontAlgn="base" hangingPunct="0">
+              <a:spcBef>
+                <a:spcPct val="20000"/>
+              </a:spcBef>
+              <a:spcAft>
+                <a:spcPct val="0"/>
+              </a:spcAft>
+              <a:buClr>
+                <a:schemeClr val="accent1"/>
+              </a:buClr>
+              <a:buFont typeface="Wingdings" panose="05000000000000000000" pitchFamily="2" charset="2"/>
+              <a:buChar char=""/>
+              <a:defRPr sz="2000">
+                <a:solidFill>
+                  <a:schemeClr val="tx1"/>
+                </a:solidFill>
+                <a:latin typeface="Arial" panose="020B0604020202020204" pitchFamily="34" charset="0"/>
+                <a:ea typeface="Arial" panose="020B0604020202020204" pitchFamily="34" charset="0"/>
+                <a:cs typeface="Arial" panose="020B0604020202020204" pitchFamily="34" charset="0"/>
+              </a:defRPr>
+            </a:lvl6pPr>
+            <a:lvl7pPr marL="2971800" indent="-228600" eaLnBrk="0" fontAlgn="base" hangingPunct="0">
+              <a:spcBef>
+                <a:spcPct val="20000"/>
+              </a:spcBef>
+              <a:spcAft>
+                <a:spcPct val="0"/>
+              </a:spcAft>
+              <a:buClr>
+                <a:schemeClr val="accent1"/>
+              </a:buClr>
+              <a:buFont typeface="Wingdings" panose="05000000000000000000" pitchFamily="2" charset="2"/>
+              <a:buChar char=""/>
+              <a:defRPr sz="2000">
+                <a:solidFill>
+                  <a:schemeClr val="tx1"/>
+                </a:solidFill>
+                <a:latin typeface="Arial" panose="020B0604020202020204" pitchFamily="34" charset="0"/>
+                <a:ea typeface="Arial" panose="020B0604020202020204" pitchFamily="34" charset="0"/>
+                <a:cs typeface="Arial" panose="020B0604020202020204" pitchFamily="34" charset="0"/>
+              </a:defRPr>
+            </a:lvl7pPr>
+            <a:lvl8pPr marL="3429000" indent="-228600" eaLnBrk="0" fontAlgn="base" hangingPunct="0">
+              <a:spcBef>
+                <a:spcPct val="20000"/>
+              </a:spcBef>
+              <a:spcAft>
+                <a:spcPct val="0"/>
+              </a:spcAft>
+              <a:buClr>
+                <a:schemeClr val="accent1"/>
+              </a:buClr>
+              <a:buFont typeface="Wingdings" panose="05000000000000000000" pitchFamily="2" charset="2"/>
+              <a:buChar char=""/>
+              <a:defRPr sz="2000">
+                <a:solidFill>
+                  <a:schemeClr val="tx1"/>
+                </a:solidFill>
+                <a:latin typeface="Arial" panose="020B0604020202020204" pitchFamily="34" charset="0"/>
+                <a:ea typeface="Arial" panose="020B0604020202020204" pitchFamily="34" charset="0"/>
+                <a:cs typeface="Arial" panose="020B0604020202020204" pitchFamily="34" charset="0"/>
+              </a:defRPr>
+            </a:lvl8pPr>
+            <a:lvl9pPr marL="3886200" indent="-228600" eaLnBrk="0" fontAlgn="base" hangingPunct="0">
+              <a:spcBef>
+                <a:spcPct val="20000"/>
+              </a:spcBef>
+              <a:spcAft>
+                <a:spcPct val="0"/>
+              </a:spcAft>
+              <a:buClr>
+                <a:schemeClr val="accent1"/>
+              </a:buClr>
+              <a:buFont typeface="Wingdings" panose="05000000000000000000" pitchFamily="2" charset="2"/>
+              <a:buChar char=""/>
+              <a:defRPr sz="2000">
+                <a:solidFill>
+                  <a:schemeClr val="tx1"/>
+                </a:solidFill>
+                <a:latin typeface="Arial" panose="020B0604020202020204" pitchFamily="34" charset="0"/>
+                <a:ea typeface="Arial" panose="020B0604020202020204" pitchFamily="34" charset="0"/>
+                <a:cs typeface="Arial" panose="020B0604020202020204" pitchFamily="34" charset="0"/>
+              </a:defRPr>
+            </a:lvl9pPr>
+          </a:lstStyle>
+          <a:p>
+            <a:pPr eaLnBrk="1" hangingPunct="1">
+              <a:spcBef>
+                <a:spcPct val="0"/>
+              </a:spcBef>
+              <a:buClrTx/>
+              <a:buFontTx/>
+              <a:buNone/>
+            </a:pPr>
+            <a:r>
+              <a:rPr lang="en-US" altLang="en-US" sz="1985" dirty="0">
+                <a:solidFill>
+                  <a:srgbClr val="292929"/>
+                </a:solidFill>
+                <a:latin typeface="charter"/>
+              </a:rPr>
+              <a:t>Multilayer perceptron</a:t>
+            </a:r>
+          </a:p>
+          <a:p>
+            <a:pPr eaLnBrk="1" hangingPunct="1">
+              <a:spcBef>
+                <a:spcPct val="0"/>
+              </a:spcBef>
+              <a:buClrTx/>
+              <a:buFontTx/>
+              <a:buNone/>
+            </a:pPr>
+            <a:r>
+              <a:rPr lang="en-US" altLang="en-US" sz="1985" dirty="0">
+                <a:solidFill>
+                  <a:srgbClr val="292929"/>
+                </a:solidFill>
+                <a:latin typeface="charter"/>
+              </a:rPr>
+              <a:t>Input layer of 128 neurons </a:t>
+            </a:r>
+          </a:p>
+          <a:p>
+            <a:pPr eaLnBrk="1" hangingPunct="1">
+              <a:spcBef>
+                <a:spcPct val="0"/>
+              </a:spcBef>
+              <a:buClrTx/>
+              <a:buFontTx/>
+              <a:buNone/>
+            </a:pPr>
+            <a:r>
+              <a:rPr lang="en-US" altLang="en-US" sz="1985" dirty="0">
+                <a:solidFill>
+                  <a:srgbClr val="292929"/>
+                </a:solidFill>
+                <a:latin typeface="charter"/>
+              </a:rPr>
+              <a:t>each neuron of the layer receives the 420x420 pixels values as input and assigns a weight per pixel value, which is 420x420 = 176400 weights per neuron </a:t>
+            </a:r>
+          </a:p>
+          <a:p>
+            <a:pPr eaLnBrk="1" hangingPunct="1">
+              <a:spcBef>
+                <a:spcPct val="0"/>
+              </a:spcBef>
+              <a:buClrTx/>
+              <a:buFontTx/>
+              <a:buNone/>
+            </a:pPr>
+            <a:r>
+              <a:rPr lang="en-US" altLang="en-US" sz="1985" dirty="0">
+                <a:solidFill>
+                  <a:srgbClr val="292929"/>
+                </a:solidFill>
+                <a:latin typeface="charter"/>
+              </a:rPr>
+              <a:t>Multiplied by total 128 neurons </a:t>
+            </a:r>
+          </a:p>
+          <a:p>
+            <a:pPr eaLnBrk="1" hangingPunct="1">
+              <a:spcBef>
+                <a:spcPct val="0"/>
+              </a:spcBef>
+              <a:buClrTx/>
+              <a:buFontTx/>
+              <a:buNone/>
+            </a:pPr>
+            <a:r>
+              <a:rPr lang="en-US" altLang="en-US" sz="1985" dirty="0">
+                <a:solidFill>
+                  <a:srgbClr val="292929"/>
+                </a:solidFill>
+                <a:latin typeface="charter"/>
+              </a:rPr>
+              <a:t>add 128 bias (one bias per neuron)</a:t>
+            </a:r>
+          </a:p>
+          <a:p>
+            <a:pPr eaLnBrk="1" hangingPunct="1">
+              <a:spcBef>
+                <a:spcPct val="0"/>
+              </a:spcBef>
+              <a:buClrTx/>
+              <a:buFontTx/>
+              <a:buNone/>
+            </a:pPr>
+            <a:endParaRPr lang="en-US" altLang="en-US" sz="1985" dirty="0">
+              <a:solidFill>
+                <a:srgbClr val="292929"/>
+              </a:solidFill>
+              <a:latin typeface="charter"/>
+            </a:endParaRPr>
+          </a:p>
+        </p:txBody>
+      </p:sp>
+      <p:sp>
+        <p:nvSpPr>
+          <p:cNvPr id="17414" name="TextBox 9">
+            <a:extLst>
+              <a:ext uri="{FF2B5EF4-FFF2-40B4-BE49-F238E27FC236}">
+                <a16:creationId xmlns:a16="http://schemas.microsoft.com/office/drawing/2014/main" id="{8C4D1145-7B8E-A47E-7888-5DAB815AAE7C}"/>
+              </a:ext>
+            </a:extLst>
+          </p:cNvPr>
+          <p:cNvSpPr txBox="1">
+            <a:spLocks noChangeArrowheads="1"/>
+          </p:cNvSpPr>
+          <p:nvPr/>
+        </p:nvSpPr>
+        <p:spPr bwMode="auto">
+          <a:xfrm>
+            <a:off x="5293924" y="3717360"/>
+            <a:ext cx="3780367" cy="1314206"/>
+          </a:xfrm>
+          <a:prstGeom prst="rect">
+            <a:avLst/>
+          </a:prstGeom>
+          <a:noFill/>
+          <a:ln>
+            <a:noFill/>
+          </a:ln>
+          <a:extLst>
+            <a:ext uri="{909E8E84-426E-40DD-AFC4-6F175D3DCCD1}">
+              <a14:hiddenFill xmlns:a14="http://schemas.microsoft.com/office/drawing/2010/main">
+                <a:solidFill>
+                  <a:srgbClr val="FFFFFF"/>
+                </a:solidFill>
+              </a14:hiddenFill>
+            </a:ext>
+            <a:ext uri="{91240B29-F687-4F45-9708-019B960494DF}">
+              <a14:hiddenLine xmlns:a14="http://schemas.microsoft.com/office/drawing/2010/main" w="9525">
+                <a:solidFill>
+                  <a:srgbClr val="000000"/>
+                </a:solidFill>
+                <a:miter lim="800000"/>
+                <a:headEnd/>
+                <a:tailEnd/>
+              </a14:hiddenLine>
+            </a:ext>
+          </a:extLst>
+        </p:spPr>
+        <p:txBody>
+          <a:bodyPr>
+            <a:spAutoFit/>
+          </a:bodyPr>
+          <a:lstStyle>
+            <a:lvl1pPr>
+              <a:spcBef>
+                <a:spcPct val="20000"/>
+              </a:spcBef>
+              <a:buClr>
+                <a:schemeClr val="accent1"/>
+              </a:buClr>
+              <a:buFont typeface="Wingdings" panose="05000000000000000000" pitchFamily="2" charset="2"/>
+              <a:buChar char="l"/>
+              <a:defRPr sz="3200">
+                <a:solidFill>
+                  <a:schemeClr val="tx1"/>
+                </a:solidFill>
+                <a:latin typeface="Arial" panose="020B0604020202020204" pitchFamily="34" charset="0"/>
+                <a:ea typeface="MS PGothic" panose="020B0600070205080204" pitchFamily="34" charset="-128"/>
+                <a:cs typeface="Arial" panose="020B0604020202020204" pitchFamily="34" charset="0"/>
+              </a:defRPr>
+            </a:lvl1pPr>
+            <a:lvl2pPr marL="742950" indent="-285750">
+              <a:spcBef>
+                <a:spcPct val="20000"/>
+              </a:spcBef>
+              <a:buClr>
+                <a:schemeClr val="accent1"/>
+              </a:buClr>
+              <a:buFont typeface="Wingdings" panose="05000000000000000000" pitchFamily="2" charset="2"/>
+              <a:buChar char="¡"/>
+              <a:defRPr sz="2700">
+                <a:solidFill>
+                  <a:schemeClr val="tx1"/>
+                </a:solidFill>
+                <a:latin typeface="Arial" panose="020B0604020202020204" pitchFamily="34" charset="0"/>
+                <a:ea typeface="Arial" panose="020B0604020202020204" pitchFamily="34" charset="0"/>
+                <a:cs typeface="Arial" panose="020B0604020202020204" pitchFamily="34" charset="0"/>
+              </a:defRPr>
+            </a:lvl2pPr>
+            <a:lvl3pPr marL="1143000" indent="-228600">
+              <a:spcBef>
+                <a:spcPct val="20000"/>
+              </a:spcBef>
+              <a:buClr>
+                <a:schemeClr val="accent1"/>
+              </a:buClr>
+              <a:buFont typeface="Wingdings" panose="05000000000000000000" pitchFamily="2" charset="2"/>
+              <a:buChar char="l"/>
+              <a:defRPr sz="2300">
+                <a:solidFill>
+                  <a:schemeClr val="tx1"/>
+                </a:solidFill>
+                <a:latin typeface="Arial" panose="020B0604020202020204" pitchFamily="34" charset="0"/>
+                <a:ea typeface="Arial" panose="020B0604020202020204" pitchFamily="34" charset="0"/>
+                <a:cs typeface="Arial" panose="020B0604020202020204" pitchFamily="34" charset="0"/>
+              </a:defRPr>
+            </a:lvl3pPr>
+            <a:lvl4pPr marL="1600200" indent="-228600">
+              <a:spcBef>
+                <a:spcPct val="20000"/>
+              </a:spcBef>
+              <a:buClr>
+                <a:schemeClr val="accent1"/>
+              </a:buClr>
+              <a:buChar char="•"/>
+              <a:defRPr sz="2000">
+                <a:solidFill>
+                  <a:schemeClr val="tx1"/>
+                </a:solidFill>
+                <a:latin typeface="Arial" panose="020B0604020202020204" pitchFamily="34" charset="0"/>
+                <a:ea typeface="Arial" panose="020B0604020202020204" pitchFamily="34" charset="0"/>
+                <a:cs typeface="Arial" panose="020B0604020202020204" pitchFamily="34" charset="0"/>
+              </a:defRPr>
+            </a:lvl4pPr>
+            <a:lvl5pPr marL="2057400" indent="-228600">
+              <a:spcBef>
+                <a:spcPct val="20000"/>
+              </a:spcBef>
+              <a:buClr>
+                <a:schemeClr val="accent1"/>
+              </a:buClr>
+              <a:buFont typeface="Wingdings" panose="05000000000000000000" pitchFamily="2" charset="2"/>
+              <a:buChar char=""/>
+              <a:defRPr sz="2000">
+                <a:solidFill>
+                  <a:schemeClr val="tx1"/>
+                </a:solidFill>
+                <a:latin typeface="Arial" panose="020B0604020202020204" pitchFamily="34" charset="0"/>
+                <a:ea typeface="Arial" panose="020B0604020202020204" pitchFamily="34" charset="0"/>
+                <a:cs typeface="Arial" panose="020B0604020202020204" pitchFamily="34" charset="0"/>
+              </a:defRPr>
+            </a:lvl5pPr>
+            <a:lvl6pPr marL="2514600" indent="-228600" eaLnBrk="0" fontAlgn="base" hangingPunct="0">
+              <a:spcBef>
+                <a:spcPct val="20000"/>
+              </a:spcBef>
+              <a:spcAft>
+                <a:spcPct val="0"/>
+              </a:spcAft>
+              <a:buClr>
+                <a:schemeClr val="accent1"/>
+              </a:buClr>
+              <a:buFont typeface="Wingdings" panose="05000000000000000000" pitchFamily="2" charset="2"/>
+              <a:buChar char=""/>
+              <a:defRPr sz="2000">
+                <a:solidFill>
+                  <a:schemeClr val="tx1"/>
+                </a:solidFill>
+                <a:latin typeface="Arial" panose="020B0604020202020204" pitchFamily="34" charset="0"/>
+                <a:ea typeface="Arial" panose="020B0604020202020204" pitchFamily="34" charset="0"/>
+                <a:cs typeface="Arial" panose="020B0604020202020204" pitchFamily="34" charset="0"/>
+              </a:defRPr>
+            </a:lvl6pPr>
+            <a:lvl7pPr marL="2971800" indent="-228600" eaLnBrk="0" fontAlgn="base" hangingPunct="0">
+              <a:spcBef>
+                <a:spcPct val="20000"/>
+              </a:spcBef>
+              <a:spcAft>
+                <a:spcPct val="0"/>
+              </a:spcAft>
+              <a:buClr>
+                <a:schemeClr val="accent1"/>
+              </a:buClr>
+              <a:buFont typeface="Wingdings" panose="05000000000000000000" pitchFamily="2" charset="2"/>
+              <a:buChar char=""/>
+              <a:defRPr sz="2000">
+                <a:solidFill>
+                  <a:schemeClr val="tx1"/>
+                </a:solidFill>
+                <a:latin typeface="Arial" panose="020B0604020202020204" pitchFamily="34" charset="0"/>
+                <a:ea typeface="Arial" panose="020B0604020202020204" pitchFamily="34" charset="0"/>
+                <a:cs typeface="Arial" panose="020B0604020202020204" pitchFamily="34" charset="0"/>
+              </a:defRPr>
+            </a:lvl7pPr>
+            <a:lvl8pPr marL="3429000" indent="-228600" eaLnBrk="0" fontAlgn="base" hangingPunct="0">
+              <a:spcBef>
+                <a:spcPct val="20000"/>
+              </a:spcBef>
+              <a:spcAft>
+                <a:spcPct val="0"/>
+              </a:spcAft>
+              <a:buClr>
+                <a:schemeClr val="accent1"/>
+              </a:buClr>
+              <a:buFont typeface="Wingdings" panose="05000000000000000000" pitchFamily="2" charset="2"/>
+              <a:buChar char=""/>
+              <a:defRPr sz="2000">
+                <a:solidFill>
+                  <a:schemeClr val="tx1"/>
+                </a:solidFill>
+                <a:latin typeface="Arial" panose="020B0604020202020204" pitchFamily="34" charset="0"/>
+                <a:ea typeface="Arial" panose="020B0604020202020204" pitchFamily="34" charset="0"/>
+                <a:cs typeface="Arial" panose="020B0604020202020204" pitchFamily="34" charset="0"/>
+              </a:defRPr>
+            </a:lvl8pPr>
+            <a:lvl9pPr marL="3886200" indent="-228600" eaLnBrk="0" fontAlgn="base" hangingPunct="0">
+              <a:spcBef>
+                <a:spcPct val="20000"/>
+              </a:spcBef>
+              <a:spcAft>
+                <a:spcPct val="0"/>
+              </a:spcAft>
+              <a:buClr>
+                <a:schemeClr val="accent1"/>
+              </a:buClr>
+              <a:buFont typeface="Wingdings" panose="05000000000000000000" pitchFamily="2" charset="2"/>
+              <a:buChar char=""/>
+              <a:defRPr sz="2000">
+                <a:solidFill>
+                  <a:schemeClr val="tx1"/>
+                </a:solidFill>
+                <a:latin typeface="Arial" panose="020B0604020202020204" pitchFamily="34" charset="0"/>
+                <a:ea typeface="Arial" panose="020B0604020202020204" pitchFamily="34" charset="0"/>
+                <a:cs typeface="Arial" panose="020B0604020202020204" pitchFamily="34" charset="0"/>
+              </a:defRPr>
+            </a:lvl9pPr>
+          </a:lstStyle>
+          <a:p>
+            <a:pPr eaLnBrk="1" hangingPunct="1">
+              <a:spcBef>
+                <a:spcPct val="0"/>
+              </a:spcBef>
+              <a:buClrTx/>
+              <a:buFontTx/>
+              <a:buNone/>
+            </a:pPr>
+            <a:r>
+              <a:rPr lang="en-US" altLang="en-US" sz="1985" dirty="0">
+                <a:solidFill>
+                  <a:srgbClr val="292929"/>
+                </a:solidFill>
+                <a:latin typeface="charter"/>
+              </a:rPr>
+              <a:t>This tiny model will have to learn more than </a:t>
+            </a:r>
+            <a:r>
+              <a:rPr lang="en-US" altLang="en-US" sz="1985" dirty="0">
+                <a:solidFill>
+                  <a:srgbClr val="FF0000"/>
+                </a:solidFill>
+                <a:latin typeface="charter"/>
+              </a:rPr>
+              <a:t>22 million parameters, for only 128 neurons and a single intermediate layer.</a:t>
+            </a:r>
+            <a:endParaRPr lang="en-US" altLang="en-US" sz="1985" dirty="0">
+              <a:solidFill>
+                <a:srgbClr val="FF0000"/>
+              </a:solidFill>
+            </a:endParaRPr>
+          </a:p>
+        </p:txBody>
+      </p:sp>
+    </p:spTree>
+  </p:cSld>
+  <p:clrMapOvr>
+    <a:masterClrMapping/>
+  </p:clrMapOvr>
+</p:sld>
+</file>
+
+<file path=ppt/slides/slide40.xml><?xml version="1.0" encoding="utf-8"?>
 <p:sld xmlns:a="http://schemas.openxmlformats.org/drawingml/2006/main" xmlns:r="http://schemas.openxmlformats.org/officeDocument/2006/relationships" xmlns:p="http://schemas.openxmlformats.org/presentationml/2006/main">
   <p:cSld>
     <p:spTree>
@@ -21454,7 +21271,7 @@
 </p:sld>
 </file>
 
-<file path=ppt/slides/slide42.xml><?xml version="1.0" encoding="utf-8"?>
+<file path=ppt/slides/slide41.xml><?xml version="1.0" encoding="utf-8"?>
 <p:sld xmlns:a="http://schemas.openxmlformats.org/drawingml/2006/main" xmlns:r="http://schemas.openxmlformats.org/officeDocument/2006/relationships" xmlns:p="http://schemas.openxmlformats.org/presentationml/2006/main">
   <p:cSld>
     <p:spTree>
@@ -21539,7 +21356,7 @@
 </p:sld>
 </file>
 
-<file path=ppt/slides/slide43.xml><?xml version="1.0" encoding="utf-8"?>
+<file path=ppt/slides/slide42.xml><?xml version="1.0" encoding="utf-8"?>
 <p:sld xmlns:a="http://schemas.openxmlformats.org/drawingml/2006/main" xmlns:r="http://schemas.openxmlformats.org/officeDocument/2006/relationships" xmlns:p="http://schemas.openxmlformats.org/presentationml/2006/main">
   <p:cSld>
     <p:spTree>
@@ -21657,7 +21474,7 @@
 </p:sld>
 </file>
 
-<file path=ppt/slides/slide44.xml><?xml version="1.0" encoding="utf-8"?>
+<file path=ppt/slides/slide43.xml><?xml version="1.0" encoding="utf-8"?>
 <p:sld xmlns:a="http://schemas.openxmlformats.org/drawingml/2006/main" xmlns:r="http://schemas.openxmlformats.org/officeDocument/2006/relationships" xmlns:p="http://schemas.openxmlformats.org/presentationml/2006/main">
   <p:cSld>
     <p:spTree>
@@ -21920,7 +21737,7 @@
 </p:sld>
 </file>
 
-<file path=ppt/slides/slide45.xml><?xml version="1.0" encoding="utf-8"?>
+<file path=ppt/slides/slide44.xml><?xml version="1.0" encoding="utf-8"?>
 <p:sld xmlns:a="http://schemas.openxmlformats.org/drawingml/2006/main" xmlns:r="http://schemas.openxmlformats.org/officeDocument/2006/relationships" xmlns:p="http://schemas.openxmlformats.org/presentationml/2006/main">
   <p:cSld>
     <p:spTree>

--- a/Part 1 Lectures/6_CNN_Intro.pptx
+++ b/Part 1 Lectures/6_CNN_Intro.pptx
@@ -169,15 +169,38 @@
 </p:presentation>
 </file>
 
+<file path=ppt/revisionInfo.xml><?xml version="1.0" encoding="utf-8"?>
+<p1510:revInfo xmlns:a="http://schemas.openxmlformats.org/drawingml/2006/main" xmlns:r="http://schemas.openxmlformats.org/officeDocument/2006/relationships" xmlns:p1510="http://schemas.microsoft.com/office/powerpoint/2015/10/main">
+  <p1510:revLst>
+    <p1510:client id="{FD1A1A19-F963-437F-A43B-F9F18B08D8E9}" v="1" dt="2025-09-28T18:43:03.410"/>
+  </p1510:revLst>
+</p1510:revInfo>
+</file>
+
 <file path=ppt/changesInfos/changesInfo1.xml><?xml version="1.0" encoding="utf-8"?>
 <pc:chgInfo xmlns:a="http://schemas.openxmlformats.org/drawingml/2006/main" xmlns:r="http://schemas.openxmlformats.org/officeDocument/2006/relationships" xmlns:ac="http://schemas.microsoft.com/office/drawing/2013/main/command" xmlns:pc="http://schemas.microsoft.com/office/powerpoint/2013/main/command">
   <pc:docChgLst>
     <pc:chgData name="Israel Trejo" userId="94abe8331a44785d" providerId="LiveId" clId="{C64EC362-DB82-4CB5-B399-A3CE20D8262C}"/>
-    <pc:docChg chg="delSld">
-      <pc:chgData name="Israel Trejo" userId="94abe8331a44785d" providerId="LiveId" clId="{C64EC362-DB82-4CB5-B399-A3CE20D8262C}" dt="2025-09-20T21:00:45.523" v="0" actId="2696"/>
+    <pc:docChg chg="delSld modSld">
+      <pc:chgData name="Israel Trejo" userId="94abe8331a44785d" providerId="LiveId" clId="{C64EC362-DB82-4CB5-B399-A3CE20D8262C}" dt="2025-09-28T18:43:03.405" v="1" actId="1076"/>
       <pc:docMkLst>
         <pc:docMk/>
       </pc:docMkLst>
+      <pc:sldChg chg="modSp">
+        <pc:chgData name="Israel Trejo" userId="94abe8331a44785d" providerId="LiveId" clId="{C64EC362-DB82-4CB5-B399-A3CE20D8262C}" dt="2025-09-28T18:43:03.405" v="1" actId="1076"/>
+        <pc:sldMkLst>
+          <pc:docMk/>
+          <pc:sldMk cId="0" sldId="435"/>
+        </pc:sldMkLst>
+        <pc:picChg chg="mod">
+          <ac:chgData name="Israel Trejo" userId="94abe8331a44785d" providerId="LiveId" clId="{C64EC362-DB82-4CB5-B399-A3CE20D8262C}" dt="2025-09-28T18:43:03.405" v="1" actId="1076"/>
+          <ac:picMkLst>
+            <pc:docMk/>
+            <pc:sldMk cId="0" sldId="435"/>
+            <ac:picMk id="23560" creationId="{AAEFC6CF-CDAA-3344-4CA7-A14FAE8F0DAB}"/>
+          </ac:picMkLst>
+        </pc:picChg>
+      </pc:sldChg>
       <pc:sldChg chg="del">
         <pc:chgData name="Israel Trejo" userId="94abe8331a44785d" providerId="LiveId" clId="{C64EC362-DB82-4CB5-B399-A3CE20D8262C}" dt="2025-09-20T21:00:45.523" v="0" actId="2696"/>
         <pc:sldMkLst>
@@ -272,7 +295,7 @@
           <a:p>
             <a:fld id="{FC78DA6D-BA35-47CD-BB0B-F04D34A1F301}" type="datetimeFigureOut">
               <a:rPr lang="en-US" smtClean="0"/>
-              <a:t>9/20/2025</a:t>
+              <a:t>9/28/2025</a:t>
             </a:fld>
             <a:endParaRPr lang="en-US"/>
           </a:p>
@@ -2204,7 +2227,7 @@
                 </a:solidFill>
               </a:rPr>
               <a:pPr defTabSz="756117"/>
-              <a:t>9/20/2025</a:t>
+              <a:t>9/28/2025</a:t>
             </a:fld>
             <a:endParaRPr lang="en-US" sz="1488">
               <a:solidFill>
@@ -4516,7 +4539,7 @@
               <a:buNone/>
             </a:pPr>
             <a:r>
-              <a:rPr lang="en-US" altLang="en-US" sz="1488" b="1">
+              <a:rPr lang="en-US" altLang="en-US" sz="1488" b="1" dirty="0">
                 <a:solidFill>
                   <a:srgbClr val="292929"/>
                 </a:solidFill>
@@ -4525,7 +4548,7 @@
               <a:t>n</a:t>
             </a:r>
             <a:r>
-              <a:rPr lang="en-US" altLang="en-US" sz="1488">
+              <a:rPr lang="en-US" altLang="en-US" sz="1488" dirty="0">
                 <a:solidFill>
                   <a:srgbClr val="292929"/>
                 </a:solidFill>
@@ -4544,7 +4567,7 @@
               <a:buNone/>
             </a:pPr>
             <a:r>
-              <a:rPr lang="en-US" altLang="en-US" sz="1488" b="1">
+              <a:rPr lang="en-US" altLang="en-US" sz="1488" b="1" dirty="0">
                 <a:solidFill>
                   <a:srgbClr val="292929"/>
                 </a:solidFill>
@@ -4553,7 +4576,7 @@
               <a:t>p</a:t>
             </a:r>
             <a:r>
-              <a:rPr lang="en-US" altLang="en-US" sz="1488">
+              <a:rPr lang="en-US" altLang="en-US" sz="1488" dirty="0">
                 <a:solidFill>
                   <a:srgbClr val="292929"/>
                 </a:solidFill>
@@ -4561,7 +4584,7 @@
               </a:rPr>
               <a:t> the size of the filter. For example, for an initial 120x120px image and with a 5x5 kernel, the featured is sized 116x116px, </a:t>
             </a:r>
-            <a:endParaRPr lang="en-US" altLang="en-US" sz="1488"/>
+            <a:endParaRPr lang="en-US" altLang="en-US" sz="1488" dirty="0"/>
           </a:p>
         </p:txBody>
       </p:sp>
@@ -4800,7 +4823,7 @@
               <a:buNone/>
             </a:pPr>
             <a:r>
-              <a:rPr lang="en-US" altLang="en-US" sz="1488">
+              <a:rPr lang="en-US" altLang="en-US" sz="1488" dirty="0">
                 <a:solidFill>
                   <a:srgbClr val="292929"/>
                 </a:solidFill>
@@ -4808,7 +4831,7 @@
               </a:rPr>
               <a:t>What If we want to output a feature map with the same size as the input image</a:t>
             </a:r>
-            <a:endParaRPr lang="en-US" altLang="en-US" sz="1488"/>
+            <a:endParaRPr lang="en-US" altLang="en-US" sz="1488" dirty="0"/>
           </a:p>
         </p:txBody>
       </p:sp>
@@ -5047,7 +5070,7 @@
               <a:buNone/>
             </a:pPr>
             <a:r>
-              <a:rPr lang="en-US" altLang="en-US" sz="1488">
+              <a:rPr lang="en-US" altLang="en-US" sz="1488" dirty="0">
                 <a:solidFill>
                   <a:srgbClr val="292929"/>
                 </a:solidFill>
@@ -5056,7 +5079,7 @@
               <a:t>Padding </a:t>
             </a:r>
             <a:r>
-              <a:rPr lang="en-US" altLang="en-US" sz="1488">
+              <a:rPr lang="en-US" altLang="en-US" sz="1488" dirty="0">
                 <a:solidFill>
                   <a:srgbClr val="292929"/>
                 </a:solidFill>
@@ -5066,7 +5089,7 @@
               <a:t> </a:t>
             </a:r>
             <a:r>
-              <a:rPr lang="en-US" altLang="en-US" sz="1488">
+              <a:rPr lang="en-US" altLang="en-US" sz="1488" dirty="0">
                 <a:solidFill>
                   <a:srgbClr val="292929"/>
                 </a:solidFill>
@@ -5074,7 +5097,7 @@
               </a:rPr>
               <a:t>add zeros around the input image before the convolution, the input image is “padded with zeros”</a:t>
             </a:r>
-            <a:endParaRPr lang="en-US" altLang="en-US" sz="1488"/>
+            <a:endParaRPr lang="en-US" altLang="en-US" sz="1488" dirty="0"/>
           </a:p>
         </p:txBody>
       </p:sp>
@@ -5313,7 +5336,7 @@
               <a:buNone/>
             </a:pPr>
             <a:r>
-              <a:rPr lang="en-US" altLang="en-US" sz="1488">
+              <a:rPr lang="en-US" altLang="en-US" sz="1488" dirty="0">
                 <a:solidFill>
                   <a:srgbClr val="292929"/>
                 </a:solidFill>
@@ -5321,7 +5344,7 @@
               </a:rPr>
               <a:t>6x6px with a 3x3 convolution filter. In the equation given above we then have p = 3, m = 6 so it comes that n = 6 + 3–1 = 8. Thus, it is necessary to have an input image sized 8x8px, which means we must add zeros all around the original matrix image to reach a size of 8x8px</a:t>
             </a:r>
-            <a:endParaRPr lang="en-US" altLang="en-US" sz="1488"/>
+            <a:endParaRPr lang="en-US" altLang="en-US" sz="1488" dirty="0"/>
           </a:p>
         </p:txBody>
       </p:sp>
@@ -5354,7 +5377,7 @@
         </p:blipFill>
         <p:spPr bwMode="auto">
           <a:xfrm>
-            <a:off x="6401782" y="3335387"/>
+            <a:off x="6542889" y="3394454"/>
             <a:ext cx="2055574" cy="2276096"/>
           </a:xfrm>
           <a:prstGeom prst="rect">
